--- a/src/assets/slide_sample.pptx
+++ b/src/assets/slide_sample.pptx
@@ -278,7 +278,7 @@
       </p15:sldGuideLst>
     </p:ext>
     <p:ext uri="GoogleSlidesCustomDataVersion2">
-      <go:slidesCustomData xmlns:go="http://customooxmlschemas.google.com/" xmlns:ahyp="http://schemas.microsoft.com/office/drawing/2018/hyperlinkcolor" xmlns:p15="http://schemas.microsoft.com/office/powerpoint/2012/main" xmlns:p14="http://schemas.microsoft.com/office/powerpoint/2010/main" xmlns:com="http://schemas.openxmlformats.org/drawingml/2006/compatibility" xmlns:pvml="urn:schemas-microsoft-com:office:powerpoint" xmlns:v="urn:schemas-microsoft-com:vml" xmlns:o="urn:schemas-microsoft-com:office:office" xmlns:dgm="http://schemas.openxmlformats.org/drawingml/2006/diagram" xmlns:c="http://schemas.openxmlformats.org/drawingml/2006/chart" xmlns:mv="urn:schemas-microsoft-com:mac:vml" xmlns:mc="http://schemas.openxmlformats.org/markup-compatibility/2006" xmlns="" r:id="rId8" roundtripDataSignature="AMtx7mj+3mxE5o7GXHaj57Ss1rmUYwTV0A=="/>
+      <go:slidesCustomData xmlns="" xmlns:mc="http://schemas.openxmlformats.org/markup-compatibility/2006" xmlns:mv="urn:schemas-microsoft-com:mac:vml" xmlns:c="http://schemas.openxmlformats.org/drawingml/2006/chart" xmlns:dgm="http://schemas.openxmlformats.org/drawingml/2006/diagram" xmlns:o="urn:schemas-microsoft-com:office:office" xmlns:v="urn:schemas-microsoft-com:vml" xmlns:pvml="urn:schemas-microsoft-com:office:powerpoint" xmlns:com="http://schemas.openxmlformats.org/drawingml/2006/compatibility" xmlns:p14="http://schemas.microsoft.com/office/powerpoint/2010/main" xmlns:p15="http://schemas.microsoft.com/office/powerpoint/2012/main" xmlns:ahyp="http://schemas.microsoft.com/office/drawing/2018/hyperlinkcolor" xmlns:go="http://customooxmlschemas.google.com/" r:id="rId8" roundtripDataSignature="AMtx7mj+3mxE5o7GXHaj57Ss1rmUYwTV0A=="/>
     </p:ext>
   </p:extLst>
 </p:presentation>
@@ -307,31 +307,31 @@
         <p15:threadingInfo xmlns:p15="http://schemas.microsoft.com/office/powerpoint/2012/main" timeZoneBias="0"/>
       </p:ext>
       <p:ext uri="http://customooxmlschemas.google.com/">
-        <go:slidesCustomData xmlns:go="http://customooxmlschemas.google.com/" xmlns:ahyp="http://schemas.microsoft.com/office/drawing/2018/hyperlinkcolor" xmlns:p15="http://schemas.microsoft.com/office/powerpoint/2012/main" xmlns:p14="http://schemas.microsoft.com/office/powerpoint/2010/main" xmlns:com="http://schemas.openxmlformats.org/drawingml/2006/compatibility" xmlns:pvml="urn:schemas-microsoft-com:office:powerpoint" xmlns:v="urn:schemas-microsoft-com:vml" xmlns:o="urn:schemas-microsoft-com:office:office" xmlns:dgm="http://schemas.openxmlformats.org/drawingml/2006/diagram" xmlns:c="http://schemas.openxmlformats.org/drawingml/2006/chart" xmlns:mv="urn:schemas-microsoft-com:mac:vml" xmlns:mc="http://schemas.openxmlformats.org/markup-compatibility/2006" xmlns="" commentPostId="AAAByePcYt0"/>
+        <go:slidesCustomData xmlns="" xmlns:mc="http://schemas.openxmlformats.org/markup-compatibility/2006" xmlns:mv="urn:schemas-microsoft-com:mac:vml" xmlns:c="http://schemas.openxmlformats.org/drawingml/2006/chart" xmlns:dgm="http://schemas.openxmlformats.org/drawingml/2006/diagram" xmlns:o="urn:schemas-microsoft-com:office:office" xmlns:v="urn:schemas-microsoft-com:vml" xmlns:pvml="urn:schemas-microsoft-com:office:powerpoint" xmlns:com="http://schemas.openxmlformats.org/drawingml/2006/compatibility" xmlns:p14="http://schemas.microsoft.com/office/powerpoint/2010/main" xmlns:p15="http://schemas.microsoft.com/office/powerpoint/2012/main" xmlns:ahyp="http://schemas.microsoft.com/office/drawing/2018/hyperlinkcolor" xmlns:go="http://customooxmlschemas.google.com/" commentPostId="AAAByePcYt0"/>
       </p:ext>
     </p:extLst>
   </p:cm>
   <p:cm authorId="0" dt="2026-01-11T13:51:28.435" idx="4">
-    <p:pos x="398" y="1615"/>
+    <p:pos x="241" y="1672"/>
     <p:text>Столбец Площадь ОКС</p:text>
-    <p:extLst>
+    <p:extLst mod="1">
       <p:ext uri="{C676402C-5697-4E1C-873F-D02D1690AC5C}">
         <p15:threadingInfo xmlns:p15="http://schemas.microsoft.com/office/powerpoint/2012/main" timeZoneBias="0"/>
       </p:ext>
       <p:ext uri="http://customooxmlschemas.google.com/">
-        <go:slidesCustomData xmlns:go="http://customooxmlschemas.google.com/" xmlns:ahyp="http://schemas.microsoft.com/office/drawing/2018/hyperlinkcolor" xmlns:p15="http://schemas.microsoft.com/office/powerpoint/2012/main" xmlns:p14="http://schemas.microsoft.com/office/powerpoint/2010/main" xmlns:com="http://schemas.openxmlformats.org/drawingml/2006/compatibility" xmlns:pvml="urn:schemas-microsoft-com:office:powerpoint" xmlns:v="urn:schemas-microsoft-com:vml" xmlns:o="urn:schemas-microsoft-com:office:office" xmlns:dgm="http://schemas.openxmlformats.org/drawingml/2006/diagram" xmlns:c="http://schemas.openxmlformats.org/drawingml/2006/chart" xmlns:mv="urn:schemas-microsoft-com:mac:vml" xmlns:mc="http://schemas.openxmlformats.org/markup-compatibility/2006" xmlns="" commentPostId="AAAByePcYt4"/>
+        <go:slidesCustomData xmlns="" xmlns:mc="http://schemas.openxmlformats.org/markup-compatibility/2006" xmlns:mv="urn:schemas-microsoft-com:mac:vml" xmlns:c="http://schemas.openxmlformats.org/drawingml/2006/chart" xmlns:dgm="http://schemas.openxmlformats.org/drawingml/2006/diagram" xmlns:o="urn:schemas-microsoft-com:office:office" xmlns:v="urn:schemas-microsoft-com:vml" xmlns:pvml="urn:schemas-microsoft-com:office:powerpoint" xmlns:com="http://schemas.openxmlformats.org/drawingml/2006/compatibility" xmlns:p14="http://schemas.microsoft.com/office/powerpoint/2010/main" xmlns:p15="http://schemas.microsoft.com/office/powerpoint/2012/main" xmlns:ahyp="http://schemas.microsoft.com/office/drawing/2018/hyperlinkcolor" xmlns:go="http://customooxmlschemas.google.com/" commentPostId="AAAByePcYt4"/>
       </p:ext>
     </p:extLst>
   </p:cm>
   <p:cm authorId="0" dt="2026-01-11T13:52:12.853" idx="3">
-    <p:pos x="398" y="1515"/>
+    <p:pos x="179" y="1524"/>
     <p:text>Столбец Площадь ЗУ</p:text>
-    <p:extLst>
+    <p:extLst mod="1">
       <p:ext uri="{C676402C-5697-4E1C-873F-D02D1690AC5C}">
         <p15:threadingInfo xmlns:p15="http://schemas.microsoft.com/office/powerpoint/2012/main" timeZoneBias="0"/>
       </p:ext>
       <p:ext uri="http://customooxmlschemas.google.com/">
-        <go:slidesCustomData xmlns:go="http://customooxmlschemas.google.com/" xmlns:ahyp="http://schemas.microsoft.com/office/drawing/2018/hyperlinkcolor" xmlns:p15="http://schemas.microsoft.com/office/powerpoint/2012/main" xmlns:p14="http://schemas.microsoft.com/office/powerpoint/2010/main" xmlns:com="http://schemas.openxmlformats.org/drawingml/2006/compatibility" xmlns:pvml="urn:schemas-microsoft-com:office:powerpoint" xmlns:v="urn:schemas-microsoft-com:vml" xmlns:o="urn:schemas-microsoft-com:office:office" xmlns:dgm="http://schemas.openxmlformats.org/drawingml/2006/diagram" xmlns:c="http://schemas.openxmlformats.org/drawingml/2006/chart" xmlns:mv="urn:schemas-microsoft-com:mac:vml" xmlns:mc="http://schemas.openxmlformats.org/markup-compatibility/2006" xmlns="" commentPostId="AAAByePcet0"/>
+        <go:slidesCustomData xmlns="" xmlns:mc="http://schemas.openxmlformats.org/markup-compatibility/2006" xmlns:mv="urn:schemas-microsoft-com:mac:vml" xmlns:c="http://schemas.openxmlformats.org/drawingml/2006/chart" xmlns:dgm="http://schemas.openxmlformats.org/drawingml/2006/diagram" xmlns:o="urn:schemas-microsoft-com:office:office" xmlns:v="urn:schemas-microsoft-com:vml" xmlns:pvml="urn:schemas-microsoft-com:office:powerpoint" xmlns:com="http://schemas.openxmlformats.org/drawingml/2006/compatibility" xmlns:p14="http://schemas.microsoft.com/office/powerpoint/2010/main" xmlns:p15="http://schemas.microsoft.com/office/powerpoint/2012/main" xmlns:ahyp="http://schemas.microsoft.com/office/drawing/2018/hyperlinkcolor" xmlns:go="http://customooxmlschemas.google.com/" commentPostId="AAAByePcet0"/>
       </p:ext>
     </p:extLst>
   </p:cm>
@@ -343,7 +343,7 @@
         <p15:threadingInfo xmlns:p15="http://schemas.microsoft.com/office/powerpoint/2012/main" timeZoneBias="0"/>
       </p:ext>
       <p:ext uri="http://customooxmlschemas.google.com/">
-        <go:slidesCustomData xmlns:go="http://customooxmlschemas.google.com/" xmlns:ahyp="http://schemas.microsoft.com/office/drawing/2018/hyperlinkcolor" xmlns:p15="http://schemas.microsoft.com/office/powerpoint/2012/main" xmlns:p14="http://schemas.microsoft.com/office/powerpoint/2010/main" xmlns:com="http://schemas.openxmlformats.org/drawingml/2006/compatibility" xmlns:pvml="urn:schemas-microsoft-com:office:powerpoint" xmlns:v="urn:schemas-microsoft-com:vml" xmlns:o="urn:schemas-microsoft-com:office:office" xmlns:dgm="http://schemas.openxmlformats.org/drawingml/2006/diagram" xmlns:c="http://schemas.openxmlformats.org/drawingml/2006/chart" xmlns:mv="urn:schemas-microsoft-com:mac:vml" xmlns:mc="http://schemas.openxmlformats.org/markup-compatibility/2006" xmlns="" commentPostId="AAAByePcet4"/>
+        <go:slidesCustomData xmlns="" xmlns:mc="http://schemas.openxmlformats.org/markup-compatibility/2006" xmlns:mv="urn:schemas-microsoft-com:mac:vml" xmlns:c="http://schemas.openxmlformats.org/drawingml/2006/chart" xmlns:dgm="http://schemas.openxmlformats.org/drawingml/2006/diagram" xmlns:o="urn:schemas-microsoft-com:office:office" xmlns:v="urn:schemas-microsoft-com:vml" xmlns:pvml="urn:schemas-microsoft-com:office:powerpoint" xmlns:com="http://schemas.openxmlformats.org/drawingml/2006/compatibility" xmlns:p14="http://schemas.microsoft.com/office/powerpoint/2010/main" xmlns:p15="http://schemas.microsoft.com/office/powerpoint/2012/main" xmlns:ahyp="http://schemas.microsoft.com/office/drawing/2018/hyperlinkcolor" xmlns:go="http://customooxmlschemas.google.com/" commentPostId="AAAByePcet4"/>
       </p:ext>
     </p:extLst>
   </p:cm>
@@ -11944,6 +11944,96 @@
           <a:chExt cx="0" cy="0"/>
         </a:xfrm>
       </p:grpSpPr>
+      <p:sp>
+        <p:nvSpPr>
+          <p:cNvPr id="9" name="TextBox 8">
+            <a:extLst>
+              <a:ext uri="{FF2B5EF4-FFF2-40B4-BE49-F238E27FC236}">
+                <a16:creationId xmlns:a16="http://schemas.microsoft.com/office/drawing/2014/main" id="{91B0F1CC-38FC-678C-72FC-3893A3684A4B}"/>
+              </a:ext>
+            </a:extLst>
+          </p:cNvPr>
+          <p:cNvSpPr txBox="1"/>
+          <p:nvPr/>
+        </p:nvSpPr>
+        <p:spPr>
+          <a:xfrm>
+            <a:off x="717949" y="2813195"/>
+            <a:ext cx="1503874" cy="312073"/>
+          </a:xfrm>
+          <a:prstGeom prst="rect">
+            <a:avLst/>
+          </a:prstGeom>
+          <a:noFill/>
+        </p:spPr>
+        <p:txBody>
+          <a:bodyPr wrap="square">
+            <a:spAutoFit/>
+          </a:bodyPr>
+          <a:lstStyle/>
+          <a:p>
+            <a:pPr marL="0" marR="0" lvl="0" indent="0" algn="l" rtl="0">
+              <a:spcBef>
+                <a:spcPts val="0"/>
+              </a:spcBef>
+              <a:spcAft>
+                <a:spcPts val="0"/>
+              </a:spcAft>
+              <a:buNone/>
+            </a:pPr>
+            <a:r>
+              <a:rPr lang="en-US" sz="857" b="1" dirty="0">
+                <a:solidFill>
+                  <a:schemeClr val="lt1"/>
+                </a:solidFill>
+                <a:extLst>
+                  <a:ext uri="http://customooxmlschemas.google.com/">
+                    <go:slidesCustomData xmlns:go="http://customooxmlschemas.google.com/" xmlns:ahyp="http://schemas.microsoft.com/office/drawing/2018/hyperlinkcolor" xmlns:p15="http://schemas.microsoft.com/office/powerpoint/2012/main" xmlns:p14="http://schemas.microsoft.com/office/powerpoint/2010/main" xmlns:com="http://schemas.openxmlformats.org/drawingml/2006/compatibility" xmlns:pvml="urn:schemas-microsoft-com:office:powerpoint" xmlns:v="urn:schemas-microsoft-com:vml" xmlns:o="urn:schemas-microsoft-com:office:office" xmlns:dgm="http://schemas.openxmlformats.org/drawingml/2006/diagram" xmlns:c="http://schemas.openxmlformats.org/drawingml/2006/chart" xmlns:mv="urn:schemas-microsoft-com:mac:vml" xmlns:mc="http://schemas.openxmlformats.org/markup-compatibility/2006" xmlns="" textRoundtripDataId="2"/>
+                  </a:ext>
+                </a:extLst>
+              </a:rPr>
+              <a:t>          </a:t>
+            </a:r>
+            <a:r>
+              <a:rPr lang="ru-RU" sz="857" b="1" dirty="0">
+                <a:solidFill>
+                  <a:schemeClr val="lt1"/>
+                </a:solidFill>
+                <a:extLst>
+                  <a:ext uri="http://customooxmlschemas.google.com/">
+                    <go:slidesCustomData xmlns:go="http://customooxmlschemas.google.com/" xmlns:ahyp="http://schemas.microsoft.com/office/drawing/2018/hyperlinkcolor" xmlns:p15="http://schemas.microsoft.com/office/powerpoint/2012/main" xmlns:p14="http://schemas.microsoft.com/office/powerpoint/2010/main" xmlns:com="http://schemas.openxmlformats.org/drawingml/2006/compatibility" xmlns:pvml="urn:schemas-microsoft-com:office:powerpoint" xmlns:v="urn:schemas-microsoft-com:vml" xmlns:o="urn:schemas-microsoft-com:office:office" xmlns:dgm="http://schemas.openxmlformats.org/drawingml/2006/diagram" xmlns:c="http://schemas.openxmlformats.org/drawingml/2006/chart" xmlns:mv="urn:schemas-microsoft-com:mac:vml" xmlns:mc="http://schemas.openxmlformats.org/markup-compatibility/2006" xmlns="" textRoundtripDataId="2"/>
+                  </a:ext>
+                </a:extLst>
+              </a:rPr>
+              <a:t>га</a:t>
+            </a:r>
+          </a:p>
+          <a:p>
+            <a:pPr marL="0" marR="0" lvl="0" indent="0" algn="l" rtl="0">
+              <a:spcBef>
+                <a:spcPts val="0"/>
+              </a:spcBef>
+              <a:spcAft>
+                <a:spcPts val="0"/>
+              </a:spcAft>
+              <a:buNone/>
+            </a:pPr>
+            <a:r>
+              <a:rPr lang="ru-RU" sz="571" dirty="0">
+                <a:solidFill>
+                  <a:schemeClr val="lt1"/>
+                </a:solidFill>
+                <a:extLst>
+                  <a:ext uri="http://customooxmlschemas.google.com/">
+                    <go:slidesCustomData xmlns:go="http://customooxmlschemas.google.com/" xmlns:ahyp="http://schemas.microsoft.com/office/drawing/2018/hyperlinkcolor" xmlns:p15="http://schemas.microsoft.com/office/powerpoint/2012/main" xmlns:p14="http://schemas.microsoft.com/office/powerpoint/2010/main" xmlns:com="http://schemas.openxmlformats.org/drawingml/2006/compatibility" xmlns:pvml="urn:schemas-microsoft-com:office:powerpoint" xmlns:v="urn:schemas-microsoft-com:vml" xmlns:o="urn:schemas-microsoft-com:office:office" xmlns:dgm="http://schemas.openxmlformats.org/drawingml/2006/diagram" xmlns:c="http://schemas.openxmlformats.org/drawingml/2006/chart" xmlns:mv="urn:schemas-microsoft-com:mac:vml" xmlns:mc="http://schemas.openxmlformats.org/markup-compatibility/2006" xmlns="" textRoundtripDataId="5"/>
+                  </a:ext>
+                </a:extLst>
+              </a:rPr>
+              <a:t>площадь ЗУ</a:t>
+            </a:r>
+          </a:p>
+        </p:txBody>
+      </p:sp>
       <p:pic>
         <p:nvPicPr>
           <p:cNvPr id="88" name="MapImage"/>
@@ -12074,7 +12164,7 @@
               <a:buNone/>
             </a:pPr>
             <a:r>
-              <a:rPr lang="ru-RU" sz="1200" b="1">
+              <a:rPr lang="ru-RU" sz="1200" b="1" dirty="0">
                 <a:solidFill>
                   <a:schemeClr val="lt1"/>
                 </a:solidFill>
@@ -12086,7 +12176,7 @@
               <a:t>XX</a:t>
             </a:r>
             <a:br>
-              <a:rPr lang="ru-RU" sz="1600" b="1">
+              <a:rPr lang="ru-RU" sz="1600" b="1" dirty="0">
                 <a:solidFill>
                   <a:schemeClr val="lt1"/>
                 </a:solidFill>
@@ -12096,7 +12186,7 @@
                 <a:sym typeface="Arial"/>
               </a:rPr>
             </a:br>
-            <a:endParaRPr sz="1600" b="1">
+            <a:endParaRPr sz="1600" b="1" dirty="0">
               <a:solidFill>
                 <a:schemeClr val="lt1"/>
               </a:solidFill>
@@ -12220,14 +12310,14 @@
       </p:sp>
       <p:sp>
         <p:nvSpPr>
-          <p:cNvPr id="93" name="Google Shape;93;p2"/>
+          <p:cNvPr id="93" name="zu_area_ga"/>
           <p:cNvSpPr txBox="1"/>
           <p:nvPr/>
         </p:nvSpPr>
         <p:spPr>
           <a:xfrm>
             <a:off x="710173" y="2752855"/>
-            <a:ext cx="1375500" cy="378300"/>
+            <a:ext cx="1375500" cy="290167"/>
           </a:xfrm>
           <a:prstGeom prst="rect">
             <a:avLst/>
@@ -12253,7 +12343,7 @@
               <a:buNone/>
             </a:pPr>
             <a:r>
-              <a:rPr lang="ru-RU" sz="1286" b="1">
+              <a:rPr lang="ru-RU" sz="1286" b="1" dirty="0">
                 <a:solidFill>
                   <a:schemeClr val="lt1"/>
                 </a:solidFill>
@@ -12264,63 +12354,7 @@
               </a:rPr>
               <a:t>0,5</a:t>
             </a:r>
-            <a:r>
-              <a:rPr lang="ru-RU" sz="714" b="1">
-                <a:solidFill>
-                  <a:schemeClr val="lt1"/>
-                </a:solidFill>
-                <a:latin typeface="Arial"/>
-                <a:ea typeface="Arial"/>
-                <a:cs typeface="Arial"/>
-                <a:sym typeface="Arial"/>
-              </a:rPr>
-              <a:t> </a:t>
-            </a:r>
-            <a:r>
-              <a:rPr lang="ru-RU" sz="857" b="1">
-                <a:solidFill>
-                  <a:schemeClr val="lt1"/>
-                </a:solidFill>
-                <a:latin typeface="Arial"/>
-                <a:ea typeface="Arial"/>
-                <a:cs typeface="Arial"/>
-                <a:sym typeface="Arial"/>
-              </a:rPr>
-              <a:t>га</a:t>
-            </a:r>
-            <a:endParaRPr sz="857" b="1" baseline="30000">
-              <a:solidFill>
-                <a:schemeClr val="lt1"/>
-              </a:solidFill>
-              <a:latin typeface="Arial"/>
-              <a:ea typeface="Arial"/>
-              <a:cs typeface="Arial"/>
-              <a:sym typeface="Arial"/>
-            </a:endParaRPr>
-          </a:p>
-          <a:p>
-            <a:pPr marL="0" marR="0" lvl="0" indent="0" algn="l" rtl="0">
-              <a:spcBef>
-                <a:spcPts val="0"/>
-              </a:spcBef>
-              <a:spcAft>
-                <a:spcPts val="0"/>
-              </a:spcAft>
-              <a:buNone/>
-            </a:pPr>
-            <a:r>
-              <a:rPr lang="ru-RU" sz="571">
-                <a:solidFill>
-                  <a:schemeClr val="lt1"/>
-                </a:solidFill>
-                <a:latin typeface="Arial"/>
-                <a:ea typeface="Arial"/>
-                <a:cs typeface="Arial"/>
-                <a:sym typeface="Arial"/>
-              </a:rPr>
-              <a:t>площадь ЗУ</a:t>
-            </a:r>
-            <a:endParaRPr sz="571">
+            <a:endParaRPr sz="571" dirty="0">
               <a:solidFill>
                 <a:schemeClr val="lt1"/>
               </a:solidFill>
@@ -12334,14 +12368,14 @@
       </p:sp>
       <p:sp>
         <p:nvSpPr>
-          <p:cNvPr id="94" name="Google Shape;94;p2"/>
+          <p:cNvPr id="94" name="calc_area"/>
           <p:cNvSpPr txBox="1"/>
           <p:nvPr/>
         </p:nvSpPr>
         <p:spPr>
           <a:xfrm>
             <a:off x="632617" y="2405421"/>
-            <a:ext cx="1257300" cy="378300"/>
+            <a:ext cx="1257300" cy="290167"/>
           </a:xfrm>
           <a:prstGeom prst="rect">
             <a:avLst/>
@@ -12377,106 +12411,13 @@
                 <a:sym typeface="Arial"/>
                 <a:extLst>
                   <a:ext uri="http://customooxmlschemas.google.com/">
-                    <go:slidesCustomData xmlns:go="http://customooxmlschemas.google.com/" xmlns:ahyp="http://schemas.microsoft.com/office/drawing/2018/hyperlinkcolor" xmlns:p15="http://schemas.microsoft.com/office/powerpoint/2012/main" xmlns:p14="http://schemas.microsoft.com/office/powerpoint/2010/main" xmlns:com="http://schemas.openxmlformats.org/drawingml/2006/compatibility" xmlns:pvml="urn:schemas-microsoft-com:office:powerpoint" xmlns:v="urn:schemas-microsoft-com:vml" xmlns:o="urn:schemas-microsoft-com:office:office" xmlns:dgm="http://schemas.openxmlformats.org/drawingml/2006/diagram" xmlns:c="http://schemas.openxmlformats.org/drawingml/2006/chart" xmlns:mv="urn:schemas-microsoft-com:mac:vml" xmlns:mc="http://schemas.openxmlformats.org/markup-compatibility/2006" xmlns="" textRoundtripDataId="0"/>
+                    <go:slidesCustomData xmlns="" xmlns:mc="http://schemas.openxmlformats.org/markup-compatibility/2006" xmlns:mv="urn:schemas-microsoft-com:mac:vml" xmlns:c="http://schemas.openxmlformats.org/drawingml/2006/chart" xmlns:dgm="http://schemas.openxmlformats.org/drawingml/2006/diagram" xmlns:o="urn:schemas-microsoft-com:office:office" xmlns:v="urn:schemas-microsoft-com:vml" xmlns:pvml="urn:schemas-microsoft-com:office:powerpoint" xmlns:com="http://schemas.openxmlformats.org/drawingml/2006/compatibility" xmlns:p14="http://schemas.microsoft.com/office/powerpoint/2010/main" xmlns:p15="http://schemas.microsoft.com/office/powerpoint/2012/main" xmlns:ahyp="http://schemas.microsoft.com/office/drawing/2018/hyperlinkcolor" xmlns:go="http://customooxmlschemas.google.com/" textRoundtripDataId="0"/>
                   </a:ext>
                 </a:extLst>
               </a:rPr>
               <a:t>15</a:t>
             </a:r>
-            <a:r>
-              <a:rPr lang="ru-RU" sz="750" b="1" dirty="0">
-                <a:solidFill>
-                  <a:schemeClr val="lt1"/>
-                </a:solidFill>
-                <a:latin typeface="Arial"/>
-                <a:ea typeface="Arial"/>
-                <a:cs typeface="Arial"/>
-                <a:sym typeface="Arial"/>
-                <a:extLst>
-                  <a:ext uri="http://customooxmlschemas.google.com/">
-                    <go:slidesCustomData xmlns:go="http://customooxmlschemas.google.com/" xmlns:ahyp="http://schemas.microsoft.com/office/drawing/2018/hyperlinkcolor" xmlns:p15="http://schemas.microsoft.com/office/powerpoint/2012/main" xmlns:p14="http://schemas.microsoft.com/office/powerpoint/2010/main" xmlns:com="http://schemas.openxmlformats.org/drawingml/2006/compatibility" xmlns:pvml="urn:schemas-microsoft-com:office:powerpoint" xmlns:v="urn:schemas-microsoft-com:vml" xmlns:o="urn:schemas-microsoft-com:office:office" xmlns:dgm="http://schemas.openxmlformats.org/drawingml/2006/diagram" xmlns:c="http://schemas.openxmlformats.org/drawingml/2006/chart" xmlns:mv="urn:schemas-microsoft-com:mac:vml" xmlns:mc="http://schemas.openxmlformats.org/markup-compatibility/2006" xmlns="" textRoundtripDataId="1"/>
-                  </a:ext>
-                </a:extLst>
-              </a:rPr>
-              <a:t> </a:t>
-            </a:r>
-            <a:r>
-              <a:rPr lang="ru-RU" sz="857" b="1" dirty="0">
-                <a:solidFill>
-                  <a:schemeClr val="lt1"/>
-                </a:solidFill>
-                <a:latin typeface="Arial"/>
-                <a:ea typeface="Arial"/>
-                <a:cs typeface="Arial"/>
-                <a:sym typeface="Arial"/>
-                <a:extLst>
-                  <a:ext uri="http://customooxmlschemas.google.com/">
-                    <go:slidesCustomData xmlns:go="http://customooxmlschemas.google.com/" xmlns:ahyp="http://schemas.microsoft.com/office/drawing/2018/hyperlinkcolor" xmlns:p15="http://schemas.microsoft.com/office/powerpoint/2012/main" xmlns:p14="http://schemas.microsoft.com/office/powerpoint/2010/main" xmlns:com="http://schemas.openxmlformats.org/drawingml/2006/compatibility" xmlns:pvml="urn:schemas-microsoft-com:office:powerpoint" xmlns:v="urn:schemas-microsoft-com:vml" xmlns:o="urn:schemas-microsoft-com:office:office" xmlns:dgm="http://schemas.openxmlformats.org/drawingml/2006/diagram" xmlns:c="http://schemas.openxmlformats.org/drawingml/2006/chart" xmlns:mv="urn:schemas-microsoft-com:mac:vml" xmlns:mc="http://schemas.openxmlformats.org/markup-compatibility/2006" xmlns="" textRoundtripDataId="2"/>
-                  </a:ext>
-                </a:extLst>
-              </a:rPr>
-              <a:t>тыс. м</a:t>
-            </a:r>
-            <a:r>
-              <a:rPr lang="ru-RU" sz="857" b="1" baseline="30000" dirty="0">
-                <a:solidFill>
-                  <a:schemeClr val="lt1"/>
-                </a:solidFill>
-                <a:latin typeface="Arial"/>
-                <a:ea typeface="Arial"/>
-                <a:cs typeface="Arial"/>
-                <a:sym typeface="Arial"/>
-                <a:extLst>
-                  <a:ext uri="http://customooxmlschemas.google.com/">
-                    <go:slidesCustomData xmlns:go="http://customooxmlschemas.google.com/" xmlns:ahyp="http://schemas.microsoft.com/office/drawing/2018/hyperlinkcolor" xmlns:p15="http://schemas.microsoft.com/office/powerpoint/2012/main" xmlns:p14="http://schemas.microsoft.com/office/powerpoint/2010/main" xmlns:com="http://schemas.openxmlformats.org/drawingml/2006/compatibility" xmlns:pvml="urn:schemas-microsoft-com:office:powerpoint" xmlns:v="urn:schemas-microsoft-com:vml" xmlns:o="urn:schemas-microsoft-com:office:office" xmlns:dgm="http://schemas.openxmlformats.org/drawingml/2006/diagram" xmlns:c="http://schemas.openxmlformats.org/drawingml/2006/chart" xmlns:mv="urn:schemas-microsoft-com:mac:vml" xmlns:mc="http://schemas.openxmlformats.org/markup-compatibility/2006" xmlns="" textRoundtripDataId="3"/>
-                  </a:ext>
-                </a:extLst>
-              </a:rPr>
-              <a:t>2</a:t>
-            </a:r>
-            <a:endParaRPr sz="750" b="1" baseline="30000" dirty="0">
-              <a:solidFill>
-                <a:schemeClr val="lt1"/>
-              </a:solidFill>
-              <a:latin typeface="Arial"/>
-              <a:ea typeface="Arial"/>
-              <a:cs typeface="Arial"/>
-              <a:sym typeface="Arial"/>
-              <a:extLst>
-                <a:ext uri="http://customooxmlschemas.google.com/">
-                  <go:slidesCustomData xmlns:go="http://customooxmlschemas.google.com/" xmlns:ahyp="http://schemas.microsoft.com/office/drawing/2018/hyperlinkcolor" xmlns:p15="http://schemas.microsoft.com/office/powerpoint/2012/main" xmlns:p14="http://schemas.microsoft.com/office/powerpoint/2010/main" xmlns:com="http://schemas.openxmlformats.org/drawingml/2006/compatibility" xmlns:pvml="urn:schemas-microsoft-com:office:powerpoint" xmlns:v="urn:schemas-microsoft-com:vml" xmlns:o="urn:schemas-microsoft-com:office:office" xmlns:dgm="http://schemas.openxmlformats.org/drawingml/2006/diagram" xmlns:c="http://schemas.openxmlformats.org/drawingml/2006/chart" xmlns:mv="urn:schemas-microsoft-com:mac:vml" xmlns:mc="http://schemas.openxmlformats.org/markup-compatibility/2006" xmlns="" textRoundtripDataId="4"/>
-                </a:ext>
-              </a:extLst>
-            </a:endParaRPr>
-          </a:p>
-          <a:p>
-            <a:pPr marL="0" marR="0" lvl="0" indent="0" algn="l" rtl="0">
-              <a:spcBef>
-                <a:spcPts val="0"/>
-              </a:spcBef>
-              <a:spcAft>
-                <a:spcPts val="0"/>
-              </a:spcAft>
-              <a:buNone/>
-            </a:pPr>
-            <a:r>
-              <a:rPr lang="ru-RU" sz="571" dirty="0">
-                <a:solidFill>
-                  <a:schemeClr val="lt1"/>
-                </a:solidFill>
-                <a:latin typeface="Arial"/>
-                <a:ea typeface="Arial"/>
-                <a:cs typeface="Arial"/>
-                <a:sym typeface="Arial"/>
-                <a:extLst>
-                  <a:ext uri="http://customooxmlschemas.google.com/">
-                    <go:slidesCustomData xmlns:go="http://customooxmlschemas.google.com/" xmlns:ahyp="http://schemas.microsoft.com/office/drawing/2018/hyperlinkcolor" xmlns:p15="http://schemas.microsoft.com/office/powerpoint/2012/main" xmlns:p14="http://schemas.microsoft.com/office/powerpoint/2010/main" xmlns:com="http://schemas.openxmlformats.org/drawingml/2006/compatibility" xmlns:pvml="urn:schemas-microsoft-com:office:powerpoint" xmlns:v="urn:schemas-microsoft-com:vml" xmlns:o="urn:schemas-microsoft-com:office:office" xmlns:dgm="http://schemas.openxmlformats.org/drawingml/2006/diagram" xmlns:c="http://schemas.openxmlformats.org/drawingml/2006/chart" xmlns:mv="urn:schemas-microsoft-com:mac:vml" xmlns:mc="http://schemas.openxmlformats.org/markup-compatibility/2006" xmlns="" textRoundtripDataId="5"/>
-                  </a:ext>
-                </a:extLst>
-              </a:rPr>
-              <a:t>общая площадь, из которой:</a:t>
-            </a:r>
-            <a:endParaRPr dirty="0"/>
+            <a:endParaRPr lang="ru-RU" dirty="0"/>
           </a:p>
         </p:txBody>
       </p:sp>
@@ -12532,7 +12473,7 @@
       </p:sp>
       <p:sp>
         <p:nvSpPr>
-          <p:cNvPr id="96" name="Investor"/>
+          <p:cNvPr id="96" name="investor-field"/>
           <p:cNvSpPr txBox="1"/>
           <p:nvPr/>
         </p:nvSpPr>
@@ -12572,20 +12513,28 @@
               </a:rPr>
               <a:t>Инвестор</a:t>
             </a:r>
+            <a:r>
+              <a:rPr lang="en-US" sz="1000" dirty="0">
+                <a:solidFill>
+                  <a:schemeClr val="lt1"/>
+                </a:solidFill>
+              </a:rPr>
+              <a:t>:</a:t>
+            </a:r>
             <a:endParaRPr dirty="0"/>
           </a:p>
         </p:txBody>
       </p:sp>
       <p:sp>
         <p:nvSpPr>
-          <p:cNvPr id="97" name="Google Shape;97;p2"/>
+          <p:cNvPr id="97" name="year_entered"/>
           <p:cNvSpPr txBox="1"/>
           <p:nvPr/>
         </p:nvSpPr>
         <p:spPr>
           <a:xfrm>
             <a:off x="710180" y="3160168"/>
-            <a:ext cx="1057500" cy="378300"/>
+            <a:ext cx="1057500" cy="290167"/>
           </a:xfrm>
           <a:prstGeom prst="rect">
             <a:avLst/>
@@ -12643,47 +12592,6 @@
               <a:cs typeface="Arial"/>
               <a:sym typeface="Arial"/>
             </a:endParaRPr>
-          </a:p>
-          <a:p>
-            <a:pPr marL="0" marR="0" lvl="0" indent="0" algn="l" rtl="0">
-              <a:spcBef>
-                <a:spcPts val="0"/>
-              </a:spcBef>
-              <a:spcAft>
-                <a:spcPts val="0"/>
-              </a:spcAft>
-              <a:buNone/>
-            </a:pPr>
-            <a:r>
-              <a:rPr lang="ru-RU" sz="571" dirty="0">
-                <a:solidFill>
-                  <a:schemeClr val="lt1"/>
-                </a:solidFill>
-                <a:latin typeface="Arial"/>
-                <a:ea typeface="Arial"/>
-                <a:cs typeface="Arial"/>
-                <a:sym typeface="Arial"/>
-              </a:rPr>
-              <a:t>ввод в </a:t>
-            </a:r>
-            <a:r>
-              <a:rPr lang="ru-RU" sz="571" dirty="0">
-                <a:solidFill>
-                  <a:schemeClr val="lt1"/>
-                </a:solidFill>
-                <a:latin typeface="Arial"/>
-                <a:ea typeface="Arial"/>
-                <a:cs typeface="Arial"/>
-                <a:sym typeface="Arial"/>
-                <a:extLst>
-                  <a:ext uri="http://customooxmlschemas.google.com/">
-                    <go:slidesCustomData xmlns:go="http://customooxmlschemas.google.com/" xmlns:ahyp="http://schemas.microsoft.com/office/drawing/2018/hyperlinkcolor" xmlns:p15="http://schemas.microsoft.com/office/powerpoint/2012/main" xmlns:p14="http://schemas.microsoft.com/office/powerpoint/2010/main" xmlns:com="http://schemas.openxmlformats.org/drawingml/2006/compatibility" xmlns:pvml="urn:schemas-microsoft-com:office:powerpoint" xmlns:v="urn:schemas-microsoft-com:vml" xmlns:o="urn:schemas-microsoft-com:office:office" xmlns:dgm="http://schemas.openxmlformats.org/drawingml/2006/diagram" xmlns:c="http://schemas.openxmlformats.org/drawingml/2006/chart" xmlns:mv="urn:schemas-microsoft-com:mac:vml" xmlns:mc="http://schemas.openxmlformats.org/markup-compatibility/2006" xmlns="" textRoundtripDataId="6"/>
-                  </a:ext>
-                </a:extLst>
-              </a:rPr>
-              <a:t>эксплуатацию</a:t>
-            </a:r>
-            <a:endParaRPr dirty="0"/>
           </a:p>
         </p:txBody>
       </p:sp>
@@ -12813,13 +12721,13 @@
       </p:pic>
       <p:sp>
         <p:nvSpPr>
-          <p:cNvPr id="100" name="Google Shape;100;p2"/>
+          <p:cNvPr id="100" name="zu_number"/>
           <p:cNvSpPr txBox="1"/>
           <p:nvPr/>
         </p:nvSpPr>
         <p:spPr>
           <a:xfrm>
-            <a:off x="1169891" y="2947656"/>
+            <a:off x="1189769" y="2934404"/>
             <a:ext cx="1375500" cy="180300"/>
           </a:xfrm>
           <a:prstGeom prst="rect">
@@ -14066,7 +13974,7 @@
       </p:sp>
       <p:sp>
         <p:nvSpPr>
-          <p:cNvPr id="122" name="ProjectName"/>
+          <p:cNvPr id="122" name="name"/>
           <p:cNvSpPr txBox="1"/>
           <p:nvPr/>
         </p:nvSpPr>
@@ -14113,7 +14021,7 @@
                 </a:solidFill>
                 <a:extLst>
                   <a:ext uri="http://customooxmlschemas.google.com/">
-                    <go:slidesCustomData xmlns:go="http://customooxmlschemas.google.com/" xmlns:ahyp="http://schemas.microsoft.com/office/drawing/2018/hyperlinkcolor" xmlns:p15="http://schemas.microsoft.com/office/powerpoint/2012/main" xmlns:p14="http://schemas.microsoft.com/office/powerpoint/2010/main" xmlns:com="http://schemas.openxmlformats.org/drawingml/2006/compatibility" xmlns:pvml="urn:schemas-microsoft-com:office:powerpoint" xmlns:v="urn:schemas-microsoft-com:vml" xmlns:o="urn:schemas-microsoft-com:office:office" xmlns:dgm="http://schemas.openxmlformats.org/drawingml/2006/diagram" xmlns:c="http://schemas.openxmlformats.org/drawingml/2006/chart" xmlns:mv="urn:schemas-microsoft-com:mac:vml" xmlns:mc="http://schemas.openxmlformats.org/markup-compatibility/2006" xmlns="" textRoundtripDataId="7"/>
+                    <go:slidesCustomData xmlns="" xmlns:mc="http://schemas.openxmlformats.org/markup-compatibility/2006" xmlns:mv="urn:schemas-microsoft-com:mac:vml" xmlns:c="http://schemas.openxmlformats.org/drawingml/2006/chart" xmlns:dgm="http://schemas.openxmlformats.org/drawingml/2006/diagram" xmlns:o="urn:schemas-microsoft-com:office:office" xmlns:v="urn:schemas-microsoft-com:vml" xmlns:pvml="urn:schemas-microsoft-com:office:powerpoint" xmlns:com="http://schemas.openxmlformats.org/drawingml/2006/compatibility" xmlns:p14="http://schemas.microsoft.com/office/powerpoint/2010/main" xmlns:p15="http://schemas.microsoft.com/office/powerpoint/2012/main" xmlns:ahyp="http://schemas.microsoft.com/office/drawing/2018/hyperlinkcolor" xmlns:go="http://customooxmlschemas.google.com/" textRoundtripDataId="7"/>
                   </a:ext>
                 </a:extLst>
               </a:rPr>
@@ -14128,6 +14036,183 @@
               <a:cs typeface="Arial"/>
               <a:sym typeface="Arial"/>
             </a:endParaRPr>
+          </a:p>
+        </p:txBody>
+      </p:sp>
+      <p:sp>
+        <p:nvSpPr>
+          <p:cNvPr id="3" name="TextBox 2">
+            <a:extLst>
+              <a:ext uri="{FF2B5EF4-FFF2-40B4-BE49-F238E27FC236}">
+                <a16:creationId xmlns:a16="http://schemas.microsoft.com/office/drawing/2014/main" id="{C4DA04D0-D5BF-0A99-92B2-D4646F104A79}"/>
+              </a:ext>
+            </a:extLst>
+          </p:cNvPr>
+          <p:cNvSpPr txBox="1"/>
+          <p:nvPr/>
+        </p:nvSpPr>
+        <p:spPr>
+          <a:xfrm>
+            <a:off x="710173" y="3373207"/>
+            <a:ext cx="6096000" cy="180178"/>
+          </a:xfrm>
+          <a:prstGeom prst="rect">
+            <a:avLst/>
+          </a:prstGeom>
+          <a:noFill/>
+        </p:spPr>
+        <p:txBody>
+          <a:bodyPr wrap="square">
+            <a:spAutoFit/>
+          </a:bodyPr>
+          <a:lstStyle/>
+          <a:p>
+            <a:pPr marL="0" marR="0" lvl="0" indent="0" algn="l" rtl="0">
+              <a:spcBef>
+                <a:spcPts val="0"/>
+              </a:spcBef>
+              <a:spcAft>
+                <a:spcPts val="0"/>
+              </a:spcAft>
+              <a:buNone/>
+            </a:pPr>
+            <a:r>
+              <a:rPr lang="ru-RU" sz="571" dirty="0">
+                <a:solidFill>
+                  <a:schemeClr val="lt1"/>
+                </a:solidFill>
+              </a:rPr>
+              <a:t>ввод в эксплуатацию</a:t>
+            </a:r>
+          </a:p>
+        </p:txBody>
+      </p:sp>
+      <p:sp>
+        <p:nvSpPr>
+          <p:cNvPr id="2" name="investor">
+            <a:extLst>
+              <a:ext uri="{FF2B5EF4-FFF2-40B4-BE49-F238E27FC236}">
+                <a16:creationId xmlns:a16="http://schemas.microsoft.com/office/drawing/2014/main" id="{5B4F85F6-845A-B617-1610-B3782C48379C}"/>
+              </a:ext>
+            </a:extLst>
+          </p:cNvPr>
+          <p:cNvSpPr txBox="1"/>
+          <p:nvPr/>
+        </p:nvSpPr>
+        <p:spPr>
+          <a:xfrm>
+            <a:off x="1169891" y="1483271"/>
+            <a:ext cx="5119918" cy="246300"/>
+          </a:xfrm>
+          <a:prstGeom prst="rect">
+            <a:avLst/>
+          </a:prstGeom>
+          <a:noFill/>
+          <a:ln>
+            <a:noFill/>
+          </a:ln>
+        </p:spPr>
+        <p:txBody>
+          <a:bodyPr spcFirstLastPara="1" wrap="square" lIns="91425" tIns="45700" rIns="91425" bIns="45700" anchor="t" anchorCtr="0">
+            <a:spAutoFit/>
+          </a:bodyPr>
+          <a:lstStyle/>
+          <a:p>
+            <a:pPr marL="0" marR="0" lvl="0" indent="0" algn="l" rtl="0">
+              <a:spcBef>
+                <a:spcPts val="0"/>
+              </a:spcBef>
+              <a:spcAft>
+                <a:spcPts val="0"/>
+              </a:spcAft>
+              <a:buNone/>
+            </a:pPr>
+            <a:r>
+              <a:rPr lang="ru-RU" sz="1000" dirty="0">
+                <a:solidFill>
+                  <a:schemeClr val="lt1"/>
+                </a:solidFill>
+              </a:rPr>
+              <a:t>Инвестор</a:t>
+            </a:r>
+            <a:endParaRPr dirty="0"/>
+          </a:p>
+        </p:txBody>
+      </p:sp>
+      <p:sp>
+        <p:nvSpPr>
+          <p:cNvPr id="7" name="TextBox 6">
+            <a:extLst>
+              <a:ext uri="{FF2B5EF4-FFF2-40B4-BE49-F238E27FC236}">
+                <a16:creationId xmlns:a16="http://schemas.microsoft.com/office/drawing/2014/main" id="{FD9EA67D-42D5-143A-EB41-B7F49239C673}"/>
+              </a:ext>
+            </a:extLst>
+          </p:cNvPr>
+          <p:cNvSpPr txBox="1"/>
+          <p:nvPr/>
+        </p:nvSpPr>
+        <p:spPr>
+          <a:xfrm>
+            <a:off x="890223" y="2437872"/>
+            <a:ext cx="1305668" cy="312073"/>
+          </a:xfrm>
+          <a:prstGeom prst="rect">
+            <a:avLst/>
+          </a:prstGeom>
+          <a:noFill/>
+        </p:spPr>
+        <p:txBody>
+          <a:bodyPr wrap="square">
+            <a:spAutoFit/>
+          </a:bodyPr>
+          <a:lstStyle/>
+          <a:p>
+            <a:pPr marL="0" marR="0" lvl="0" indent="0" algn="l" rtl="0">
+              <a:spcBef>
+                <a:spcPts val="0"/>
+              </a:spcBef>
+              <a:spcAft>
+                <a:spcPts val="0"/>
+              </a:spcAft>
+              <a:buNone/>
+            </a:pPr>
+            <a:r>
+              <a:rPr lang="ru-RU" sz="857" b="1" dirty="0">
+                <a:solidFill>
+                  <a:schemeClr val="lt1"/>
+                </a:solidFill>
+                <a:extLst>
+                  <a:ext uri="http://customooxmlschemas.google.com/">
+                    <go:slidesCustomData xmlns:go="http://customooxmlschemas.google.com/" xmlns:ahyp="http://schemas.microsoft.com/office/drawing/2018/hyperlinkcolor" xmlns:p15="http://schemas.microsoft.com/office/powerpoint/2012/main" xmlns:p14="http://schemas.microsoft.com/office/powerpoint/2010/main" xmlns:com="http://schemas.openxmlformats.org/drawingml/2006/compatibility" xmlns:pvml="urn:schemas-microsoft-com:office:powerpoint" xmlns:v="urn:schemas-microsoft-com:vml" xmlns:o="urn:schemas-microsoft-com:office:office" xmlns:dgm="http://schemas.openxmlformats.org/drawingml/2006/diagram" xmlns:c="http://schemas.openxmlformats.org/drawingml/2006/chart" xmlns:mv="urn:schemas-microsoft-com:mac:vml" xmlns:mc="http://schemas.openxmlformats.org/markup-compatibility/2006" xmlns="" textRoundtripDataId="2"/>
+                  </a:ext>
+                </a:extLst>
+              </a:rPr>
+              <a:t>тыс. м2</a:t>
+            </a:r>
+          </a:p>
+          <a:p>
+            <a:pPr marL="0" marR="0" lvl="0" indent="0" algn="l" rtl="0">
+              <a:spcBef>
+                <a:spcPts val="0"/>
+              </a:spcBef>
+              <a:spcAft>
+                <a:spcPts val="0"/>
+              </a:spcAft>
+              <a:buNone/>
+            </a:pPr>
+            <a:r>
+              <a:rPr lang="ru-RU" sz="571" dirty="0">
+                <a:solidFill>
+                  <a:schemeClr val="lt1"/>
+                </a:solidFill>
+                <a:extLst>
+                  <a:ext uri="http://customooxmlschemas.google.com/">
+                    <go:slidesCustomData xmlns:go="http://customooxmlschemas.google.com/" xmlns:ahyp="http://schemas.microsoft.com/office/drawing/2018/hyperlinkcolor" xmlns:p15="http://schemas.microsoft.com/office/powerpoint/2012/main" xmlns:p14="http://schemas.microsoft.com/office/powerpoint/2010/main" xmlns:com="http://schemas.openxmlformats.org/drawingml/2006/compatibility" xmlns:pvml="urn:schemas-microsoft-com:office:powerpoint" xmlns:v="urn:schemas-microsoft-com:vml" xmlns:o="urn:schemas-microsoft-com:office:office" xmlns:dgm="http://schemas.openxmlformats.org/drawingml/2006/diagram" xmlns:c="http://schemas.openxmlformats.org/drawingml/2006/chart" xmlns:mv="urn:schemas-microsoft-com:mac:vml" xmlns:mc="http://schemas.openxmlformats.org/markup-compatibility/2006" xmlns="" textRoundtripDataId="5"/>
+                  </a:ext>
+                </a:extLst>
+              </a:rPr>
+              <a:t>общая площадь, из которой:</a:t>
+            </a:r>
           </a:p>
         </p:txBody>
       </p:sp>

--- a/src/assets/slide_sample.pptx
+++ b/src/assets/slide_sample.pptx
@@ -11910,7 +11910,28 @@
           <a:bodyPr/>
           <a:lstStyle/>
           <a:p>
-            <a:endParaRPr lang="ru-RU"/>
+            <a:pPr>
+              <a:lnSpc>
+                <a:spcPct val="100000"/>
+              </a:lnSpc>
+              <a:buSzPts val="5000"/>
+            </a:pPr>
+            <a:r>
+              <a:rPr lang="ru-RU" sz="2400" b="1" dirty="0">
+                <a:solidFill>
+                  <a:schemeClr val="lt1"/>
+                </a:solidFill>
+                <a:latin typeface="Arial"/>
+                <a:cs typeface="Arial"/>
+                <a:sym typeface="Arial"/>
+                <a:extLst>
+                  <a:ext uri="http://customooxmlschemas.google.com/">
+                    <go:slidesCustomData xmlns="" xmlns:mc="http://schemas.openxmlformats.org/markup-compatibility/2006" xmlns:mv="urn:schemas-microsoft-com:mac:vml" xmlns:c="http://schemas.openxmlformats.org/drawingml/2006/chart" xmlns:dgm="http://schemas.openxmlformats.org/drawingml/2006/diagram" xmlns:o="urn:schemas-microsoft-com:office:office" xmlns:v="urn:schemas-microsoft-com:vml" xmlns:pvml="urn:schemas-microsoft-com:office:powerpoint" xmlns:com="http://schemas.openxmlformats.org/drawingml/2006/compatibility" xmlns:p14="http://schemas.microsoft.com/office/powerpoint/2010/main" xmlns:p15="http://schemas.microsoft.com/office/powerpoint/2012/main" xmlns:ahyp="http://schemas.microsoft.com/office/drawing/2018/hyperlinkcolor" xmlns:go="http://customooxmlschemas.google.com/" textRoundtripDataId="7"/>
+                  </a:ext>
+                </a:extLst>
+              </a:rPr>
+              <a:t>Состав проекта</a:t>
+            </a:r>
           </a:p>
         </p:txBody>
       </p:sp>
@@ -12914,7 +12935,7 @@
       </p:sp>
       <p:pic>
         <p:nvPicPr>
-          <p:cNvPr id="103" name="Google Shape;103;p2"/>
+          <p:cNvPr id="103" name="ProjectRender"/>
           <p:cNvPicPr preferRelativeResize="0"/>
           <p:nvPr/>
         </p:nvPicPr>
@@ -14213,6 +14234,62 @@
               </a:rPr>
               <a:t>общая площадь, из которой:</a:t>
             </a:r>
+          </a:p>
+        </p:txBody>
+      </p:sp>
+      <p:sp>
+        <p:nvSpPr>
+          <p:cNvPr id="4" name="cad_notes">
+            <a:extLst>
+              <a:ext uri="{FF2B5EF4-FFF2-40B4-BE49-F238E27FC236}">
+                <a16:creationId xmlns:a16="http://schemas.microsoft.com/office/drawing/2014/main" id="{608E5025-F873-36E6-B97C-59131FC51A6F}"/>
+              </a:ext>
+            </a:extLst>
+          </p:cNvPr>
+          <p:cNvSpPr txBox="1"/>
+          <p:nvPr/>
+        </p:nvSpPr>
+        <p:spPr>
+          <a:xfrm>
+            <a:off x="189243" y="6489700"/>
+            <a:ext cx="6868574" cy="180137"/>
+          </a:xfrm>
+          <a:prstGeom prst="rect">
+            <a:avLst/>
+          </a:prstGeom>
+          <a:noFill/>
+          <a:ln>
+            <a:noFill/>
+          </a:ln>
+        </p:spPr>
+        <p:txBody>
+          <a:bodyPr spcFirstLastPara="1" wrap="square" lIns="91425" tIns="45700" rIns="91425" bIns="45700" anchor="t" anchorCtr="0">
+            <a:spAutoFit/>
+          </a:bodyPr>
+          <a:lstStyle/>
+          <a:p>
+            <a:pPr marL="0" marR="0" lvl="0" indent="0" algn="l" rtl="0">
+              <a:spcBef>
+                <a:spcPts val="0"/>
+              </a:spcBef>
+              <a:spcAft>
+                <a:spcPts val="0"/>
+              </a:spcAft>
+              <a:buNone/>
+            </a:pPr>
+            <a:r>
+              <a:rPr lang="ru-RU" sz="571" dirty="0">
+                <a:solidFill>
+                  <a:schemeClr val="lt1"/>
+                </a:solidFill>
+                <a:latin typeface="Arial"/>
+                <a:ea typeface="Arial"/>
+                <a:cs typeface="Arial"/>
+                <a:sym typeface="Arial"/>
+              </a:rPr>
+              <a:t>* - Сноска с полным составом проекта</a:t>
+            </a:r>
+            <a:endParaRPr dirty="0"/>
           </a:p>
         </p:txBody>
       </p:sp>

--- a/src/assets/slide_sample.pptx
+++ b/src/assets/slide_sample.pptx
@@ -278,7 +278,7 @@
       </p15:sldGuideLst>
     </p:ext>
     <p:ext uri="GoogleSlidesCustomDataVersion2">
-      <go:slidesCustomData xmlns="" xmlns:mc="http://schemas.openxmlformats.org/markup-compatibility/2006" xmlns:mv="urn:schemas-microsoft-com:mac:vml" xmlns:c="http://schemas.openxmlformats.org/drawingml/2006/chart" xmlns:dgm="http://schemas.openxmlformats.org/drawingml/2006/diagram" xmlns:o="urn:schemas-microsoft-com:office:office" xmlns:v="urn:schemas-microsoft-com:vml" xmlns:pvml="urn:schemas-microsoft-com:office:powerpoint" xmlns:com="http://schemas.openxmlformats.org/drawingml/2006/compatibility" xmlns:p14="http://schemas.microsoft.com/office/powerpoint/2010/main" xmlns:p15="http://schemas.microsoft.com/office/powerpoint/2012/main" xmlns:ahyp="http://schemas.microsoft.com/office/drawing/2018/hyperlinkcolor" xmlns:go="http://customooxmlschemas.google.com/" r:id="rId8" roundtripDataSignature="AMtx7mj+3mxE5o7GXHaj57Ss1rmUYwTV0A=="/>
+      <go:slidesCustomData xmlns:go="http://customooxmlschemas.google.com/" xmlns:ahyp="http://schemas.microsoft.com/office/drawing/2018/hyperlinkcolor" xmlns:p15="http://schemas.microsoft.com/office/powerpoint/2012/main" xmlns:p14="http://schemas.microsoft.com/office/powerpoint/2010/main" xmlns:com="http://schemas.openxmlformats.org/drawingml/2006/compatibility" xmlns:pvml="urn:schemas-microsoft-com:office:powerpoint" xmlns:v="urn:schemas-microsoft-com:vml" xmlns:o="urn:schemas-microsoft-com:office:office" xmlns:dgm="http://schemas.openxmlformats.org/drawingml/2006/diagram" xmlns:c="http://schemas.openxmlformats.org/drawingml/2006/chart" xmlns:mv="urn:schemas-microsoft-com:mac:vml" xmlns:mc="http://schemas.openxmlformats.org/markup-compatibility/2006" xmlns="" r:id="rId8" roundtripDataSignature="AMtx7mj+3mxE5o7GXHaj57Ss1rmUYwTV0A=="/>
     </p:ext>
   </p:extLst>
 </p:presentation>
@@ -307,7 +307,7 @@
         <p15:threadingInfo xmlns:p15="http://schemas.microsoft.com/office/powerpoint/2012/main" timeZoneBias="0"/>
       </p:ext>
       <p:ext uri="http://customooxmlschemas.google.com/">
-        <go:slidesCustomData xmlns="" xmlns:mc="http://schemas.openxmlformats.org/markup-compatibility/2006" xmlns:mv="urn:schemas-microsoft-com:mac:vml" xmlns:c="http://schemas.openxmlformats.org/drawingml/2006/chart" xmlns:dgm="http://schemas.openxmlformats.org/drawingml/2006/diagram" xmlns:o="urn:schemas-microsoft-com:office:office" xmlns:v="urn:schemas-microsoft-com:vml" xmlns:pvml="urn:schemas-microsoft-com:office:powerpoint" xmlns:com="http://schemas.openxmlformats.org/drawingml/2006/compatibility" xmlns:p14="http://schemas.microsoft.com/office/powerpoint/2010/main" xmlns:p15="http://schemas.microsoft.com/office/powerpoint/2012/main" xmlns:ahyp="http://schemas.microsoft.com/office/drawing/2018/hyperlinkcolor" xmlns:go="http://customooxmlschemas.google.com/" commentPostId="AAAByePcYt0"/>
+        <go:slidesCustomData xmlns:go="http://customooxmlschemas.google.com/" xmlns:ahyp="http://schemas.microsoft.com/office/drawing/2018/hyperlinkcolor" xmlns:p15="http://schemas.microsoft.com/office/powerpoint/2012/main" xmlns:p14="http://schemas.microsoft.com/office/powerpoint/2010/main" xmlns:com="http://schemas.openxmlformats.org/drawingml/2006/compatibility" xmlns:pvml="urn:schemas-microsoft-com:office:powerpoint" xmlns:v="urn:schemas-microsoft-com:vml" xmlns:o="urn:schemas-microsoft-com:office:office" xmlns:dgm="http://schemas.openxmlformats.org/drawingml/2006/diagram" xmlns:c="http://schemas.openxmlformats.org/drawingml/2006/chart" xmlns:mv="urn:schemas-microsoft-com:mac:vml" xmlns:mc="http://schemas.openxmlformats.org/markup-compatibility/2006" xmlns="" commentPostId="AAAByePcYt0"/>
       </p:ext>
     </p:extLst>
   </p:cm>
@@ -319,7 +319,7 @@
         <p15:threadingInfo xmlns:p15="http://schemas.microsoft.com/office/powerpoint/2012/main" timeZoneBias="0"/>
       </p:ext>
       <p:ext uri="http://customooxmlschemas.google.com/">
-        <go:slidesCustomData xmlns="" xmlns:mc="http://schemas.openxmlformats.org/markup-compatibility/2006" xmlns:mv="urn:schemas-microsoft-com:mac:vml" xmlns:c="http://schemas.openxmlformats.org/drawingml/2006/chart" xmlns:dgm="http://schemas.openxmlformats.org/drawingml/2006/diagram" xmlns:o="urn:schemas-microsoft-com:office:office" xmlns:v="urn:schemas-microsoft-com:vml" xmlns:pvml="urn:schemas-microsoft-com:office:powerpoint" xmlns:com="http://schemas.openxmlformats.org/drawingml/2006/compatibility" xmlns:p14="http://schemas.microsoft.com/office/powerpoint/2010/main" xmlns:p15="http://schemas.microsoft.com/office/powerpoint/2012/main" xmlns:ahyp="http://schemas.microsoft.com/office/drawing/2018/hyperlinkcolor" xmlns:go="http://customooxmlschemas.google.com/" commentPostId="AAAByePcYt4"/>
+        <go:slidesCustomData xmlns:go="http://customooxmlschemas.google.com/" xmlns:ahyp="http://schemas.microsoft.com/office/drawing/2018/hyperlinkcolor" xmlns:p15="http://schemas.microsoft.com/office/powerpoint/2012/main" xmlns:p14="http://schemas.microsoft.com/office/powerpoint/2010/main" xmlns:com="http://schemas.openxmlformats.org/drawingml/2006/compatibility" xmlns:pvml="urn:schemas-microsoft-com:office:powerpoint" xmlns:v="urn:schemas-microsoft-com:vml" xmlns:o="urn:schemas-microsoft-com:office:office" xmlns:dgm="http://schemas.openxmlformats.org/drawingml/2006/diagram" xmlns:c="http://schemas.openxmlformats.org/drawingml/2006/chart" xmlns:mv="urn:schemas-microsoft-com:mac:vml" xmlns:mc="http://schemas.openxmlformats.org/markup-compatibility/2006" xmlns="" commentPostId="AAAByePcYt4"/>
       </p:ext>
     </p:extLst>
   </p:cm>
@@ -331,7 +331,7 @@
         <p15:threadingInfo xmlns:p15="http://schemas.microsoft.com/office/powerpoint/2012/main" timeZoneBias="0"/>
       </p:ext>
       <p:ext uri="http://customooxmlschemas.google.com/">
-        <go:slidesCustomData xmlns="" xmlns:mc="http://schemas.openxmlformats.org/markup-compatibility/2006" xmlns:mv="urn:schemas-microsoft-com:mac:vml" xmlns:c="http://schemas.openxmlformats.org/drawingml/2006/chart" xmlns:dgm="http://schemas.openxmlformats.org/drawingml/2006/diagram" xmlns:o="urn:schemas-microsoft-com:office:office" xmlns:v="urn:schemas-microsoft-com:vml" xmlns:pvml="urn:schemas-microsoft-com:office:powerpoint" xmlns:com="http://schemas.openxmlformats.org/drawingml/2006/compatibility" xmlns:p14="http://schemas.microsoft.com/office/powerpoint/2010/main" xmlns:p15="http://schemas.microsoft.com/office/powerpoint/2012/main" xmlns:ahyp="http://schemas.microsoft.com/office/drawing/2018/hyperlinkcolor" xmlns:go="http://customooxmlschemas.google.com/" commentPostId="AAAByePcet0"/>
+        <go:slidesCustomData xmlns:go="http://customooxmlschemas.google.com/" xmlns:ahyp="http://schemas.microsoft.com/office/drawing/2018/hyperlinkcolor" xmlns:p15="http://schemas.microsoft.com/office/powerpoint/2012/main" xmlns:p14="http://schemas.microsoft.com/office/powerpoint/2010/main" xmlns:com="http://schemas.openxmlformats.org/drawingml/2006/compatibility" xmlns:pvml="urn:schemas-microsoft-com:office:powerpoint" xmlns:v="urn:schemas-microsoft-com:vml" xmlns:o="urn:schemas-microsoft-com:office:office" xmlns:dgm="http://schemas.openxmlformats.org/drawingml/2006/diagram" xmlns:c="http://schemas.openxmlformats.org/drawingml/2006/chart" xmlns:mv="urn:schemas-microsoft-com:mac:vml" xmlns:mc="http://schemas.openxmlformats.org/markup-compatibility/2006" xmlns="" commentPostId="AAAByePcet0"/>
       </p:ext>
     </p:extLst>
   </p:cm>
@@ -343,7 +343,7 @@
         <p15:threadingInfo xmlns:p15="http://schemas.microsoft.com/office/powerpoint/2012/main" timeZoneBias="0"/>
       </p:ext>
       <p:ext uri="http://customooxmlschemas.google.com/">
-        <go:slidesCustomData xmlns="" xmlns:mc="http://schemas.openxmlformats.org/markup-compatibility/2006" xmlns:mv="urn:schemas-microsoft-com:mac:vml" xmlns:c="http://schemas.openxmlformats.org/drawingml/2006/chart" xmlns:dgm="http://schemas.openxmlformats.org/drawingml/2006/diagram" xmlns:o="urn:schemas-microsoft-com:office:office" xmlns:v="urn:schemas-microsoft-com:vml" xmlns:pvml="urn:schemas-microsoft-com:office:powerpoint" xmlns:com="http://schemas.openxmlformats.org/drawingml/2006/compatibility" xmlns:p14="http://schemas.microsoft.com/office/powerpoint/2010/main" xmlns:p15="http://schemas.microsoft.com/office/powerpoint/2012/main" xmlns:ahyp="http://schemas.microsoft.com/office/drawing/2018/hyperlinkcolor" xmlns:go="http://customooxmlschemas.google.com/" commentPostId="AAAByePcet4"/>
+        <go:slidesCustomData xmlns:go="http://customooxmlschemas.google.com/" xmlns:ahyp="http://schemas.microsoft.com/office/drawing/2018/hyperlinkcolor" xmlns:p15="http://schemas.microsoft.com/office/powerpoint/2012/main" xmlns:p14="http://schemas.microsoft.com/office/powerpoint/2010/main" xmlns:com="http://schemas.openxmlformats.org/drawingml/2006/compatibility" xmlns:pvml="urn:schemas-microsoft-com:office:powerpoint" xmlns:v="urn:schemas-microsoft-com:vml" xmlns:o="urn:schemas-microsoft-com:office:office" xmlns:dgm="http://schemas.openxmlformats.org/drawingml/2006/diagram" xmlns:c="http://schemas.openxmlformats.org/drawingml/2006/chart" xmlns:mv="urn:schemas-microsoft-com:mac:vml" xmlns:mc="http://schemas.openxmlformats.org/markup-compatibility/2006" xmlns="" commentPostId="AAAByePcet4"/>
       </p:ext>
     </p:extLst>
   </p:cm>
@@ -11926,7 +11926,7 @@
                 <a:sym typeface="Arial"/>
                 <a:extLst>
                   <a:ext uri="http://customooxmlschemas.google.com/">
-                    <go:slidesCustomData xmlns="" xmlns:mc="http://schemas.openxmlformats.org/markup-compatibility/2006" xmlns:mv="urn:schemas-microsoft-com:mac:vml" xmlns:c="http://schemas.openxmlformats.org/drawingml/2006/chart" xmlns:dgm="http://schemas.openxmlformats.org/drawingml/2006/diagram" xmlns:o="urn:schemas-microsoft-com:office:office" xmlns:v="urn:schemas-microsoft-com:vml" xmlns:pvml="urn:schemas-microsoft-com:office:powerpoint" xmlns:com="http://schemas.openxmlformats.org/drawingml/2006/compatibility" xmlns:p14="http://schemas.microsoft.com/office/powerpoint/2010/main" xmlns:p15="http://schemas.microsoft.com/office/powerpoint/2012/main" xmlns:ahyp="http://schemas.microsoft.com/office/drawing/2018/hyperlinkcolor" xmlns:go="http://customooxmlschemas.google.com/" textRoundtripDataId="7"/>
+                    <go:slidesCustomData xmlns:go="http://customooxmlschemas.google.com/" xmlns:ahyp="http://schemas.microsoft.com/office/drawing/2018/hyperlinkcolor" xmlns:p15="http://schemas.microsoft.com/office/powerpoint/2012/main" xmlns:p14="http://schemas.microsoft.com/office/powerpoint/2010/main" xmlns:com="http://schemas.openxmlformats.org/drawingml/2006/compatibility" xmlns:pvml="urn:schemas-microsoft-com:office:powerpoint" xmlns:v="urn:schemas-microsoft-com:vml" xmlns:o="urn:schemas-microsoft-com:office:office" xmlns:dgm="http://schemas.openxmlformats.org/drawingml/2006/diagram" xmlns:c="http://schemas.openxmlformats.org/drawingml/2006/chart" xmlns:mv="urn:schemas-microsoft-com:mac:vml" xmlns:mc="http://schemas.openxmlformats.org/markup-compatibility/2006" xmlns="" textRoundtripDataId="7"/>
                   </a:ext>
                 </a:extLst>
               </a:rPr>
@@ -11965,6 +11965,35 @@
           <a:chExt cx="0" cy="0"/>
         </a:xfrm>
       </p:grpSpPr>
+      <p:pic>
+        <p:nvPicPr>
+          <p:cNvPr id="88" name="MapImage"/>
+          <p:cNvPicPr preferRelativeResize="0"/>
+          <p:nvPr/>
+        </p:nvPicPr>
+        <p:blipFill rotWithShape="1">
+          <a:blip r:embed="rId3">
+            <a:alphaModFix/>
+          </a:blip>
+          <a:srcRect b="8323"/>
+          <a:stretch/>
+        </p:blipFill>
+        <p:spPr>
+          <a:xfrm>
+            <a:off x="7324420" y="2166084"/>
+            <a:ext cx="4056654" cy="4348335"/>
+          </a:xfrm>
+          <a:prstGeom prst="roundRect">
+            <a:avLst>
+              <a:gd name="adj" fmla="val 2579"/>
+            </a:avLst>
+          </a:prstGeom>
+          <a:noFill/>
+          <a:ln>
+            <a:noFill/>
+          </a:ln>
+        </p:spPr>
+      </p:pic>
       <p:sp>
         <p:nvSpPr>
           <p:cNvPr id="9" name="TextBox 8">
@@ -12009,7 +12038,7 @@
                 </a:solidFill>
                 <a:extLst>
                   <a:ext uri="http://customooxmlschemas.google.com/">
-                    <go:slidesCustomData xmlns:go="http://customooxmlschemas.google.com/" xmlns:ahyp="http://schemas.microsoft.com/office/drawing/2018/hyperlinkcolor" xmlns:p15="http://schemas.microsoft.com/office/powerpoint/2012/main" xmlns:p14="http://schemas.microsoft.com/office/powerpoint/2010/main" xmlns:com="http://schemas.openxmlformats.org/drawingml/2006/compatibility" xmlns:pvml="urn:schemas-microsoft-com:office:powerpoint" xmlns:v="urn:schemas-microsoft-com:vml" xmlns:o="urn:schemas-microsoft-com:office:office" xmlns:dgm="http://schemas.openxmlformats.org/drawingml/2006/diagram" xmlns:c="http://schemas.openxmlformats.org/drawingml/2006/chart" xmlns:mv="urn:schemas-microsoft-com:mac:vml" xmlns:mc="http://schemas.openxmlformats.org/markup-compatibility/2006" xmlns="" textRoundtripDataId="2"/>
+                    <go:slidesCustomData xmlns="" xmlns:mc="http://schemas.openxmlformats.org/markup-compatibility/2006" xmlns:mv="urn:schemas-microsoft-com:mac:vml" xmlns:c="http://schemas.openxmlformats.org/drawingml/2006/chart" xmlns:dgm="http://schemas.openxmlformats.org/drawingml/2006/diagram" xmlns:o="urn:schemas-microsoft-com:office:office" xmlns:v="urn:schemas-microsoft-com:vml" xmlns:pvml="urn:schemas-microsoft-com:office:powerpoint" xmlns:com="http://schemas.openxmlformats.org/drawingml/2006/compatibility" xmlns:p14="http://schemas.microsoft.com/office/powerpoint/2010/main" xmlns:p15="http://schemas.microsoft.com/office/powerpoint/2012/main" xmlns:ahyp="http://schemas.microsoft.com/office/drawing/2018/hyperlinkcolor" xmlns:go="http://customooxmlschemas.google.com/" textRoundtripDataId="2"/>
                   </a:ext>
                 </a:extLst>
               </a:rPr>
@@ -12022,7 +12051,7 @@
                 </a:solidFill>
                 <a:extLst>
                   <a:ext uri="http://customooxmlschemas.google.com/">
-                    <go:slidesCustomData xmlns:go="http://customooxmlschemas.google.com/" xmlns:ahyp="http://schemas.microsoft.com/office/drawing/2018/hyperlinkcolor" xmlns:p15="http://schemas.microsoft.com/office/powerpoint/2012/main" xmlns:p14="http://schemas.microsoft.com/office/powerpoint/2010/main" xmlns:com="http://schemas.openxmlformats.org/drawingml/2006/compatibility" xmlns:pvml="urn:schemas-microsoft-com:office:powerpoint" xmlns:v="urn:schemas-microsoft-com:vml" xmlns:o="urn:schemas-microsoft-com:office:office" xmlns:dgm="http://schemas.openxmlformats.org/drawingml/2006/diagram" xmlns:c="http://schemas.openxmlformats.org/drawingml/2006/chart" xmlns:mv="urn:schemas-microsoft-com:mac:vml" xmlns:mc="http://schemas.openxmlformats.org/markup-compatibility/2006" xmlns="" textRoundtripDataId="2"/>
+                    <go:slidesCustomData xmlns="" xmlns:mc="http://schemas.openxmlformats.org/markup-compatibility/2006" xmlns:mv="urn:schemas-microsoft-com:mac:vml" xmlns:c="http://schemas.openxmlformats.org/drawingml/2006/chart" xmlns:dgm="http://schemas.openxmlformats.org/drawingml/2006/diagram" xmlns:o="urn:schemas-microsoft-com:office:office" xmlns:v="urn:schemas-microsoft-com:vml" xmlns:pvml="urn:schemas-microsoft-com:office:powerpoint" xmlns:com="http://schemas.openxmlformats.org/drawingml/2006/compatibility" xmlns:p14="http://schemas.microsoft.com/office/powerpoint/2010/main" xmlns:p15="http://schemas.microsoft.com/office/powerpoint/2012/main" xmlns:ahyp="http://schemas.microsoft.com/office/drawing/2018/hyperlinkcolor" xmlns:go="http://customooxmlschemas.google.com/" textRoundtripDataId="2"/>
                   </a:ext>
                 </a:extLst>
               </a:rPr>
@@ -12046,7 +12075,7 @@
                 </a:solidFill>
                 <a:extLst>
                   <a:ext uri="http://customooxmlschemas.google.com/">
-                    <go:slidesCustomData xmlns:go="http://customooxmlschemas.google.com/" xmlns:ahyp="http://schemas.microsoft.com/office/drawing/2018/hyperlinkcolor" xmlns:p15="http://schemas.microsoft.com/office/powerpoint/2012/main" xmlns:p14="http://schemas.microsoft.com/office/powerpoint/2010/main" xmlns:com="http://schemas.openxmlformats.org/drawingml/2006/compatibility" xmlns:pvml="urn:schemas-microsoft-com:office:powerpoint" xmlns:v="urn:schemas-microsoft-com:vml" xmlns:o="urn:schemas-microsoft-com:office:office" xmlns:dgm="http://schemas.openxmlformats.org/drawingml/2006/diagram" xmlns:c="http://schemas.openxmlformats.org/drawingml/2006/chart" xmlns:mv="urn:schemas-microsoft-com:mac:vml" xmlns:mc="http://schemas.openxmlformats.org/markup-compatibility/2006" xmlns="" textRoundtripDataId="5"/>
+                    <go:slidesCustomData xmlns="" xmlns:mc="http://schemas.openxmlformats.org/markup-compatibility/2006" xmlns:mv="urn:schemas-microsoft-com:mac:vml" xmlns:c="http://schemas.openxmlformats.org/drawingml/2006/chart" xmlns:dgm="http://schemas.openxmlformats.org/drawingml/2006/diagram" xmlns:o="urn:schemas-microsoft-com:office:office" xmlns:v="urn:schemas-microsoft-com:vml" xmlns:pvml="urn:schemas-microsoft-com:office:powerpoint" xmlns:com="http://schemas.openxmlformats.org/drawingml/2006/compatibility" xmlns:p14="http://schemas.microsoft.com/office/powerpoint/2010/main" xmlns:p15="http://schemas.microsoft.com/office/powerpoint/2012/main" xmlns:ahyp="http://schemas.microsoft.com/office/drawing/2018/hyperlinkcolor" xmlns:go="http://customooxmlschemas.google.com/" textRoundtripDataId="5"/>
                   </a:ext>
                 </a:extLst>
               </a:rPr>
@@ -12055,35 +12084,6 @@
           </a:p>
         </p:txBody>
       </p:sp>
-      <p:pic>
-        <p:nvPicPr>
-          <p:cNvPr id="88" name="MapImage"/>
-          <p:cNvPicPr preferRelativeResize="0"/>
-          <p:nvPr/>
-        </p:nvPicPr>
-        <p:blipFill rotWithShape="1">
-          <a:blip r:embed="rId3">
-            <a:alphaModFix/>
-          </a:blip>
-          <a:srcRect b="8323"/>
-          <a:stretch/>
-        </p:blipFill>
-        <p:spPr>
-          <a:xfrm>
-            <a:off x="7324420" y="2166084"/>
-            <a:ext cx="4056654" cy="4348335"/>
-          </a:xfrm>
-          <a:prstGeom prst="roundRect">
-            <a:avLst>
-              <a:gd name="adj" fmla="val 2579"/>
-            </a:avLst>
-          </a:prstGeom>
-          <a:noFill/>
-          <a:ln>
-            <a:noFill/>
-          </a:ln>
-        </p:spPr>
-      </p:pic>
       <p:sp>
         <p:nvSpPr>
           <p:cNvPr id="89" name="Google Shape;89;p2"/>
@@ -12338,7 +12338,7 @@
         <p:spPr>
           <a:xfrm>
             <a:off x="710173" y="2752855"/>
-            <a:ext cx="1375500" cy="290167"/>
+            <a:ext cx="2321330" cy="290167"/>
           </a:xfrm>
           <a:prstGeom prst="rect">
             <a:avLst/>
@@ -12364,7 +12364,7 @@
               <a:buNone/>
             </a:pPr>
             <a:r>
-              <a:rPr lang="ru-RU" sz="1286" b="1" dirty="0">
+              <a:rPr lang="en-US" sz="1286" b="1" dirty="0">
                 <a:solidFill>
                   <a:schemeClr val="lt1"/>
                 </a:solidFill>
@@ -12373,7 +12373,7 @@
                 <a:cs typeface="Arial"/>
                 <a:sym typeface="Arial"/>
               </a:rPr>
-              <a:t>0,5</a:t>
+              <a:t>X</a:t>
             </a:r>
             <a:endParaRPr sz="571" dirty="0">
               <a:solidFill>
@@ -12422,7 +12422,7 @@
               <a:buNone/>
             </a:pPr>
             <a:r>
-              <a:rPr lang="ru-RU" sz="1286" b="1" dirty="0">
+              <a:rPr lang="en-US" sz="1286" b="1" dirty="0">
                 <a:solidFill>
                   <a:schemeClr val="lt1"/>
                 </a:solidFill>
@@ -12432,11 +12432,11 @@
                 <a:sym typeface="Arial"/>
                 <a:extLst>
                   <a:ext uri="http://customooxmlschemas.google.com/">
-                    <go:slidesCustomData xmlns="" xmlns:mc="http://schemas.openxmlformats.org/markup-compatibility/2006" xmlns:mv="urn:schemas-microsoft-com:mac:vml" xmlns:c="http://schemas.openxmlformats.org/drawingml/2006/chart" xmlns:dgm="http://schemas.openxmlformats.org/drawingml/2006/diagram" xmlns:o="urn:schemas-microsoft-com:office:office" xmlns:v="urn:schemas-microsoft-com:vml" xmlns:pvml="urn:schemas-microsoft-com:office:powerpoint" xmlns:com="http://schemas.openxmlformats.org/drawingml/2006/compatibility" xmlns:p14="http://schemas.microsoft.com/office/powerpoint/2010/main" xmlns:p15="http://schemas.microsoft.com/office/powerpoint/2012/main" xmlns:ahyp="http://schemas.microsoft.com/office/drawing/2018/hyperlinkcolor" xmlns:go="http://customooxmlschemas.google.com/" textRoundtripDataId="0"/>
+                    <go:slidesCustomData xmlns:go="http://customooxmlschemas.google.com/" xmlns:ahyp="http://schemas.microsoft.com/office/drawing/2018/hyperlinkcolor" xmlns:p15="http://schemas.microsoft.com/office/powerpoint/2012/main" xmlns:p14="http://schemas.microsoft.com/office/powerpoint/2010/main" xmlns:com="http://schemas.openxmlformats.org/drawingml/2006/compatibility" xmlns:pvml="urn:schemas-microsoft-com:office:powerpoint" xmlns:v="urn:schemas-microsoft-com:vml" xmlns:o="urn:schemas-microsoft-com:office:office" xmlns:dgm="http://schemas.openxmlformats.org/drawingml/2006/diagram" xmlns:c="http://schemas.openxmlformats.org/drawingml/2006/chart" xmlns:mv="urn:schemas-microsoft-com:mac:vml" xmlns:mc="http://schemas.openxmlformats.org/markup-compatibility/2006" xmlns="" textRoundtripDataId="0"/>
                   </a:ext>
                 </a:extLst>
               </a:rPr>
-              <a:t>15</a:t>
+              <a:t>X</a:t>
             </a:r>
             <a:endParaRPr lang="ru-RU" dirty="0"/>
           </a:p>
@@ -12555,7 +12555,7 @@
         <p:spPr>
           <a:xfrm>
             <a:off x="710180" y="3160168"/>
-            <a:ext cx="1057500" cy="290167"/>
+            <a:ext cx="2058900" cy="290167"/>
           </a:xfrm>
           <a:prstGeom prst="rect">
             <a:avLst/>
@@ -12581,6 +12581,18 @@
               <a:buNone/>
             </a:pPr>
             <a:r>
+              <a:rPr lang="en-US" sz="1286" b="1" dirty="0">
+                <a:solidFill>
+                  <a:schemeClr val="lt1"/>
+                </a:solidFill>
+                <a:latin typeface="Arial"/>
+                <a:ea typeface="Arial"/>
+                <a:cs typeface="Arial"/>
+                <a:sym typeface="Arial"/>
+              </a:rPr>
+              <a:t>X</a:t>
+            </a:r>
+            <a:r>
               <a:rPr lang="ru-RU" sz="1286" b="1" dirty="0">
                 <a:solidFill>
                   <a:schemeClr val="lt1"/>
@@ -12590,7 +12602,7 @@
                 <a:cs typeface="Arial"/>
                 <a:sym typeface="Arial"/>
               </a:rPr>
-              <a:t>2029 </a:t>
+              <a:t> </a:t>
             </a:r>
             <a:r>
               <a:rPr lang="ru-RU" sz="857" b="1" dirty="0">
@@ -12651,6 +12663,18 @@
               <a:buNone/>
             </a:pPr>
             <a:r>
+              <a:rPr lang="en-US" sz="1286" b="1" dirty="0">
+                <a:solidFill>
+                  <a:schemeClr val="lt1"/>
+                </a:solidFill>
+                <a:latin typeface="Arial"/>
+                <a:ea typeface="Arial"/>
+                <a:cs typeface="Arial"/>
+                <a:sym typeface="Arial"/>
+              </a:rPr>
+              <a:t>X</a:t>
+            </a:r>
+            <a:r>
               <a:rPr lang="ru-RU" sz="1286" b="1" dirty="0">
                 <a:solidFill>
                   <a:schemeClr val="lt1"/>
@@ -12660,7 +12684,7 @@
                 <a:cs typeface="Arial"/>
                 <a:sym typeface="Arial"/>
               </a:rPr>
-              <a:t>350 </a:t>
+              <a:t> </a:t>
             </a:r>
             <a:r>
               <a:rPr lang="ru-RU" sz="857" b="1" dirty="0">
@@ -12715,7 +12739,7 @@
       </p:sp>
       <p:pic>
         <p:nvPicPr>
-          <p:cNvPr id="99" name="Google Shape;99;p2" descr="Символика"/>
+          <p:cNvPr id="99" name="project_logo" descr="Символика"/>
           <p:cNvPicPr preferRelativeResize="0"/>
           <p:nvPr/>
         </p:nvPicPr>
@@ -13274,7 +13298,7 @@
         <p:nvCxnSpPr>
           <p:cNvPr id="109" name="Google Shape;109;p2"/>
           <p:cNvCxnSpPr>
-            <a:stCxn id="110" idx="1"/>
+            <a:cxnSpLocks/>
           </p:cNvCxnSpPr>
           <p:nvPr/>
         </p:nvCxnSpPr>
@@ -13380,14 +13404,14 @@
       </p:sp>
       <p:sp>
         <p:nvSpPr>
-          <p:cNvPr id="113" name="Google Shape;113;p2"/>
+          <p:cNvPr id="113" name="Google Shape"/>
           <p:cNvSpPr txBox="1"/>
           <p:nvPr/>
         </p:nvSpPr>
         <p:spPr>
           <a:xfrm>
             <a:off x="7832193" y="3882493"/>
-            <a:ext cx="1035540" cy="252826"/>
+            <a:ext cx="1035540" cy="131896"/>
           </a:xfrm>
           <a:prstGeom prst="rect">
             <a:avLst/>
@@ -13435,29 +13459,6 @@
                 <a:sym typeface="Arial"/>
               </a:rPr>
               <a:t> </a:t>
-            </a:r>
-            <a:br>
-              <a:rPr lang="ru-RU" sz="714" dirty="0">
-                <a:solidFill>
-                  <a:schemeClr val="dk1"/>
-                </a:solidFill>
-                <a:latin typeface="Arial"/>
-                <a:ea typeface="Arial"/>
-                <a:cs typeface="Arial"/>
-                <a:sym typeface="Arial"/>
-              </a:rPr>
-            </a:br>
-            <a:r>
-              <a:rPr lang="ru-RU" sz="786" dirty="0">
-                <a:solidFill>
-                  <a:schemeClr val="dk1"/>
-                </a:solidFill>
-                <a:latin typeface="Arial"/>
-                <a:ea typeface="Arial"/>
-                <a:cs typeface="Arial"/>
-                <a:sym typeface="Arial"/>
-              </a:rPr>
-              <a:t>Квартал Менделеева</a:t>
             </a:r>
             <a:endParaRPr sz="714" dirty="0">
               <a:solidFill>
@@ -13683,169 +13684,9 @@
           </a:p>
         </p:txBody>
       </p:sp>
-      <p:sp>
-        <p:nvSpPr>
-          <p:cNvPr id="118" name="Google Shape;118;p2"/>
-          <p:cNvSpPr/>
-          <p:nvPr/>
-        </p:nvSpPr>
-        <p:spPr>
-          <a:xfrm>
-            <a:off x="8495831" y="5610010"/>
-            <a:ext cx="282349" cy="166687"/>
-          </a:xfrm>
-          <a:custGeom>
-            <a:avLst/>
-            <a:gdLst/>
-            <a:ahLst/>
-            <a:cxnLst/>
-            <a:rect l="l" t="t" r="r" b="b"/>
-            <a:pathLst>
-              <a:path w="395288" h="233362" extrusionOk="0">
-                <a:moveTo>
-                  <a:pt x="0" y="83344"/>
-                </a:moveTo>
-                <a:lnTo>
-                  <a:pt x="369094" y="233362"/>
-                </a:lnTo>
-                <a:lnTo>
-                  <a:pt x="395288" y="154781"/>
-                </a:lnTo>
-                <a:lnTo>
-                  <a:pt x="38100" y="0"/>
-                </a:lnTo>
-                <a:lnTo>
-                  <a:pt x="0" y="83344"/>
-                </a:lnTo>
-                <a:close/>
-              </a:path>
-            </a:pathLst>
-          </a:custGeom>
-          <a:solidFill>
-            <a:srgbClr val="7F7F7F">
-              <a:alpha val="49803"/>
-            </a:srgbClr>
-          </a:solidFill>
-          <a:ln w="12700" cap="flat" cmpd="sng">
-            <a:solidFill>
-              <a:schemeClr val="dk1"/>
-            </a:solidFill>
-            <a:prstDash val="solid"/>
-            <a:miter lim="800000"/>
-            <a:headEnd type="none" w="sm" len="sm"/>
-            <a:tailEnd type="none" w="sm" len="sm"/>
-          </a:ln>
-        </p:spPr>
-        <p:txBody>
-          <a:bodyPr spcFirstLastPara="1" wrap="square" lIns="91425" tIns="45700" rIns="91425" bIns="45700" anchor="ctr" anchorCtr="0">
-            <a:noAutofit/>
-          </a:bodyPr>
-          <a:lstStyle/>
-          <a:p>
-            <a:pPr marL="0" marR="0" lvl="0" indent="0" algn="ctr" rtl="0">
-              <a:spcBef>
-                <a:spcPts val="0"/>
-              </a:spcBef>
-              <a:spcAft>
-                <a:spcPts val="0"/>
-              </a:spcAft>
-              <a:buNone/>
-            </a:pPr>
-            <a:endParaRPr sz="1286">
-              <a:solidFill>
-                <a:schemeClr val="dk1"/>
-              </a:solidFill>
-              <a:latin typeface="Arial"/>
-              <a:ea typeface="Arial"/>
-              <a:cs typeface="Arial"/>
-              <a:sym typeface="Arial"/>
-            </a:endParaRPr>
-          </a:p>
-        </p:txBody>
-      </p:sp>
-      <p:sp>
-        <p:nvSpPr>
-          <p:cNvPr id="110" name="Google Shape;110;p2"/>
-          <p:cNvSpPr/>
-          <p:nvPr/>
-        </p:nvSpPr>
-        <p:spPr>
-          <a:xfrm>
-            <a:off x="8530049" y="5733704"/>
-            <a:ext cx="119063" cy="110558"/>
-          </a:xfrm>
-          <a:custGeom>
-            <a:avLst/>
-            <a:gdLst/>
-            <a:ahLst/>
-            <a:cxnLst/>
-            <a:rect l="l" t="t" r="r" b="b"/>
-            <a:pathLst>
-              <a:path w="166688" h="154781" extrusionOk="0">
-                <a:moveTo>
-                  <a:pt x="0" y="88106"/>
-                </a:moveTo>
-                <a:lnTo>
-                  <a:pt x="104775" y="154781"/>
-                </a:lnTo>
-                <a:lnTo>
-                  <a:pt x="166688" y="42862"/>
-                </a:lnTo>
-                <a:lnTo>
-                  <a:pt x="61913" y="0"/>
-                </a:lnTo>
-                <a:lnTo>
-                  <a:pt x="0" y="88106"/>
-                </a:lnTo>
-                <a:close/>
-              </a:path>
-            </a:pathLst>
-          </a:custGeom>
-          <a:solidFill>
-            <a:srgbClr val="009640">
-              <a:alpha val="49803"/>
-            </a:srgbClr>
-          </a:solidFill>
-          <a:ln w="12700" cap="flat" cmpd="sng">
-            <a:solidFill>
-              <a:srgbClr val="009640"/>
-            </a:solidFill>
-            <a:prstDash val="solid"/>
-            <a:miter lim="800000"/>
-            <a:headEnd type="none" w="sm" len="sm"/>
-            <a:tailEnd type="none" w="sm" len="sm"/>
-          </a:ln>
-        </p:spPr>
-        <p:txBody>
-          <a:bodyPr spcFirstLastPara="1" wrap="square" lIns="91425" tIns="45700" rIns="91425" bIns="45700" anchor="ctr" anchorCtr="0">
-            <a:noAutofit/>
-          </a:bodyPr>
-          <a:lstStyle/>
-          <a:p>
-            <a:pPr marL="0" marR="0" lvl="0" indent="0" algn="ctr" rtl="0">
-              <a:spcBef>
-                <a:spcPts val="0"/>
-              </a:spcBef>
-              <a:spcAft>
-                <a:spcPts val="0"/>
-              </a:spcAft>
-              <a:buNone/>
-            </a:pPr>
-            <a:endParaRPr sz="1286">
-              <a:solidFill>
-                <a:schemeClr val="dk1"/>
-              </a:solidFill>
-              <a:latin typeface="Arial"/>
-              <a:ea typeface="Arial"/>
-              <a:cs typeface="Arial"/>
-              <a:sym typeface="Arial"/>
-            </a:endParaRPr>
-          </a:p>
-        </p:txBody>
-      </p:sp>
       <p:pic>
         <p:nvPicPr>
-          <p:cNvPr id="119" name="Google Shape;119;p2" descr="БЦ Инновационный центр «Технопарк-Сколково» (Квартал Менделеева, Нобеля, 5)  – аренда и продажа помещений, офисов в Бизнес Центре Инновационный центр  «Технопарк-Сколково» (Квартал Менделеева, Нобеля, 5), Москва, Сколково  инновационного центра территория ..."/>
+          <p:cNvPr id="119" name="surrounding_render_1" descr="БЦ Инновационный центр «Технопарк-Сколково» (Квартал Менделеева, Нобеля, 5)  – аренда и продажа помещений, офисов в Бизнес Центре Инновационный центр  «Технопарк-Сколково» (Квартал Менделеева, Нобеля, 5), Москва, Сколково  инновационного центра территория ..."/>
           <p:cNvPicPr preferRelativeResize="0"/>
           <p:nvPr/>
         </p:nvPicPr>
@@ -14042,7 +13883,7 @@
                 </a:solidFill>
                 <a:extLst>
                   <a:ext uri="http://customooxmlschemas.google.com/">
-                    <go:slidesCustomData xmlns="" xmlns:mc="http://schemas.openxmlformats.org/markup-compatibility/2006" xmlns:mv="urn:schemas-microsoft-com:mac:vml" xmlns:c="http://schemas.openxmlformats.org/drawingml/2006/chart" xmlns:dgm="http://schemas.openxmlformats.org/drawingml/2006/diagram" xmlns:o="urn:schemas-microsoft-com:office:office" xmlns:v="urn:schemas-microsoft-com:vml" xmlns:pvml="urn:schemas-microsoft-com:office:powerpoint" xmlns:com="http://schemas.openxmlformats.org/drawingml/2006/compatibility" xmlns:p14="http://schemas.microsoft.com/office/powerpoint/2010/main" xmlns:p15="http://schemas.microsoft.com/office/powerpoint/2012/main" xmlns:ahyp="http://schemas.microsoft.com/office/drawing/2018/hyperlinkcolor" xmlns:go="http://customooxmlschemas.google.com/" textRoundtripDataId="7"/>
+                    <go:slidesCustomData xmlns:go="http://customooxmlschemas.google.com/" xmlns:ahyp="http://schemas.microsoft.com/office/drawing/2018/hyperlinkcolor" xmlns:p15="http://schemas.microsoft.com/office/powerpoint/2012/main" xmlns:p14="http://schemas.microsoft.com/office/powerpoint/2010/main" xmlns:com="http://schemas.openxmlformats.org/drawingml/2006/compatibility" xmlns:pvml="urn:schemas-microsoft-com:office:powerpoint" xmlns:v="urn:schemas-microsoft-com:vml" xmlns:o="urn:schemas-microsoft-com:office:office" xmlns:dgm="http://schemas.openxmlformats.org/drawingml/2006/diagram" xmlns:c="http://schemas.openxmlformats.org/drawingml/2006/chart" xmlns:mv="urn:schemas-microsoft-com:mac:vml" xmlns:mc="http://schemas.openxmlformats.org/markup-compatibility/2006" xmlns="" textRoundtripDataId="7"/>
                   </a:ext>
                 </a:extLst>
               </a:rPr>
@@ -14204,7 +14045,7 @@
                 </a:solidFill>
                 <a:extLst>
                   <a:ext uri="http://customooxmlschemas.google.com/">
-                    <go:slidesCustomData xmlns:go="http://customooxmlschemas.google.com/" xmlns:ahyp="http://schemas.microsoft.com/office/drawing/2018/hyperlinkcolor" xmlns:p15="http://schemas.microsoft.com/office/powerpoint/2012/main" xmlns:p14="http://schemas.microsoft.com/office/powerpoint/2010/main" xmlns:com="http://schemas.openxmlformats.org/drawingml/2006/compatibility" xmlns:pvml="urn:schemas-microsoft-com:office:powerpoint" xmlns:v="urn:schemas-microsoft-com:vml" xmlns:o="urn:schemas-microsoft-com:office:office" xmlns:dgm="http://schemas.openxmlformats.org/drawingml/2006/diagram" xmlns:c="http://schemas.openxmlformats.org/drawingml/2006/chart" xmlns:mv="urn:schemas-microsoft-com:mac:vml" xmlns:mc="http://schemas.openxmlformats.org/markup-compatibility/2006" xmlns="" textRoundtripDataId="2"/>
+                    <go:slidesCustomData xmlns="" xmlns:mc="http://schemas.openxmlformats.org/markup-compatibility/2006" xmlns:mv="urn:schemas-microsoft-com:mac:vml" xmlns:c="http://schemas.openxmlformats.org/drawingml/2006/chart" xmlns:dgm="http://schemas.openxmlformats.org/drawingml/2006/diagram" xmlns:o="urn:schemas-microsoft-com:office:office" xmlns:v="urn:schemas-microsoft-com:vml" xmlns:pvml="urn:schemas-microsoft-com:office:powerpoint" xmlns:com="http://schemas.openxmlformats.org/drawingml/2006/compatibility" xmlns:p14="http://schemas.microsoft.com/office/powerpoint/2010/main" xmlns:p15="http://schemas.microsoft.com/office/powerpoint/2012/main" xmlns:ahyp="http://schemas.microsoft.com/office/drawing/2018/hyperlinkcolor" xmlns:go="http://customooxmlschemas.google.com/" textRoundtripDataId="2"/>
                   </a:ext>
                 </a:extLst>
               </a:rPr>
@@ -14228,7 +14069,7 @@
                 </a:solidFill>
                 <a:extLst>
                   <a:ext uri="http://customooxmlschemas.google.com/">
-                    <go:slidesCustomData xmlns:go="http://customooxmlschemas.google.com/" xmlns:ahyp="http://schemas.microsoft.com/office/drawing/2018/hyperlinkcolor" xmlns:p15="http://schemas.microsoft.com/office/powerpoint/2012/main" xmlns:p14="http://schemas.microsoft.com/office/powerpoint/2010/main" xmlns:com="http://schemas.openxmlformats.org/drawingml/2006/compatibility" xmlns:pvml="urn:schemas-microsoft-com:office:powerpoint" xmlns:v="urn:schemas-microsoft-com:vml" xmlns:o="urn:schemas-microsoft-com:office:office" xmlns:dgm="http://schemas.openxmlformats.org/drawingml/2006/diagram" xmlns:c="http://schemas.openxmlformats.org/drawingml/2006/chart" xmlns:mv="urn:schemas-microsoft-com:mac:vml" xmlns:mc="http://schemas.openxmlformats.org/markup-compatibility/2006" xmlns="" textRoundtripDataId="5"/>
+                    <go:slidesCustomData xmlns="" xmlns:mc="http://schemas.openxmlformats.org/markup-compatibility/2006" xmlns:mv="urn:schemas-microsoft-com:mac:vml" xmlns:c="http://schemas.openxmlformats.org/drawingml/2006/chart" xmlns:dgm="http://schemas.openxmlformats.org/drawingml/2006/diagram" xmlns:o="urn:schemas-microsoft-com:office:office" xmlns:v="urn:schemas-microsoft-com:vml" xmlns:pvml="urn:schemas-microsoft-com:office:powerpoint" xmlns:com="http://schemas.openxmlformats.org/drawingml/2006/compatibility" xmlns:p14="http://schemas.microsoft.com/office/powerpoint/2010/main" xmlns:p15="http://schemas.microsoft.com/office/powerpoint/2012/main" xmlns:ahyp="http://schemas.microsoft.com/office/drawing/2018/hyperlinkcolor" xmlns:go="http://customooxmlschemas.google.com/" textRoundtripDataId="5"/>
                   </a:ext>
                 </a:extLst>
               </a:rPr>
@@ -14290,6 +14131,70 @@
               <a:t>* - Сноска с полным составом проекта</a:t>
             </a:r>
             <a:endParaRPr dirty="0"/>
+          </a:p>
+        </p:txBody>
+      </p:sp>
+      <p:sp>
+        <p:nvSpPr>
+          <p:cNvPr id="5" name="surrounding_title_1">
+            <a:extLst>
+              <a:ext uri="{FF2B5EF4-FFF2-40B4-BE49-F238E27FC236}">
+                <a16:creationId xmlns:a16="http://schemas.microsoft.com/office/drawing/2014/main" id="{10198B18-7BB1-C394-BEE1-52B9ACD110C5}"/>
+              </a:ext>
+            </a:extLst>
+          </p:cNvPr>
+          <p:cNvSpPr txBox="1"/>
+          <p:nvPr/>
+        </p:nvSpPr>
+        <p:spPr>
+          <a:xfrm>
+            <a:off x="7837605" y="4030772"/>
+            <a:ext cx="1035540" cy="120931"/>
+          </a:xfrm>
+          <a:prstGeom prst="rect">
+            <a:avLst/>
+          </a:prstGeom>
+          <a:noFill/>
+          <a:ln>
+            <a:noFill/>
+          </a:ln>
+        </p:spPr>
+        <p:txBody>
+          <a:bodyPr spcFirstLastPara="1" wrap="square" lIns="0" tIns="0" rIns="0" bIns="0" anchor="t" anchorCtr="0">
+            <a:spAutoFit/>
+          </a:bodyPr>
+          <a:lstStyle/>
+          <a:p>
+            <a:pPr marL="0" marR="0" lvl="0" indent="0" algn="l" rtl="0">
+              <a:spcBef>
+                <a:spcPts val="0"/>
+              </a:spcBef>
+              <a:spcAft>
+                <a:spcPts val="0"/>
+              </a:spcAft>
+              <a:buNone/>
+            </a:pPr>
+            <a:r>
+              <a:rPr lang="ru-RU" sz="786" dirty="0">
+                <a:solidFill>
+                  <a:schemeClr val="dk1"/>
+                </a:solidFill>
+                <a:latin typeface="Arial"/>
+                <a:ea typeface="Arial"/>
+                <a:cs typeface="Arial"/>
+                <a:sym typeface="Arial"/>
+              </a:rPr>
+              <a:t>Квартал Менделеева</a:t>
+            </a:r>
+            <a:endParaRPr sz="714" dirty="0">
+              <a:solidFill>
+                <a:schemeClr val="dk1"/>
+              </a:solidFill>
+              <a:latin typeface="Arial"/>
+              <a:ea typeface="Arial"/>
+              <a:cs typeface="Arial"/>
+              <a:sym typeface="Arial"/>
+            </a:endParaRPr>
           </a:p>
         </p:txBody>
       </p:sp>

--- a/src/assets/slide_sample.pptx
+++ b/src/assets/slide_sample.pptx
@@ -295,59 +295,6 @@
     </p:extLst>
   </p:cmAuthor>
 </p:cmAuthorLst>
-</file>
-
-<file path=ppt/comments/comment1.xml><?xml version="1.0" encoding="utf-8"?>
-<p:cmLst xmlns:a="http://schemas.openxmlformats.org/drawingml/2006/main" xmlns:r="http://schemas.openxmlformats.org/officeDocument/2006/relationships" xmlns:p="http://schemas.openxmlformats.org/presentationml/2006/main">
-  <p:cm authorId="0" dt="2026-01-11T13:48:46.459" idx="2">
-    <p:pos x="257" y="232"/>
-    <p:text>Столбец Название объекта</p:text>
-    <p:extLst>
-      <p:ext uri="{C676402C-5697-4E1C-873F-D02D1690AC5C}">
-        <p15:threadingInfo xmlns:p15="http://schemas.microsoft.com/office/powerpoint/2012/main" timeZoneBias="0"/>
-      </p:ext>
-      <p:ext uri="http://customooxmlschemas.google.com/">
-        <go:slidesCustomData xmlns:go="http://customooxmlschemas.google.com/" xmlns:ahyp="http://schemas.microsoft.com/office/drawing/2018/hyperlinkcolor" xmlns:p15="http://schemas.microsoft.com/office/powerpoint/2012/main" xmlns:p14="http://schemas.microsoft.com/office/powerpoint/2010/main" xmlns:com="http://schemas.openxmlformats.org/drawingml/2006/compatibility" xmlns:pvml="urn:schemas-microsoft-com:office:powerpoint" xmlns:v="urn:schemas-microsoft-com:vml" xmlns:o="urn:schemas-microsoft-com:office:office" xmlns:dgm="http://schemas.openxmlformats.org/drawingml/2006/diagram" xmlns:c="http://schemas.openxmlformats.org/drawingml/2006/chart" xmlns:mv="urn:schemas-microsoft-com:mac:vml" xmlns:mc="http://schemas.openxmlformats.org/markup-compatibility/2006" xmlns="" commentPostId="AAAByePcYt0"/>
-      </p:ext>
-    </p:extLst>
-  </p:cm>
-  <p:cm authorId="0" dt="2026-01-11T13:51:28.435" idx="4">
-    <p:pos x="241" y="1672"/>
-    <p:text>Столбец Площадь ОКС</p:text>
-    <p:extLst mod="1">
-      <p:ext uri="{C676402C-5697-4E1C-873F-D02D1690AC5C}">
-        <p15:threadingInfo xmlns:p15="http://schemas.microsoft.com/office/powerpoint/2012/main" timeZoneBias="0"/>
-      </p:ext>
-      <p:ext uri="http://customooxmlschemas.google.com/">
-        <go:slidesCustomData xmlns:go="http://customooxmlschemas.google.com/" xmlns:ahyp="http://schemas.microsoft.com/office/drawing/2018/hyperlinkcolor" xmlns:p15="http://schemas.microsoft.com/office/powerpoint/2012/main" xmlns:p14="http://schemas.microsoft.com/office/powerpoint/2010/main" xmlns:com="http://schemas.openxmlformats.org/drawingml/2006/compatibility" xmlns:pvml="urn:schemas-microsoft-com:office:powerpoint" xmlns:v="urn:schemas-microsoft-com:vml" xmlns:o="urn:schemas-microsoft-com:office:office" xmlns:dgm="http://schemas.openxmlformats.org/drawingml/2006/diagram" xmlns:c="http://schemas.openxmlformats.org/drawingml/2006/chart" xmlns:mv="urn:schemas-microsoft-com:mac:vml" xmlns:mc="http://schemas.openxmlformats.org/markup-compatibility/2006" xmlns="" commentPostId="AAAByePcYt4"/>
-      </p:ext>
-    </p:extLst>
-  </p:cm>
-  <p:cm authorId="0" dt="2026-01-11T13:52:12.853" idx="3">
-    <p:pos x="179" y="1524"/>
-    <p:text>Столбец Площадь ЗУ</p:text>
-    <p:extLst mod="1">
-      <p:ext uri="{C676402C-5697-4E1C-873F-D02D1690AC5C}">
-        <p15:threadingInfo xmlns:p15="http://schemas.microsoft.com/office/powerpoint/2012/main" timeZoneBias="0"/>
-      </p:ext>
-      <p:ext uri="http://customooxmlschemas.google.com/">
-        <go:slidesCustomData xmlns:go="http://customooxmlschemas.google.com/" xmlns:ahyp="http://schemas.microsoft.com/office/drawing/2018/hyperlinkcolor" xmlns:p15="http://schemas.microsoft.com/office/powerpoint/2012/main" xmlns:p14="http://schemas.microsoft.com/office/powerpoint/2010/main" xmlns:com="http://schemas.openxmlformats.org/drawingml/2006/compatibility" xmlns:pvml="urn:schemas-microsoft-com:office:powerpoint" xmlns:v="urn:schemas-microsoft-com:vml" xmlns:o="urn:schemas-microsoft-com:office:office" xmlns:dgm="http://schemas.openxmlformats.org/drawingml/2006/diagram" xmlns:c="http://schemas.openxmlformats.org/drawingml/2006/chart" xmlns:mv="urn:schemas-microsoft-com:mac:vml" xmlns:mc="http://schemas.openxmlformats.org/markup-compatibility/2006" xmlns="" commentPostId="AAAByePcet0"/>
-      </p:ext>
-    </p:extLst>
-  </p:cm>
-  <p:cm authorId="0" dt="2026-01-11T13:52:50.083" idx="1">
-    <p:pos x="447" y="1990"/>
-    <p:text>Столбец Год ввода в эксплуатацию</p:text>
-    <p:extLst>
-      <p:ext uri="{C676402C-5697-4E1C-873F-D02D1690AC5C}">
-        <p15:threadingInfo xmlns:p15="http://schemas.microsoft.com/office/powerpoint/2012/main" timeZoneBias="0"/>
-      </p:ext>
-      <p:ext uri="http://customooxmlschemas.google.com/">
-        <go:slidesCustomData xmlns:go="http://customooxmlschemas.google.com/" xmlns:ahyp="http://schemas.microsoft.com/office/drawing/2018/hyperlinkcolor" xmlns:p15="http://schemas.microsoft.com/office/powerpoint/2012/main" xmlns:p14="http://schemas.microsoft.com/office/powerpoint/2010/main" xmlns:com="http://schemas.openxmlformats.org/drawingml/2006/compatibility" xmlns:pvml="urn:schemas-microsoft-com:office:powerpoint" xmlns:v="urn:schemas-microsoft-com:vml" xmlns:o="urn:schemas-microsoft-com:office:office" xmlns:dgm="http://schemas.openxmlformats.org/drawingml/2006/diagram" xmlns:c="http://schemas.openxmlformats.org/drawingml/2006/chart" xmlns:mv="urn:schemas-microsoft-com:mac:vml" xmlns:mc="http://schemas.openxmlformats.org/markup-compatibility/2006" xmlns="" commentPostId="AAAByePcet4"/>
-      </p:ext>
-    </p:extLst>
-  </p:cm>
-</p:cmLst>
 </file>
 
 <file path=ppt/notesMasters/notesMaster1.xml><?xml version="1.0" encoding="utf-8"?>
@@ -11965,6 +11912,64 @@
           <a:chExt cx="0" cy="0"/>
         </a:xfrm>
       </p:grpSpPr>
+      <p:sp>
+        <p:nvSpPr>
+          <p:cNvPr id="93" name="zu_area_ga"/>
+          <p:cNvSpPr txBox="1"/>
+          <p:nvPr/>
+        </p:nvSpPr>
+        <p:spPr>
+          <a:xfrm>
+            <a:off x="2278518" y="3136646"/>
+            <a:ext cx="719796" cy="290167"/>
+          </a:xfrm>
+          <a:prstGeom prst="rect">
+            <a:avLst/>
+          </a:prstGeom>
+          <a:noFill/>
+          <a:ln>
+            <a:noFill/>
+          </a:ln>
+        </p:spPr>
+        <p:txBody>
+          <a:bodyPr spcFirstLastPara="1" wrap="square" lIns="91425" tIns="45700" rIns="91425" bIns="45700" anchor="t" anchorCtr="0">
+            <a:spAutoFit/>
+          </a:bodyPr>
+          <a:lstStyle/>
+          <a:p>
+            <a:pPr marL="0" marR="0" lvl="0" indent="0" algn="l" rtl="0">
+              <a:spcBef>
+                <a:spcPts val="0"/>
+              </a:spcBef>
+              <a:spcAft>
+                <a:spcPts val="0"/>
+              </a:spcAft>
+              <a:buNone/>
+            </a:pPr>
+            <a:r>
+              <a:rPr lang="en-US" sz="1286" b="1" dirty="0">
+                <a:solidFill>
+                  <a:schemeClr val="lt1"/>
+                </a:solidFill>
+                <a:latin typeface="Arial"/>
+                <a:ea typeface="Arial"/>
+                <a:cs typeface="Arial"/>
+                <a:sym typeface="Arial"/>
+              </a:rPr>
+              <a:t>X</a:t>
+            </a:r>
+            <a:endParaRPr sz="571" dirty="0">
+              <a:solidFill>
+                <a:schemeClr val="lt1"/>
+              </a:solidFill>
+              <a:latin typeface="Arial"/>
+              <a:ea typeface="Arial"/>
+              <a:cs typeface="Arial"/>
+              <a:sym typeface="Arial"/>
+            </a:endParaRPr>
+          </a:p>
+        </p:txBody>
+      </p:sp>
       <p:pic>
         <p:nvPicPr>
           <p:cNvPr id="88" name="MapImage"/>
@@ -11980,7 +11985,7 @@
         </p:blipFill>
         <p:spPr>
           <a:xfrm>
-            <a:off x="7324420" y="2166084"/>
+            <a:off x="7324420" y="1105908"/>
             <a:ext cx="4056654" cy="4348335"/>
           </a:xfrm>
           <a:prstGeom prst="roundRect">
@@ -12008,8 +12013,8 @@
         </p:nvSpPr>
         <p:spPr>
           <a:xfrm>
-            <a:off x="717949" y="2813195"/>
-            <a:ext cx="1503874" cy="312073"/>
+            <a:off x="2262676" y="3364760"/>
+            <a:ext cx="772409" cy="180178"/>
           </a:xfrm>
           <a:prstGeom prst="rect">
             <a:avLst/>
@@ -12021,43 +12026,6 @@
             <a:spAutoFit/>
           </a:bodyPr>
           <a:lstStyle/>
-          <a:p>
-            <a:pPr marL="0" marR="0" lvl="0" indent="0" algn="l" rtl="0">
-              <a:spcBef>
-                <a:spcPts val="0"/>
-              </a:spcBef>
-              <a:spcAft>
-                <a:spcPts val="0"/>
-              </a:spcAft>
-              <a:buNone/>
-            </a:pPr>
-            <a:r>
-              <a:rPr lang="en-US" sz="857" b="1" dirty="0">
-                <a:solidFill>
-                  <a:schemeClr val="lt1"/>
-                </a:solidFill>
-                <a:extLst>
-                  <a:ext uri="http://customooxmlschemas.google.com/">
-                    <go:slidesCustomData xmlns="" xmlns:mc="http://schemas.openxmlformats.org/markup-compatibility/2006" xmlns:mv="urn:schemas-microsoft-com:mac:vml" xmlns:c="http://schemas.openxmlformats.org/drawingml/2006/chart" xmlns:dgm="http://schemas.openxmlformats.org/drawingml/2006/diagram" xmlns:o="urn:schemas-microsoft-com:office:office" xmlns:v="urn:schemas-microsoft-com:vml" xmlns:pvml="urn:schemas-microsoft-com:office:powerpoint" xmlns:com="http://schemas.openxmlformats.org/drawingml/2006/compatibility" xmlns:p14="http://schemas.microsoft.com/office/powerpoint/2010/main" xmlns:p15="http://schemas.microsoft.com/office/powerpoint/2012/main" xmlns:ahyp="http://schemas.microsoft.com/office/drawing/2018/hyperlinkcolor" xmlns:go="http://customooxmlschemas.google.com/" textRoundtripDataId="2"/>
-                  </a:ext>
-                </a:extLst>
-              </a:rPr>
-              <a:t>          </a:t>
-            </a:r>
-            <a:r>
-              <a:rPr lang="ru-RU" sz="857" b="1" dirty="0">
-                <a:solidFill>
-                  <a:schemeClr val="lt1"/>
-                </a:solidFill>
-                <a:extLst>
-                  <a:ext uri="http://customooxmlschemas.google.com/">
-                    <go:slidesCustomData xmlns="" xmlns:mc="http://schemas.openxmlformats.org/markup-compatibility/2006" xmlns:mv="urn:schemas-microsoft-com:mac:vml" xmlns:c="http://schemas.openxmlformats.org/drawingml/2006/chart" xmlns:dgm="http://schemas.openxmlformats.org/drawingml/2006/diagram" xmlns:o="urn:schemas-microsoft-com:office:office" xmlns:v="urn:schemas-microsoft-com:vml" xmlns:pvml="urn:schemas-microsoft-com:office:powerpoint" xmlns:com="http://schemas.openxmlformats.org/drawingml/2006/compatibility" xmlns:p14="http://schemas.microsoft.com/office/powerpoint/2010/main" xmlns:p15="http://schemas.microsoft.com/office/powerpoint/2012/main" xmlns:ahyp="http://schemas.microsoft.com/office/drawing/2018/hyperlinkcolor" xmlns:go="http://customooxmlschemas.google.com/" textRoundtripDataId="2"/>
-                  </a:ext>
-                </a:extLst>
-              </a:rPr>
-              <a:t>га</a:t>
-            </a:r>
-          </a:p>
           <a:p>
             <a:pPr marL="0" marR="0" lvl="0" indent="0" algn="l" rtl="0">
               <a:spcBef>
@@ -12140,263 +12108,14 @@
       </p:sp>
       <p:sp>
         <p:nvSpPr>
-          <p:cNvPr id="90" name="Google Shape;90;p2"/>
-          <p:cNvSpPr txBox="1">
-            <a:spLocks noGrp="1"/>
-          </p:cNvSpPr>
-          <p:nvPr>
-            <p:ph type="title"/>
-          </p:nvPr>
-        </p:nvSpPr>
-        <p:spPr>
-          <a:xfrm>
-            <a:off x="432210" y="1031160"/>
-            <a:ext cx="11197253" cy="373729"/>
-          </a:xfrm>
-          <a:prstGeom prst="rect">
-            <a:avLst/>
-          </a:prstGeom>
-          <a:noFill/>
-          <a:ln>
-            <a:noFill/>
-          </a:ln>
-        </p:spPr>
-        <p:txBody>
-          <a:bodyPr spcFirstLastPara="1" wrap="square" lIns="91425" tIns="45700" rIns="91425" bIns="45700" anchor="ctr" anchorCtr="0">
-            <a:noAutofit/>
-          </a:bodyPr>
-          <a:lstStyle/>
-          <a:p>
-            <a:pPr marL="0" lvl="0" indent="0" algn="l" rtl="0">
-              <a:lnSpc>
-                <a:spcPct val="90000"/>
-              </a:lnSpc>
-              <a:spcBef>
-                <a:spcPts val="0"/>
-              </a:spcBef>
-              <a:spcAft>
-                <a:spcPts val="0"/>
-              </a:spcAft>
-              <a:buClr>
-                <a:schemeClr val="lt1"/>
-              </a:buClr>
-              <a:buSzPts val="1200"/>
-              <a:buFont typeface="Arial"/>
-              <a:buNone/>
-            </a:pPr>
-            <a:r>
-              <a:rPr lang="ru-RU" sz="1200" b="1" dirty="0">
-                <a:solidFill>
-                  <a:schemeClr val="lt1"/>
-                </a:solidFill>
-                <a:latin typeface="Arial"/>
-                <a:ea typeface="Arial"/>
-                <a:cs typeface="Arial"/>
-                <a:sym typeface="Arial"/>
-              </a:rPr>
-              <a:t>XX</a:t>
-            </a:r>
-            <a:br>
-              <a:rPr lang="ru-RU" sz="1600" b="1" dirty="0">
-                <a:solidFill>
-                  <a:schemeClr val="lt1"/>
-                </a:solidFill>
-                <a:latin typeface="Arial"/>
-                <a:ea typeface="Arial"/>
-                <a:cs typeface="Arial"/>
-                <a:sym typeface="Arial"/>
-              </a:rPr>
-            </a:br>
-            <a:endParaRPr sz="1600" b="1" dirty="0">
-              <a:solidFill>
-                <a:schemeClr val="lt1"/>
-              </a:solidFill>
-              <a:latin typeface="Arial"/>
-              <a:ea typeface="Arial"/>
-              <a:cs typeface="Arial"/>
-              <a:sym typeface="Arial"/>
-            </a:endParaRPr>
-          </a:p>
-        </p:txBody>
-      </p:sp>
-      <p:sp>
-        <p:nvSpPr>
-          <p:cNvPr id="91" name="Google Shape;91;p2"/>
-          <p:cNvSpPr/>
-          <p:nvPr/>
-        </p:nvSpPr>
-        <p:spPr>
-          <a:xfrm rot="5400000" flipH="1">
-            <a:off x="3416835" y="-1677666"/>
-            <a:ext cx="45719" cy="5871387"/>
-          </a:xfrm>
-          <a:prstGeom prst="roundRect">
-            <a:avLst>
-              <a:gd name="adj" fmla="val 50000"/>
-            </a:avLst>
-          </a:prstGeom>
-          <a:solidFill>
-            <a:srgbClr val="009640"/>
-          </a:solidFill>
-          <a:ln w="12700" cap="flat" cmpd="sng">
-            <a:solidFill>
-              <a:srgbClr val="009640"/>
-            </a:solidFill>
-            <a:prstDash val="solid"/>
-            <a:miter lim="800000"/>
-            <a:headEnd type="none" w="sm" len="sm"/>
-            <a:tailEnd type="none" w="sm" len="sm"/>
-          </a:ln>
-        </p:spPr>
-        <p:txBody>
-          <a:bodyPr spcFirstLastPara="1" wrap="square" lIns="91425" tIns="45700" rIns="91425" bIns="45700" anchor="ctr" anchorCtr="0">
-            <a:noAutofit/>
-          </a:bodyPr>
-          <a:lstStyle/>
-          <a:p>
-            <a:pPr marL="0" marR="0" lvl="0" indent="0" algn="ctr" rtl="0">
-              <a:spcBef>
-                <a:spcPts val="0"/>
-              </a:spcBef>
-              <a:spcAft>
-                <a:spcPts val="0"/>
-              </a:spcAft>
-              <a:buNone/>
-            </a:pPr>
-            <a:endParaRPr sz="1286">
-              <a:solidFill>
-                <a:schemeClr val="lt1"/>
-              </a:solidFill>
-              <a:latin typeface="Arial"/>
-              <a:ea typeface="Arial"/>
-              <a:cs typeface="Arial"/>
-              <a:sym typeface="Arial"/>
-            </a:endParaRPr>
-          </a:p>
-        </p:txBody>
-      </p:sp>
-      <p:sp>
-        <p:nvSpPr>
-          <p:cNvPr id="92" name="Google Shape;92;p2"/>
-          <p:cNvSpPr/>
-          <p:nvPr/>
-        </p:nvSpPr>
-        <p:spPr>
-          <a:xfrm>
-            <a:off x="514149" y="2218768"/>
-            <a:ext cx="5871300" cy="1771200"/>
-          </a:xfrm>
-          <a:prstGeom prst="roundRect">
-            <a:avLst>
-              <a:gd name="adj" fmla="val 4594"/>
-            </a:avLst>
-          </a:prstGeom>
-          <a:noFill/>
-          <a:ln w="25400" cap="flat" cmpd="sng">
-            <a:solidFill>
-              <a:srgbClr val="009640"/>
-            </a:solidFill>
-            <a:prstDash val="solid"/>
-            <a:miter lim="800000"/>
-            <a:headEnd type="none" w="sm" len="sm"/>
-            <a:tailEnd type="none" w="sm" len="sm"/>
-          </a:ln>
-        </p:spPr>
-        <p:txBody>
-          <a:bodyPr spcFirstLastPara="1" wrap="square" lIns="91425" tIns="45700" rIns="91425" bIns="45700" anchor="ctr" anchorCtr="0">
-            <a:noAutofit/>
-          </a:bodyPr>
-          <a:lstStyle/>
-          <a:p>
-            <a:pPr marL="0" marR="0" lvl="0" indent="0" algn="ctr" rtl="0">
-              <a:spcBef>
-                <a:spcPts val="0"/>
-              </a:spcBef>
-              <a:spcAft>
-                <a:spcPts val="0"/>
-              </a:spcAft>
-              <a:buNone/>
-            </a:pPr>
-            <a:endParaRPr sz="1714">
-              <a:solidFill>
-                <a:schemeClr val="lt1"/>
-              </a:solidFill>
-              <a:latin typeface="Arial"/>
-              <a:ea typeface="Arial"/>
-              <a:cs typeface="Arial"/>
-              <a:sym typeface="Arial"/>
-            </a:endParaRPr>
-          </a:p>
-        </p:txBody>
-      </p:sp>
-      <p:sp>
-        <p:nvSpPr>
-          <p:cNvPr id="93" name="zu_area_ga"/>
-          <p:cNvSpPr txBox="1"/>
-          <p:nvPr/>
-        </p:nvSpPr>
-        <p:spPr>
-          <a:xfrm>
-            <a:off x="710173" y="2752855"/>
-            <a:ext cx="2321330" cy="290167"/>
-          </a:xfrm>
-          <a:prstGeom prst="rect">
-            <a:avLst/>
-          </a:prstGeom>
-          <a:noFill/>
-          <a:ln>
-            <a:noFill/>
-          </a:ln>
-        </p:spPr>
-        <p:txBody>
-          <a:bodyPr spcFirstLastPara="1" wrap="square" lIns="91425" tIns="45700" rIns="91425" bIns="45700" anchor="t" anchorCtr="0">
-            <a:spAutoFit/>
-          </a:bodyPr>
-          <a:lstStyle/>
-          <a:p>
-            <a:pPr marL="0" marR="0" lvl="0" indent="0" algn="l" rtl="0">
-              <a:spcBef>
-                <a:spcPts val="0"/>
-              </a:spcBef>
-              <a:spcAft>
-                <a:spcPts val="0"/>
-              </a:spcAft>
-              <a:buNone/>
-            </a:pPr>
-            <a:r>
-              <a:rPr lang="en-US" sz="1286" b="1" dirty="0">
-                <a:solidFill>
-                  <a:schemeClr val="lt1"/>
-                </a:solidFill>
-                <a:latin typeface="Arial"/>
-                <a:ea typeface="Arial"/>
-                <a:cs typeface="Arial"/>
-                <a:sym typeface="Arial"/>
-              </a:rPr>
-              <a:t>X</a:t>
-            </a:r>
-            <a:endParaRPr sz="571" dirty="0">
-              <a:solidFill>
-                <a:schemeClr val="lt1"/>
-              </a:solidFill>
-              <a:latin typeface="Arial"/>
-              <a:ea typeface="Arial"/>
-              <a:cs typeface="Arial"/>
-              <a:sym typeface="Arial"/>
-            </a:endParaRPr>
-          </a:p>
-        </p:txBody>
-      </p:sp>
-      <p:sp>
-        <p:nvSpPr>
           <p:cNvPr id="94" name="calc_area"/>
           <p:cNvSpPr txBox="1"/>
           <p:nvPr/>
         </p:nvSpPr>
         <p:spPr>
           <a:xfrm>
-            <a:off x="632617" y="2405421"/>
-            <a:ext cx="1257300" cy="290167"/>
+            <a:off x="650465" y="1295881"/>
+            <a:ext cx="671516" cy="290167"/>
           </a:xfrm>
           <a:prstGeom prst="rect">
             <a:avLst/>
@@ -12444,63 +12163,13 @@
       </p:sp>
       <p:sp>
         <p:nvSpPr>
-          <p:cNvPr id="95" name="ProjectDescription"/>
-          <p:cNvSpPr txBox="1"/>
-          <p:nvPr/>
-        </p:nvSpPr>
-        <p:spPr>
-          <a:xfrm>
-            <a:off x="504001" y="1302519"/>
-            <a:ext cx="1264539" cy="261610"/>
-          </a:xfrm>
-          <a:prstGeom prst="rect">
-            <a:avLst/>
-          </a:prstGeom>
-          <a:noFill/>
-          <a:ln>
-            <a:noFill/>
-          </a:ln>
-        </p:spPr>
-        <p:txBody>
-          <a:bodyPr spcFirstLastPara="1" wrap="square" lIns="91425" tIns="45700" rIns="91425" bIns="45700" anchor="t" anchorCtr="0">
-            <a:spAutoFit/>
-          </a:bodyPr>
-          <a:lstStyle/>
-          <a:p>
-            <a:pPr marL="0" marR="0" lvl="0" indent="0" algn="l" rtl="0">
-              <a:spcBef>
-                <a:spcPts val="0"/>
-              </a:spcBef>
-              <a:spcAft>
-                <a:spcPts val="0"/>
-              </a:spcAft>
-              <a:buNone/>
-            </a:pPr>
-            <a:r>
-              <a:rPr lang="ru-RU" sz="1100" b="1" dirty="0">
-                <a:solidFill>
-                  <a:schemeClr val="lt1"/>
-                </a:solidFill>
-                <a:latin typeface="Arial"/>
-                <a:ea typeface="Arial"/>
-                <a:cs typeface="Arial"/>
-                <a:sym typeface="Arial"/>
-              </a:rPr>
-              <a:t>ОПИСАНИЕ</a:t>
-            </a:r>
-            <a:endParaRPr dirty="0"/>
-          </a:p>
-        </p:txBody>
-      </p:sp>
-      <p:sp>
-        <p:nvSpPr>
           <p:cNvPr id="96" name="investor-field"/>
           <p:cNvSpPr txBox="1"/>
           <p:nvPr/>
         </p:nvSpPr>
         <p:spPr>
           <a:xfrm>
-            <a:off x="504001" y="1483271"/>
+            <a:off x="3923606" y="3580240"/>
             <a:ext cx="5881500" cy="246300"/>
           </a:xfrm>
           <a:prstGeom prst="rect">
@@ -12548,281 +12217,13 @@
       </p:sp>
       <p:sp>
         <p:nvSpPr>
-          <p:cNvPr id="97" name="year_entered"/>
-          <p:cNvSpPr txBox="1"/>
-          <p:nvPr/>
-        </p:nvSpPr>
-        <p:spPr>
-          <a:xfrm>
-            <a:off x="710180" y="3160168"/>
-            <a:ext cx="2058900" cy="290167"/>
-          </a:xfrm>
-          <a:prstGeom prst="rect">
-            <a:avLst/>
-          </a:prstGeom>
-          <a:noFill/>
-          <a:ln>
-            <a:noFill/>
-          </a:ln>
-        </p:spPr>
-        <p:txBody>
-          <a:bodyPr spcFirstLastPara="1" wrap="square" lIns="91425" tIns="45700" rIns="91425" bIns="45700" anchor="t" anchorCtr="0">
-            <a:spAutoFit/>
-          </a:bodyPr>
-          <a:lstStyle/>
-          <a:p>
-            <a:pPr marL="0" marR="0" lvl="0" indent="0" algn="l" rtl="0">
-              <a:spcBef>
-                <a:spcPts val="0"/>
-              </a:spcBef>
-              <a:spcAft>
-                <a:spcPts val="0"/>
-              </a:spcAft>
-              <a:buNone/>
-            </a:pPr>
-            <a:r>
-              <a:rPr lang="en-US" sz="1286" b="1" dirty="0">
-                <a:solidFill>
-                  <a:schemeClr val="lt1"/>
-                </a:solidFill>
-                <a:latin typeface="Arial"/>
-                <a:ea typeface="Arial"/>
-                <a:cs typeface="Arial"/>
-                <a:sym typeface="Arial"/>
-              </a:rPr>
-              <a:t>X</a:t>
-            </a:r>
-            <a:r>
-              <a:rPr lang="ru-RU" sz="1286" b="1" dirty="0">
-                <a:solidFill>
-                  <a:schemeClr val="lt1"/>
-                </a:solidFill>
-                <a:latin typeface="Arial"/>
-                <a:ea typeface="Arial"/>
-                <a:cs typeface="Arial"/>
-                <a:sym typeface="Arial"/>
-              </a:rPr>
-              <a:t> </a:t>
-            </a:r>
-            <a:r>
-              <a:rPr lang="ru-RU" sz="857" b="1" dirty="0">
-                <a:solidFill>
-                  <a:schemeClr val="lt1"/>
-                </a:solidFill>
-                <a:latin typeface="Arial"/>
-                <a:ea typeface="Arial"/>
-                <a:cs typeface="Arial"/>
-                <a:sym typeface="Arial"/>
-              </a:rPr>
-              <a:t>г.</a:t>
-            </a:r>
-            <a:endParaRPr sz="857" b="1" baseline="30000" dirty="0">
-              <a:solidFill>
-                <a:schemeClr val="lt1"/>
-              </a:solidFill>
-              <a:latin typeface="Arial"/>
-              <a:ea typeface="Arial"/>
-              <a:cs typeface="Arial"/>
-              <a:sym typeface="Arial"/>
-            </a:endParaRPr>
-          </a:p>
-        </p:txBody>
-      </p:sp>
-      <p:sp>
-        <p:nvSpPr>
-          <p:cNvPr id="98" name="Google Shape;98;p2"/>
-          <p:cNvSpPr txBox="1"/>
-          <p:nvPr/>
-        </p:nvSpPr>
-        <p:spPr>
-          <a:xfrm>
-            <a:off x="717948" y="3549690"/>
-            <a:ext cx="1491000" cy="378300"/>
-          </a:xfrm>
-          <a:prstGeom prst="rect">
-            <a:avLst/>
-          </a:prstGeom>
-          <a:noFill/>
-          <a:ln>
-            <a:noFill/>
-          </a:ln>
-        </p:spPr>
-        <p:txBody>
-          <a:bodyPr spcFirstLastPara="1" wrap="square" lIns="91425" tIns="45700" rIns="91425" bIns="45700" anchor="t" anchorCtr="0">
-            <a:spAutoFit/>
-          </a:bodyPr>
-          <a:lstStyle/>
-          <a:p>
-            <a:pPr marL="0" marR="0" lvl="0" indent="0" algn="l" rtl="0">
-              <a:spcBef>
-                <a:spcPts val="0"/>
-              </a:spcBef>
-              <a:spcAft>
-                <a:spcPts val="0"/>
-              </a:spcAft>
-              <a:buNone/>
-            </a:pPr>
-            <a:r>
-              <a:rPr lang="en-US" sz="1286" b="1" dirty="0">
-                <a:solidFill>
-                  <a:schemeClr val="lt1"/>
-                </a:solidFill>
-                <a:latin typeface="Arial"/>
-                <a:ea typeface="Arial"/>
-                <a:cs typeface="Arial"/>
-                <a:sym typeface="Arial"/>
-              </a:rPr>
-              <a:t>X</a:t>
-            </a:r>
-            <a:r>
-              <a:rPr lang="ru-RU" sz="1286" b="1" dirty="0">
-                <a:solidFill>
-                  <a:schemeClr val="lt1"/>
-                </a:solidFill>
-                <a:latin typeface="Arial"/>
-                <a:ea typeface="Arial"/>
-                <a:cs typeface="Arial"/>
-                <a:sym typeface="Arial"/>
-              </a:rPr>
-              <a:t> </a:t>
-            </a:r>
-            <a:r>
-              <a:rPr lang="ru-RU" sz="857" b="1" dirty="0">
-                <a:solidFill>
-                  <a:schemeClr val="lt1"/>
-                </a:solidFill>
-                <a:latin typeface="Arial"/>
-                <a:ea typeface="Arial"/>
-                <a:cs typeface="Arial"/>
-                <a:sym typeface="Arial"/>
-              </a:rPr>
-              <a:t>раб. мест</a:t>
-            </a:r>
-            <a:r>
-              <a:rPr lang="ru-RU" sz="857" b="1" baseline="30000" dirty="0">
-                <a:solidFill>
-                  <a:schemeClr val="lt1"/>
-                </a:solidFill>
-                <a:latin typeface="Arial"/>
-                <a:ea typeface="Arial"/>
-                <a:cs typeface="Arial"/>
-                <a:sym typeface="Arial"/>
-              </a:rPr>
-              <a:t> </a:t>
-            </a:r>
-            <a:br>
-              <a:rPr lang="ru-RU" sz="750" b="1" baseline="30000" dirty="0">
-                <a:solidFill>
-                  <a:schemeClr val="lt1"/>
-                </a:solidFill>
-                <a:latin typeface="Arial"/>
-                <a:ea typeface="Arial"/>
-                <a:cs typeface="Arial"/>
-                <a:sym typeface="Arial"/>
-              </a:rPr>
-            </a:br>
-            <a:r>
-              <a:rPr lang="ru-RU" sz="571" dirty="0">
-                <a:solidFill>
-                  <a:schemeClr val="lt1"/>
-                </a:solidFill>
-                <a:latin typeface="Arial"/>
-                <a:ea typeface="Arial"/>
-                <a:cs typeface="Arial"/>
-                <a:sym typeface="Arial"/>
-              </a:rPr>
-              <a:t>будет создано </a:t>
-            </a:r>
-            <a:endParaRPr dirty="0"/>
-          </a:p>
-        </p:txBody>
-      </p:sp>
-      <p:pic>
-        <p:nvPicPr>
-          <p:cNvPr id="99" name="project_logo" descr="Символика"/>
-          <p:cNvPicPr preferRelativeResize="0"/>
-          <p:nvPr/>
-        </p:nvPicPr>
-        <p:blipFill rotWithShape="1">
-          <a:blip r:embed="rId4">
-            <a:alphaModFix/>
-          </a:blip>
-          <a:srcRect/>
-          <a:stretch/>
-        </p:blipFill>
-        <p:spPr>
-          <a:xfrm>
-            <a:off x="7372768" y="1025639"/>
-            <a:ext cx="2314562" cy="665131"/>
-          </a:xfrm>
-          <a:prstGeom prst="rect">
-            <a:avLst/>
-          </a:prstGeom>
-          <a:noFill/>
-          <a:ln>
-            <a:noFill/>
-          </a:ln>
-        </p:spPr>
-      </p:pic>
-      <p:sp>
-        <p:nvSpPr>
-          <p:cNvPr id="100" name="zu_number"/>
-          <p:cNvSpPr txBox="1"/>
-          <p:nvPr/>
-        </p:nvSpPr>
-        <p:spPr>
-          <a:xfrm>
-            <a:off x="1189769" y="2934404"/>
-            <a:ext cx="1375500" cy="180300"/>
-          </a:xfrm>
-          <a:prstGeom prst="rect">
-            <a:avLst/>
-          </a:prstGeom>
-          <a:noFill/>
-          <a:ln>
-            <a:noFill/>
-          </a:ln>
-        </p:spPr>
-        <p:txBody>
-          <a:bodyPr spcFirstLastPara="1" wrap="square" lIns="91425" tIns="45700" rIns="91425" bIns="45700" anchor="t" anchorCtr="0">
-            <a:spAutoFit/>
-          </a:bodyPr>
-          <a:lstStyle/>
-          <a:p>
-            <a:pPr marL="0" marR="0" lvl="0" indent="0" algn="l" rtl="0">
-              <a:spcBef>
-                <a:spcPts val="0"/>
-              </a:spcBef>
-              <a:spcAft>
-                <a:spcPts val="0"/>
-              </a:spcAft>
-              <a:buNone/>
-            </a:pPr>
-            <a:r>
-              <a:rPr lang="ru-RU" sz="571" dirty="0">
-                <a:solidFill>
-                  <a:schemeClr val="lt1"/>
-                </a:solidFill>
-                <a:latin typeface="Arial"/>
-                <a:ea typeface="Arial"/>
-                <a:cs typeface="Arial"/>
-                <a:sym typeface="Arial"/>
-              </a:rPr>
-              <a:t>(77:15:0020321:183)</a:t>
-            </a:r>
-            <a:endParaRPr dirty="0"/>
-          </a:p>
-        </p:txBody>
-      </p:sp>
-      <p:sp>
-        <p:nvSpPr>
           <p:cNvPr id="101" name="Google Shape;101;p2"/>
           <p:cNvSpPr txBox="1"/>
           <p:nvPr/>
         </p:nvSpPr>
         <p:spPr>
           <a:xfrm>
-            <a:off x="3689421" y="3683444"/>
+            <a:off x="4217559" y="2726707"/>
             <a:ext cx="1883100" cy="312000"/>
           </a:xfrm>
           <a:prstGeom prst="rect">
@@ -12907,7 +12308,7 @@
         </p:nvSpPr>
         <p:spPr>
           <a:xfrm>
-            <a:off x="3687350" y="2284769"/>
+            <a:off x="4141043" y="1233413"/>
             <a:ext cx="2046300" cy="224100"/>
           </a:xfrm>
           <a:prstGeom prst="rect">
@@ -12934,7 +12335,7 @@
               <a:buNone/>
             </a:pPr>
             <a:r>
-              <a:rPr lang="ru-RU" sz="857" b="1">
+              <a:rPr lang="ru-RU" sz="857" b="1" dirty="0">
                 <a:solidFill>
                   <a:schemeClr val="lt1"/>
                 </a:solidFill>
@@ -12945,7 +12346,7 @@
               </a:rPr>
               <a:t>Пример визуализации*</a:t>
             </a:r>
-            <a:endParaRPr sz="714">
+            <a:endParaRPr sz="714" dirty="0">
               <a:solidFill>
                 <a:schemeClr val="lt1"/>
               </a:solidFill>
@@ -12964,7 +12365,7 @@
           <p:nvPr/>
         </p:nvPicPr>
         <p:blipFill rotWithShape="1">
-          <a:blip r:embed="rId5">
+          <a:blip r:embed="rId4">
             <a:alphaModFix/>
           </a:blip>
           <a:srcRect/>
@@ -12972,7 +12373,7 @@
         </p:blipFill>
         <p:spPr>
           <a:xfrm>
-            <a:off x="3693091" y="2517927"/>
+            <a:off x="4221229" y="1561190"/>
             <a:ext cx="1915650" cy="1150200"/>
           </a:xfrm>
           <a:custGeom>
@@ -13030,113 +12431,13 @@
       </p:pic>
       <p:sp>
         <p:nvSpPr>
-          <p:cNvPr id="104" name="Google Shape;104;p2"/>
-          <p:cNvSpPr/>
-          <p:nvPr/>
-        </p:nvSpPr>
-        <p:spPr>
-          <a:xfrm>
-            <a:off x="641063" y="2115045"/>
-            <a:ext cx="2177100" cy="205800"/>
-          </a:xfrm>
-          <a:prstGeom prst="roundRect">
-            <a:avLst>
-              <a:gd name="adj" fmla="val 14082"/>
-            </a:avLst>
-          </a:prstGeom>
-          <a:solidFill>
-            <a:srgbClr val="009640"/>
-          </a:solidFill>
-          <a:ln>
-            <a:noFill/>
-          </a:ln>
-        </p:spPr>
-        <p:txBody>
-          <a:bodyPr spcFirstLastPara="1" wrap="square" lIns="91425" tIns="45700" rIns="91425" bIns="45700" anchor="ctr" anchorCtr="0">
-            <a:noAutofit/>
-          </a:bodyPr>
-          <a:lstStyle/>
-          <a:p>
-            <a:pPr marL="0" marR="0" lvl="0" indent="0" algn="ctr" rtl="0">
-              <a:spcBef>
-                <a:spcPts val="0"/>
-              </a:spcBef>
-              <a:spcAft>
-                <a:spcPts val="0"/>
-              </a:spcAft>
-              <a:buNone/>
-            </a:pPr>
-            <a:endParaRPr sz="1286">
-              <a:solidFill>
-                <a:schemeClr val="lt1"/>
-              </a:solidFill>
-              <a:latin typeface="Arial"/>
-              <a:ea typeface="Arial"/>
-              <a:cs typeface="Arial"/>
-              <a:sym typeface="Arial"/>
-            </a:endParaRPr>
-          </a:p>
-        </p:txBody>
-      </p:sp>
-      <p:sp>
-        <p:nvSpPr>
-          <p:cNvPr id="105" name="Google Shape;105;p2"/>
-          <p:cNvSpPr txBox="1"/>
-          <p:nvPr/>
-        </p:nvSpPr>
-        <p:spPr>
-          <a:xfrm>
-            <a:off x="632617" y="2084231"/>
-            <a:ext cx="2181600" cy="290400"/>
-          </a:xfrm>
-          <a:prstGeom prst="rect">
-            <a:avLst/>
-          </a:prstGeom>
-          <a:noFill/>
-          <a:ln>
-            <a:noFill/>
-          </a:ln>
-        </p:spPr>
-        <p:txBody>
-          <a:bodyPr spcFirstLastPara="1" wrap="square" lIns="91425" tIns="45700" rIns="91425" bIns="45700" anchor="t" anchorCtr="0">
-            <a:spAutoFit/>
-          </a:bodyPr>
-          <a:lstStyle/>
-          <a:p>
-            <a:pPr marL="0" marR="0" lvl="0" indent="0" algn="l" rtl="0">
-              <a:spcBef>
-                <a:spcPts val="0"/>
-              </a:spcBef>
-              <a:spcAft>
-                <a:spcPts val="0"/>
-              </a:spcAft>
-              <a:buNone/>
-            </a:pPr>
-            <a:r>
-              <a:rPr lang="ru-RU" sz="1286" b="1">
-                <a:solidFill>
-                  <a:schemeClr val="lt1"/>
-                </a:solidFill>
-                <a:latin typeface="Arial"/>
-                <a:ea typeface="Arial"/>
-                <a:cs typeface="Arial"/>
-                <a:sym typeface="Arial"/>
-              </a:rPr>
-              <a:t>ПАРАМЕТРЫ ПРОЕКТА</a:t>
-            </a:r>
-            <a:endParaRPr/>
-          </a:p>
-        </p:txBody>
-      </p:sp>
-      <p:sp>
-        <p:nvSpPr>
           <p:cNvPr id="106" name="Google Shape;106;p2"/>
           <p:cNvSpPr/>
           <p:nvPr/>
         </p:nvSpPr>
         <p:spPr>
           <a:xfrm>
-            <a:off x="9544712" y="6104701"/>
+            <a:off x="9544712" y="5044525"/>
             <a:ext cx="1701848" cy="237274"/>
           </a:xfrm>
           <a:prstGeom prst="roundRect">
@@ -13186,7 +12487,7 @@
         </p:nvSpPr>
         <p:spPr>
           <a:xfrm>
-            <a:off x="9933361" y="6158422"/>
+            <a:off x="9933361" y="5098246"/>
             <a:ext cx="1142942" cy="131896"/>
           </a:xfrm>
           <a:prstGeom prst="rect">
@@ -13244,7 +12545,7 @@
         </p:nvSpPr>
         <p:spPr>
           <a:xfrm>
-            <a:off x="9676535" y="6159052"/>
+            <a:off x="9676535" y="5098876"/>
             <a:ext cx="128571" cy="128571"/>
           </a:xfrm>
           <a:prstGeom prst="roundRect">
@@ -13304,7 +12605,7 @@
         </p:nvCxnSpPr>
         <p:spPr>
           <a:xfrm rot="10800000" flipH="1">
-            <a:off x="8604888" y="5732362"/>
+            <a:off x="8604888" y="4672186"/>
             <a:ext cx="965100" cy="111900"/>
           </a:xfrm>
           <a:prstGeom prst="bentConnector3">
@@ -13332,7 +12633,7 @@
         </p:nvCxnSpPr>
         <p:spPr>
           <a:xfrm rot="5400000">
-            <a:off x="7909773" y="4493066"/>
+            <a:off x="7909773" y="3432890"/>
             <a:ext cx="1911300" cy="444000"/>
           </a:xfrm>
           <a:prstGeom prst="bentConnector3">
@@ -13360,7 +12661,7 @@
         </p:nvSpPr>
         <p:spPr>
           <a:xfrm>
-            <a:off x="7453150" y="3867882"/>
+            <a:off x="7453150" y="3019250"/>
             <a:ext cx="1575259" cy="316493"/>
           </a:xfrm>
           <a:prstGeom prst="roundRect">
@@ -13410,7 +12711,7 @@
         </p:nvSpPr>
         <p:spPr>
           <a:xfrm>
-            <a:off x="7832193" y="3882493"/>
+            <a:off x="7832193" y="3033861"/>
             <a:ext cx="1035540" cy="131896"/>
           </a:xfrm>
           <a:prstGeom prst="rect">
@@ -13480,7 +12781,7 @@
         </p:nvSpPr>
         <p:spPr>
           <a:xfrm>
-            <a:off x="7574972" y="3906075"/>
+            <a:off x="7574972" y="3057443"/>
             <a:ext cx="128571" cy="128571"/>
           </a:xfrm>
           <a:prstGeom prst="roundRect">
@@ -13538,7 +12839,7 @@
         </p:nvSpPr>
         <p:spPr>
           <a:xfrm>
-            <a:off x="7309460" y="2166084"/>
+            <a:off x="7309460" y="1105908"/>
             <a:ext cx="4081761" cy="4348336"/>
           </a:xfrm>
           <a:prstGeom prst="roundRect">
@@ -13592,7 +12893,7 @@
         </p:nvSpPr>
         <p:spPr>
           <a:xfrm>
-            <a:off x="7451488" y="2002909"/>
+            <a:off x="7451488" y="942733"/>
             <a:ext cx="2537551" cy="202701"/>
           </a:xfrm>
           <a:prstGeom prst="roundRect">
@@ -13642,7 +12943,7 @@
         </p:nvSpPr>
         <p:spPr>
           <a:xfrm>
-            <a:off x="7451488" y="1961914"/>
+            <a:off x="7451488" y="901738"/>
             <a:ext cx="2832489" cy="290208"/>
           </a:xfrm>
           <a:prstGeom prst="rect">
@@ -13691,7 +12992,7 @@
           <p:nvPr/>
         </p:nvPicPr>
         <p:blipFill rotWithShape="1">
-          <a:blip r:embed="rId6">
+          <a:blip r:embed="rId5">
             <a:alphaModFix/>
           </a:blip>
           <a:srcRect r="10819" b="5908"/>
@@ -13699,7 +13000,7 @@
         </p:blipFill>
         <p:spPr>
           <a:xfrm>
-            <a:off x="7460569" y="2537170"/>
+            <a:off x="7460569" y="1688538"/>
             <a:ext cx="1699928" cy="1280504"/>
           </a:xfrm>
           <a:prstGeom prst="roundRect">
@@ -13726,7 +13027,7 @@
           <p:nvPr/>
         </p:nvPicPr>
         <p:blipFill rotWithShape="1">
-          <a:blip r:embed="rId7">
+          <a:blip r:embed="rId6">
             <a:alphaModFix/>
           </a:blip>
           <a:srcRect l="8768" t="12393" r="12786" b="17789"/>
@@ -13734,7 +13035,7 @@
         </p:blipFill>
         <p:spPr>
           <a:xfrm>
-            <a:off x="9544712" y="4829653"/>
+            <a:off x="9544712" y="3769477"/>
             <a:ext cx="1709447" cy="1273381"/>
           </a:xfrm>
           <a:prstGeom prst="roundRect">
@@ -13762,7 +13063,7 @@
         </p:nvSpPr>
         <p:spPr>
           <a:xfrm>
-            <a:off x="10285639" y="5306787"/>
+            <a:off x="10285639" y="4246611"/>
             <a:ext cx="494393" cy="244929"/>
           </a:xfrm>
           <a:custGeom>
@@ -13903,54 +13204,6 @@
       </p:sp>
       <p:sp>
         <p:nvSpPr>
-          <p:cNvPr id="3" name="TextBox 2">
-            <a:extLst>
-              <a:ext uri="{FF2B5EF4-FFF2-40B4-BE49-F238E27FC236}">
-                <a16:creationId xmlns:a16="http://schemas.microsoft.com/office/drawing/2014/main" id="{C4DA04D0-D5BF-0A99-92B2-D4646F104A79}"/>
-              </a:ext>
-            </a:extLst>
-          </p:cNvPr>
-          <p:cNvSpPr txBox="1"/>
-          <p:nvPr/>
-        </p:nvSpPr>
-        <p:spPr>
-          <a:xfrm>
-            <a:off x="710173" y="3373207"/>
-            <a:ext cx="6096000" cy="180178"/>
-          </a:xfrm>
-          <a:prstGeom prst="rect">
-            <a:avLst/>
-          </a:prstGeom>
-          <a:noFill/>
-        </p:spPr>
-        <p:txBody>
-          <a:bodyPr wrap="square">
-            <a:spAutoFit/>
-          </a:bodyPr>
-          <a:lstStyle/>
-          <a:p>
-            <a:pPr marL="0" marR="0" lvl="0" indent="0" algn="l" rtl="0">
-              <a:spcBef>
-                <a:spcPts val="0"/>
-              </a:spcBef>
-              <a:spcAft>
-                <a:spcPts val="0"/>
-              </a:spcAft>
-              <a:buNone/>
-            </a:pPr>
-            <a:r>
-              <a:rPr lang="ru-RU" sz="571" dirty="0">
-                <a:solidFill>
-                  <a:schemeClr val="lt1"/>
-                </a:solidFill>
-              </a:rPr>
-              <a:t>ввод в эксплуатацию</a:t>
-            </a:r>
-          </a:p>
-        </p:txBody>
-      </p:sp>
-      <p:sp>
-        <p:nvSpPr>
           <p:cNvPr id="2" name="investor">
             <a:extLst>
               <a:ext uri="{FF2B5EF4-FFF2-40B4-BE49-F238E27FC236}">
@@ -13963,7 +13216,7 @@
         </p:nvSpPr>
         <p:spPr>
           <a:xfrm>
-            <a:off x="1169891" y="1483271"/>
+            <a:off x="4620902" y="3586816"/>
             <a:ext cx="5119918" cy="246300"/>
           </a:xfrm>
           <a:prstGeom prst="rect">
@@ -14015,8 +13268,8 @@
         </p:nvSpPr>
         <p:spPr>
           <a:xfrm>
-            <a:off x="890223" y="2437872"/>
-            <a:ext cx="1305668" cy="312073"/>
+            <a:off x="922560" y="1342422"/>
+            <a:ext cx="618421" cy="224229"/>
           </a:xfrm>
           <a:prstGeom prst="rect">
             <a:avLst/>
@@ -14045,35 +13298,11 @@
                 </a:solidFill>
                 <a:extLst>
                   <a:ext uri="http://customooxmlschemas.google.com/">
-                    <go:slidesCustomData xmlns="" xmlns:mc="http://schemas.openxmlformats.org/markup-compatibility/2006" xmlns:mv="urn:schemas-microsoft-com:mac:vml" xmlns:c="http://schemas.openxmlformats.org/drawingml/2006/chart" xmlns:dgm="http://schemas.openxmlformats.org/drawingml/2006/diagram" xmlns:o="urn:schemas-microsoft-com:office:office" xmlns:v="urn:schemas-microsoft-com:vml" xmlns:pvml="urn:schemas-microsoft-com:office:powerpoint" xmlns:com="http://schemas.openxmlformats.org/drawingml/2006/compatibility" xmlns:p14="http://schemas.microsoft.com/office/powerpoint/2010/main" xmlns:p15="http://schemas.microsoft.com/office/powerpoint/2012/main" xmlns:ahyp="http://schemas.microsoft.com/office/drawing/2018/hyperlinkcolor" xmlns:go="http://customooxmlschemas.google.com/" textRoundtripDataId="2"/>
+                    <go:slidesCustomData xmlns="" xmlns:mc="http://schemas.openxmlformats.org/markup-compatibility/2006" xmlns:mv="urn:schemas-microsoft-com:mac:vml" xmlns:c="http://schemas.openxmlformats.org/drawingml/2006/chart" xmlns:dgm="http://schemas.openxmlformats.org/drawingml/2006/diagram" xmlns:o="urn:schemas-microsoft-com:office:office" xmlns:v="urn:schemas-microsoft-com:vml" xmlns:pvml="urn:schemas-microsoft-com:office:powerpoint" xmlns:com="http://schemas.openxmlformats.org/drawingml/2006/compatibility" xmlns:p14="http://schemas.microsoft.com/office/powerpoint/2010/main" xmlns:p15="http://schemas.microsoft.com/office/powerpoint/2012/main" xmlns:ahyp="http://schemas.microsoft.com/office/drawing/2018/hyperlinkcolor" xmlns:go="http://customooxmlschemas.google.com/" textRoundtripDataId="9"/>
                   </a:ext>
                 </a:extLst>
               </a:rPr>
               <a:t>тыс. м2</a:t>
-            </a:r>
-          </a:p>
-          <a:p>
-            <a:pPr marL="0" marR="0" lvl="0" indent="0" algn="l" rtl="0">
-              <a:spcBef>
-                <a:spcPts val="0"/>
-              </a:spcBef>
-              <a:spcAft>
-                <a:spcPts val="0"/>
-              </a:spcAft>
-              <a:buNone/>
-            </a:pPr>
-            <a:r>
-              <a:rPr lang="ru-RU" sz="571" dirty="0">
-                <a:solidFill>
-                  <a:schemeClr val="lt1"/>
-                </a:solidFill>
-                <a:extLst>
-                  <a:ext uri="http://customooxmlschemas.google.com/">
-                    <go:slidesCustomData xmlns="" xmlns:mc="http://schemas.openxmlformats.org/markup-compatibility/2006" xmlns:mv="urn:schemas-microsoft-com:mac:vml" xmlns:c="http://schemas.openxmlformats.org/drawingml/2006/chart" xmlns:dgm="http://schemas.openxmlformats.org/drawingml/2006/diagram" xmlns:o="urn:schemas-microsoft-com:office:office" xmlns:v="urn:schemas-microsoft-com:vml" xmlns:pvml="urn:schemas-microsoft-com:office:powerpoint" xmlns:com="http://schemas.openxmlformats.org/drawingml/2006/compatibility" xmlns:p14="http://schemas.microsoft.com/office/powerpoint/2010/main" xmlns:p15="http://schemas.microsoft.com/office/powerpoint/2012/main" xmlns:ahyp="http://schemas.microsoft.com/office/drawing/2018/hyperlinkcolor" xmlns:go="http://customooxmlschemas.google.com/" textRoundtripDataId="5"/>
-                  </a:ext>
-                </a:extLst>
-              </a:rPr>
-              <a:t>общая площадь, из которой:</a:t>
             </a:r>
           </a:p>
         </p:txBody>
@@ -14148,7 +13377,7 @@
         </p:nvSpPr>
         <p:spPr>
           <a:xfrm>
-            <a:off x="7837605" y="4030772"/>
+            <a:off x="7837605" y="3182140"/>
             <a:ext cx="1035540" cy="120931"/>
           </a:xfrm>
           <a:prstGeom prst="rect">
@@ -14184,7 +13413,7 @@
                 <a:cs typeface="Arial"/>
                 <a:sym typeface="Arial"/>
               </a:rPr>
-              <a:t>Квартал Менделеева</a:t>
+              <a:t>ХХХ</a:t>
             </a:r>
             <a:endParaRPr sz="714" dirty="0">
               <a:solidFill>
@@ -14195,6 +13424,1825 @@
               <a:cs typeface="Arial"/>
               <a:sym typeface="Arial"/>
             </a:endParaRPr>
+          </a:p>
+        </p:txBody>
+      </p:sp>
+      <p:sp>
+        <p:nvSpPr>
+          <p:cNvPr id="6" name="Google Shape;90;p2">
+            <a:extLst>
+              <a:ext uri="{FF2B5EF4-FFF2-40B4-BE49-F238E27FC236}">
+                <a16:creationId xmlns:a16="http://schemas.microsoft.com/office/drawing/2014/main" id="{37DD7E86-00DF-3EAD-39DE-9AA25702F1BC}"/>
+              </a:ext>
+            </a:extLst>
+          </p:cNvPr>
+          <p:cNvSpPr/>
+          <p:nvPr/>
+        </p:nvSpPr>
+        <p:spPr>
+          <a:xfrm>
+            <a:off x="514150" y="1155550"/>
+            <a:ext cx="1202700" cy="598500"/>
+          </a:xfrm>
+          <a:prstGeom prst="roundRect">
+            <a:avLst>
+              <a:gd name="adj" fmla="val 4594"/>
+            </a:avLst>
+          </a:prstGeom>
+          <a:noFill/>
+          <a:ln w="25400" cap="flat" cmpd="sng">
+            <a:solidFill>
+              <a:srgbClr val="009640"/>
+            </a:solidFill>
+            <a:prstDash val="solid"/>
+            <a:miter lim="800000"/>
+            <a:headEnd type="none" w="sm" len="sm"/>
+            <a:tailEnd type="none" w="sm" len="sm"/>
+          </a:ln>
+        </p:spPr>
+        <p:txBody>
+          <a:bodyPr spcFirstLastPara="1" wrap="square" lIns="91425" tIns="45700" rIns="91425" bIns="45700" anchor="ctr" anchorCtr="0">
+            <a:noAutofit/>
+          </a:bodyPr>
+          <a:lstStyle/>
+          <a:p>
+            <a:pPr marL="0" marR="0" lvl="0" indent="0" algn="ctr" rtl="0">
+              <a:spcBef>
+                <a:spcPts val="0"/>
+              </a:spcBef>
+              <a:spcAft>
+                <a:spcPts val="0"/>
+              </a:spcAft>
+              <a:buNone/>
+            </a:pPr>
+            <a:endParaRPr sz="1714">
+              <a:solidFill>
+                <a:schemeClr val="lt1"/>
+              </a:solidFill>
+              <a:latin typeface="Arial"/>
+              <a:ea typeface="Arial"/>
+              <a:cs typeface="Arial"/>
+              <a:sym typeface="Arial"/>
+            </a:endParaRPr>
+          </a:p>
+        </p:txBody>
+      </p:sp>
+      <p:sp>
+        <p:nvSpPr>
+          <p:cNvPr id="10" name="Google Shape;93;p2">
+            <a:extLst>
+              <a:ext uri="{FF2B5EF4-FFF2-40B4-BE49-F238E27FC236}">
+                <a16:creationId xmlns:a16="http://schemas.microsoft.com/office/drawing/2014/main" id="{79A4EC58-6362-3658-F283-7E52C184BC9E}"/>
+              </a:ext>
+            </a:extLst>
+          </p:cNvPr>
+          <p:cNvSpPr txBox="1"/>
+          <p:nvPr/>
+        </p:nvSpPr>
+        <p:spPr>
+          <a:xfrm>
+            <a:off x="3687350" y="1221544"/>
+            <a:ext cx="2046300" cy="202200"/>
+          </a:xfrm>
+          <a:prstGeom prst="rect">
+            <a:avLst/>
+          </a:prstGeom>
+          <a:noFill/>
+          <a:ln>
+            <a:noFill/>
+          </a:ln>
+        </p:spPr>
+        <p:txBody>
+          <a:bodyPr spcFirstLastPara="1" wrap="square" lIns="91425" tIns="45700" rIns="91425" bIns="45700" anchor="t" anchorCtr="0">
+            <a:spAutoFit/>
+          </a:bodyPr>
+          <a:lstStyle/>
+          <a:p>
+            <a:pPr marL="0" marR="0" lvl="0" indent="0" algn="l" rtl="0">
+              <a:spcBef>
+                <a:spcPts val="0"/>
+              </a:spcBef>
+              <a:spcAft>
+                <a:spcPts val="0"/>
+              </a:spcAft>
+              <a:buNone/>
+            </a:pPr>
+            <a:endParaRPr sz="714">
+              <a:solidFill>
+                <a:schemeClr val="lt1"/>
+              </a:solidFill>
+              <a:latin typeface="Arial"/>
+              <a:ea typeface="Arial"/>
+              <a:cs typeface="Arial"/>
+              <a:sym typeface="Arial"/>
+            </a:endParaRPr>
+          </a:p>
+        </p:txBody>
+      </p:sp>
+      <p:sp>
+        <p:nvSpPr>
+          <p:cNvPr id="11" name="Google Shape;94;p2">
+            <a:extLst>
+              <a:ext uri="{FF2B5EF4-FFF2-40B4-BE49-F238E27FC236}">
+                <a16:creationId xmlns:a16="http://schemas.microsoft.com/office/drawing/2014/main" id="{6FF59A0D-4E06-AE2B-36E1-61762363F5B9}"/>
+              </a:ext>
+            </a:extLst>
+          </p:cNvPr>
+          <p:cNvSpPr/>
+          <p:nvPr/>
+        </p:nvSpPr>
+        <p:spPr>
+          <a:xfrm>
+            <a:off x="641063" y="1051820"/>
+            <a:ext cx="2177100" cy="205800"/>
+          </a:xfrm>
+          <a:prstGeom prst="roundRect">
+            <a:avLst>
+              <a:gd name="adj" fmla="val 14082"/>
+            </a:avLst>
+          </a:prstGeom>
+          <a:solidFill>
+            <a:srgbClr val="009640"/>
+          </a:solidFill>
+          <a:ln>
+            <a:noFill/>
+          </a:ln>
+        </p:spPr>
+        <p:txBody>
+          <a:bodyPr spcFirstLastPara="1" wrap="square" lIns="91425" tIns="45700" rIns="91425" bIns="45700" anchor="ctr" anchorCtr="0">
+            <a:noAutofit/>
+          </a:bodyPr>
+          <a:lstStyle/>
+          <a:p>
+            <a:pPr marL="0" marR="0" lvl="0" indent="0" algn="ctr" rtl="0">
+              <a:spcBef>
+                <a:spcPts val="0"/>
+              </a:spcBef>
+              <a:spcAft>
+                <a:spcPts val="0"/>
+              </a:spcAft>
+              <a:buNone/>
+            </a:pPr>
+            <a:endParaRPr sz="1286">
+              <a:solidFill>
+                <a:schemeClr val="lt1"/>
+              </a:solidFill>
+              <a:latin typeface="Arial"/>
+              <a:ea typeface="Arial"/>
+              <a:cs typeface="Arial"/>
+              <a:sym typeface="Arial"/>
+            </a:endParaRPr>
+          </a:p>
+        </p:txBody>
+      </p:sp>
+      <p:sp>
+        <p:nvSpPr>
+          <p:cNvPr id="12" name="Google Shape;112;p2">
+            <a:extLst>
+              <a:ext uri="{FF2B5EF4-FFF2-40B4-BE49-F238E27FC236}">
+                <a16:creationId xmlns:a16="http://schemas.microsoft.com/office/drawing/2014/main" id="{62F591E4-1604-6018-A609-C4ABF5903E1F}"/>
+              </a:ext>
+            </a:extLst>
+          </p:cNvPr>
+          <p:cNvSpPr/>
+          <p:nvPr/>
+        </p:nvSpPr>
+        <p:spPr>
+          <a:xfrm>
+            <a:off x="2160159" y="1155550"/>
+            <a:ext cx="1202700" cy="598500"/>
+          </a:xfrm>
+          <a:prstGeom prst="roundRect">
+            <a:avLst>
+              <a:gd name="adj" fmla="val 4594"/>
+            </a:avLst>
+          </a:prstGeom>
+          <a:noFill/>
+          <a:ln w="25400" cap="flat" cmpd="sng">
+            <a:solidFill>
+              <a:srgbClr val="009640"/>
+            </a:solidFill>
+            <a:prstDash val="solid"/>
+            <a:miter lim="800000"/>
+            <a:headEnd type="none" w="sm" len="sm"/>
+            <a:tailEnd type="none" w="sm" len="sm"/>
+          </a:ln>
+        </p:spPr>
+        <p:txBody>
+          <a:bodyPr spcFirstLastPara="1" wrap="square" lIns="91425" tIns="45700" rIns="91425" bIns="45700" anchor="ctr" anchorCtr="0">
+            <a:noAutofit/>
+          </a:bodyPr>
+          <a:lstStyle/>
+          <a:p>
+            <a:pPr marL="0" marR="0" lvl="0" indent="0" algn="ctr" rtl="0">
+              <a:spcBef>
+                <a:spcPts val="0"/>
+              </a:spcBef>
+              <a:spcAft>
+                <a:spcPts val="0"/>
+              </a:spcAft>
+              <a:buNone/>
+            </a:pPr>
+            <a:endParaRPr sz="1714">
+              <a:solidFill>
+                <a:schemeClr val="lt1"/>
+              </a:solidFill>
+              <a:latin typeface="Arial"/>
+              <a:ea typeface="Arial"/>
+              <a:cs typeface="Arial"/>
+              <a:sym typeface="Arial"/>
+            </a:endParaRPr>
+          </a:p>
+        </p:txBody>
+      </p:sp>
+      <p:sp>
+        <p:nvSpPr>
+          <p:cNvPr id="14" name="Google Shape;114;p2">
+            <a:extLst>
+              <a:ext uri="{FF2B5EF4-FFF2-40B4-BE49-F238E27FC236}">
+                <a16:creationId xmlns:a16="http://schemas.microsoft.com/office/drawing/2014/main" id="{D597C934-F07E-2C87-F007-EF609FDDDC86}"/>
+              </a:ext>
+            </a:extLst>
+          </p:cNvPr>
+          <p:cNvSpPr/>
+          <p:nvPr/>
+        </p:nvSpPr>
+        <p:spPr>
+          <a:xfrm>
+            <a:off x="520206" y="2127175"/>
+            <a:ext cx="1202700" cy="598500"/>
+          </a:xfrm>
+          <a:prstGeom prst="roundRect">
+            <a:avLst>
+              <a:gd name="adj" fmla="val 4594"/>
+            </a:avLst>
+          </a:prstGeom>
+          <a:noFill/>
+          <a:ln w="25400" cap="flat" cmpd="sng">
+            <a:solidFill>
+              <a:srgbClr val="009640"/>
+            </a:solidFill>
+            <a:prstDash val="solid"/>
+            <a:miter lim="800000"/>
+            <a:headEnd type="none" w="sm" len="sm"/>
+            <a:tailEnd type="none" w="sm" len="sm"/>
+          </a:ln>
+        </p:spPr>
+        <p:txBody>
+          <a:bodyPr spcFirstLastPara="1" wrap="square" lIns="91425" tIns="45700" rIns="91425" bIns="45700" anchor="ctr" anchorCtr="0">
+            <a:noAutofit/>
+          </a:bodyPr>
+          <a:lstStyle/>
+          <a:p>
+            <a:pPr marL="0" marR="0" lvl="0" indent="0" algn="ctr" rtl="0">
+              <a:spcBef>
+                <a:spcPts val="0"/>
+              </a:spcBef>
+              <a:spcAft>
+                <a:spcPts val="0"/>
+              </a:spcAft>
+              <a:buNone/>
+            </a:pPr>
+            <a:endParaRPr sz="1714">
+              <a:solidFill>
+                <a:schemeClr val="lt1"/>
+              </a:solidFill>
+              <a:latin typeface="Arial"/>
+              <a:ea typeface="Arial"/>
+              <a:cs typeface="Arial"/>
+              <a:sym typeface="Arial"/>
+            </a:endParaRPr>
+          </a:p>
+        </p:txBody>
+      </p:sp>
+      <p:sp>
+        <p:nvSpPr>
+          <p:cNvPr id="15" name="Google Shape;115;p2">
+            <a:extLst>
+              <a:ext uri="{FF2B5EF4-FFF2-40B4-BE49-F238E27FC236}">
+                <a16:creationId xmlns:a16="http://schemas.microsoft.com/office/drawing/2014/main" id="{45488C90-151D-32E9-10DC-0A0F122B9B86}"/>
+              </a:ext>
+            </a:extLst>
+          </p:cNvPr>
+          <p:cNvSpPr/>
+          <p:nvPr/>
+        </p:nvSpPr>
+        <p:spPr>
+          <a:xfrm>
+            <a:off x="2166215" y="2127175"/>
+            <a:ext cx="1202700" cy="598500"/>
+          </a:xfrm>
+          <a:prstGeom prst="roundRect">
+            <a:avLst>
+              <a:gd name="adj" fmla="val 4594"/>
+            </a:avLst>
+          </a:prstGeom>
+          <a:noFill/>
+          <a:ln w="25400" cap="flat" cmpd="sng">
+            <a:solidFill>
+              <a:srgbClr val="009640"/>
+            </a:solidFill>
+            <a:prstDash val="solid"/>
+            <a:miter lim="800000"/>
+            <a:headEnd type="none" w="sm" len="sm"/>
+            <a:tailEnd type="none" w="sm" len="sm"/>
+          </a:ln>
+        </p:spPr>
+        <p:txBody>
+          <a:bodyPr spcFirstLastPara="1" wrap="square" lIns="91425" tIns="45700" rIns="91425" bIns="45700" anchor="ctr" anchorCtr="0">
+            <a:noAutofit/>
+          </a:bodyPr>
+          <a:lstStyle/>
+          <a:p>
+            <a:pPr marL="0" marR="0" lvl="0" indent="0" algn="ctr" rtl="0">
+              <a:spcBef>
+                <a:spcPts val="0"/>
+              </a:spcBef>
+              <a:spcAft>
+                <a:spcPts val="0"/>
+              </a:spcAft>
+              <a:buNone/>
+            </a:pPr>
+            <a:endParaRPr sz="1714">
+              <a:solidFill>
+                <a:schemeClr val="lt1"/>
+              </a:solidFill>
+              <a:latin typeface="Arial"/>
+              <a:ea typeface="Arial"/>
+              <a:cs typeface="Arial"/>
+              <a:sym typeface="Arial"/>
+            </a:endParaRPr>
+          </a:p>
+        </p:txBody>
+      </p:sp>
+      <p:sp>
+        <p:nvSpPr>
+          <p:cNvPr id="16" name="Google Shape;116;p2">
+            <a:extLst>
+              <a:ext uri="{FF2B5EF4-FFF2-40B4-BE49-F238E27FC236}">
+                <a16:creationId xmlns:a16="http://schemas.microsoft.com/office/drawing/2014/main" id="{E003B0D1-A36E-8095-68E1-C1EC657EF092}"/>
+              </a:ext>
+            </a:extLst>
+          </p:cNvPr>
+          <p:cNvSpPr/>
+          <p:nvPr/>
+        </p:nvSpPr>
+        <p:spPr>
+          <a:xfrm>
+            <a:off x="493725" y="4070550"/>
+            <a:ext cx="2927400" cy="1988700"/>
+          </a:xfrm>
+          <a:prstGeom prst="roundRect">
+            <a:avLst>
+              <a:gd name="adj" fmla="val 4594"/>
+            </a:avLst>
+          </a:prstGeom>
+          <a:noFill/>
+          <a:ln w="25400" cap="flat" cmpd="sng">
+            <a:solidFill>
+              <a:srgbClr val="009640"/>
+            </a:solidFill>
+            <a:prstDash val="solid"/>
+            <a:miter lim="800000"/>
+            <a:headEnd type="none" w="sm" len="sm"/>
+            <a:tailEnd type="none" w="sm" len="sm"/>
+          </a:ln>
+        </p:spPr>
+        <p:txBody>
+          <a:bodyPr spcFirstLastPara="1" wrap="square" lIns="91425" tIns="45700" rIns="91425" bIns="45700" anchor="ctr" anchorCtr="0">
+            <a:noAutofit/>
+          </a:bodyPr>
+          <a:lstStyle/>
+          <a:p>
+            <a:pPr marL="0" marR="0" lvl="0" indent="0" algn="ctr" rtl="0">
+              <a:spcBef>
+                <a:spcPts val="0"/>
+              </a:spcBef>
+              <a:spcAft>
+                <a:spcPts val="0"/>
+              </a:spcAft>
+              <a:buNone/>
+            </a:pPr>
+            <a:endParaRPr sz="1714">
+              <a:solidFill>
+                <a:schemeClr val="lt1"/>
+              </a:solidFill>
+              <a:latin typeface="Arial"/>
+              <a:ea typeface="Arial"/>
+              <a:cs typeface="Arial"/>
+              <a:sym typeface="Arial"/>
+            </a:endParaRPr>
+          </a:p>
+        </p:txBody>
+      </p:sp>
+      <p:sp>
+        <p:nvSpPr>
+          <p:cNvPr id="17" name="Google Shape;117;p2">
+            <a:extLst>
+              <a:ext uri="{FF2B5EF4-FFF2-40B4-BE49-F238E27FC236}">
+                <a16:creationId xmlns:a16="http://schemas.microsoft.com/office/drawing/2014/main" id="{615750F2-832D-E6E9-01EF-4AA641673642}"/>
+              </a:ext>
+            </a:extLst>
+          </p:cNvPr>
+          <p:cNvSpPr txBox="1"/>
+          <p:nvPr/>
+        </p:nvSpPr>
+        <p:spPr>
+          <a:xfrm>
+            <a:off x="632617" y="1021006"/>
+            <a:ext cx="2181600" cy="290400"/>
+          </a:xfrm>
+          <a:prstGeom prst="rect">
+            <a:avLst/>
+          </a:prstGeom>
+          <a:noFill/>
+          <a:ln>
+            <a:noFill/>
+          </a:ln>
+        </p:spPr>
+        <p:txBody>
+          <a:bodyPr spcFirstLastPara="1" wrap="square" lIns="91425" tIns="45700" rIns="91425" bIns="45700" anchor="t" anchorCtr="0">
+            <a:spAutoFit/>
+          </a:bodyPr>
+          <a:lstStyle/>
+          <a:p>
+            <a:pPr marL="0" marR="0" lvl="0" indent="0" algn="l" rtl="0">
+              <a:spcBef>
+                <a:spcPts val="0"/>
+              </a:spcBef>
+              <a:spcAft>
+                <a:spcPts val="0"/>
+              </a:spcAft>
+              <a:buNone/>
+            </a:pPr>
+            <a:r>
+              <a:rPr lang="ru-RU" sz="1286" b="1">
+                <a:solidFill>
+                  <a:schemeClr val="lt1"/>
+                </a:solidFill>
+                <a:latin typeface="Arial"/>
+                <a:ea typeface="Arial"/>
+                <a:cs typeface="Arial"/>
+                <a:sym typeface="Arial"/>
+              </a:rPr>
+              <a:t>ПАРАМЕТРЫ ПРОЕКТА</a:t>
+            </a:r>
+            <a:endParaRPr/>
+          </a:p>
+        </p:txBody>
+      </p:sp>
+      <p:sp>
+        <p:nvSpPr>
+          <p:cNvPr id="18" name="Google Shape;120;p2">
+            <a:extLst>
+              <a:ext uri="{FF2B5EF4-FFF2-40B4-BE49-F238E27FC236}">
+                <a16:creationId xmlns:a16="http://schemas.microsoft.com/office/drawing/2014/main" id="{8F4B13AE-8218-7829-F3E5-B27C1618D1D4}"/>
+              </a:ext>
+            </a:extLst>
+          </p:cNvPr>
+          <p:cNvSpPr/>
+          <p:nvPr/>
+        </p:nvSpPr>
+        <p:spPr>
+          <a:xfrm>
+            <a:off x="520206" y="3036225"/>
+            <a:ext cx="1202700" cy="598500"/>
+          </a:xfrm>
+          <a:prstGeom prst="roundRect">
+            <a:avLst>
+              <a:gd name="adj" fmla="val 4594"/>
+            </a:avLst>
+          </a:prstGeom>
+          <a:noFill/>
+          <a:ln w="25400" cap="flat" cmpd="sng">
+            <a:solidFill>
+              <a:srgbClr val="009640"/>
+            </a:solidFill>
+            <a:prstDash val="solid"/>
+            <a:miter lim="800000"/>
+            <a:headEnd type="none" w="sm" len="sm"/>
+            <a:tailEnd type="none" w="sm" len="sm"/>
+          </a:ln>
+        </p:spPr>
+        <p:txBody>
+          <a:bodyPr spcFirstLastPara="1" wrap="square" lIns="91425" tIns="45700" rIns="91425" bIns="45700" anchor="ctr" anchorCtr="0">
+            <a:noAutofit/>
+          </a:bodyPr>
+          <a:lstStyle/>
+          <a:p>
+            <a:pPr marL="0" marR="0" lvl="0" indent="0" algn="ctr" rtl="0">
+              <a:spcBef>
+                <a:spcPts val="0"/>
+              </a:spcBef>
+              <a:spcAft>
+                <a:spcPts val="0"/>
+              </a:spcAft>
+              <a:buNone/>
+            </a:pPr>
+            <a:endParaRPr sz="1714">
+              <a:solidFill>
+                <a:schemeClr val="lt1"/>
+              </a:solidFill>
+              <a:latin typeface="Arial"/>
+              <a:ea typeface="Arial"/>
+              <a:cs typeface="Arial"/>
+              <a:sym typeface="Arial"/>
+            </a:endParaRPr>
+          </a:p>
+        </p:txBody>
+      </p:sp>
+      <p:sp>
+        <p:nvSpPr>
+          <p:cNvPr id="19" name="Google Shape;121;p2">
+            <a:extLst>
+              <a:ext uri="{FF2B5EF4-FFF2-40B4-BE49-F238E27FC236}">
+                <a16:creationId xmlns:a16="http://schemas.microsoft.com/office/drawing/2014/main" id="{EC2EB962-60A7-2F68-539A-EF419F0449B2}"/>
+              </a:ext>
+            </a:extLst>
+          </p:cNvPr>
+          <p:cNvSpPr/>
+          <p:nvPr/>
+        </p:nvSpPr>
+        <p:spPr>
+          <a:xfrm>
+            <a:off x="2166215" y="3028550"/>
+            <a:ext cx="1202700" cy="598500"/>
+          </a:xfrm>
+          <a:prstGeom prst="roundRect">
+            <a:avLst>
+              <a:gd name="adj" fmla="val 4594"/>
+            </a:avLst>
+          </a:prstGeom>
+          <a:noFill/>
+          <a:ln w="25400" cap="flat" cmpd="sng">
+            <a:solidFill>
+              <a:srgbClr val="009640"/>
+            </a:solidFill>
+            <a:prstDash val="solid"/>
+            <a:miter lim="800000"/>
+            <a:headEnd type="none" w="sm" len="sm"/>
+            <a:tailEnd type="none" w="sm" len="sm"/>
+          </a:ln>
+        </p:spPr>
+        <p:txBody>
+          <a:bodyPr spcFirstLastPara="1" wrap="square" lIns="91425" tIns="45700" rIns="91425" bIns="45700" anchor="ctr" anchorCtr="0">
+            <a:noAutofit/>
+          </a:bodyPr>
+          <a:lstStyle/>
+          <a:p>
+            <a:pPr marL="0" marR="0" lvl="0" indent="0" algn="ctr" rtl="0">
+              <a:spcBef>
+                <a:spcPts val="0"/>
+              </a:spcBef>
+              <a:spcAft>
+                <a:spcPts val="0"/>
+              </a:spcAft>
+              <a:buNone/>
+            </a:pPr>
+            <a:endParaRPr sz="1714">
+              <a:solidFill>
+                <a:schemeClr val="lt1"/>
+              </a:solidFill>
+              <a:latin typeface="Arial"/>
+              <a:ea typeface="Arial"/>
+              <a:cs typeface="Arial"/>
+              <a:sym typeface="Arial"/>
+            </a:endParaRPr>
+          </a:p>
+        </p:txBody>
+      </p:sp>
+      <p:sp>
+        <p:nvSpPr>
+          <p:cNvPr id="20" name="plotn_zastr">
+            <a:extLst>
+              <a:ext uri="{FF2B5EF4-FFF2-40B4-BE49-F238E27FC236}">
+                <a16:creationId xmlns:a16="http://schemas.microsoft.com/office/drawing/2014/main" id="{92254B76-86A8-2377-6E3D-6EF0BB0298F2}"/>
+              </a:ext>
+            </a:extLst>
+          </p:cNvPr>
+          <p:cNvSpPr txBox="1"/>
+          <p:nvPr/>
+        </p:nvSpPr>
+        <p:spPr>
+          <a:xfrm>
+            <a:off x="2208670" y="1311405"/>
+            <a:ext cx="1375500" cy="290400"/>
+          </a:xfrm>
+          <a:prstGeom prst="rect">
+            <a:avLst/>
+          </a:prstGeom>
+          <a:noFill/>
+          <a:ln>
+            <a:noFill/>
+          </a:ln>
+        </p:spPr>
+        <p:txBody>
+          <a:bodyPr spcFirstLastPara="1" wrap="square" lIns="91425" tIns="45700" rIns="91425" bIns="45700" anchor="t" anchorCtr="0">
+            <a:spAutoFit/>
+          </a:bodyPr>
+          <a:lstStyle/>
+          <a:p>
+            <a:pPr marL="0" marR="0" lvl="0" indent="0" algn="l" rtl="0">
+              <a:spcBef>
+                <a:spcPts val="0"/>
+              </a:spcBef>
+              <a:spcAft>
+                <a:spcPts val="0"/>
+              </a:spcAft>
+              <a:buNone/>
+            </a:pPr>
+            <a:r>
+              <a:rPr lang="en-US" sz="1286" b="1" dirty="0">
+                <a:solidFill>
+                  <a:schemeClr val="lt1"/>
+                </a:solidFill>
+                <a:extLst>
+                  <a:ext uri="http://customooxmlschemas.google.com/">
+                    <go:slidesCustomData xmlns="" xmlns:mc="http://schemas.openxmlformats.org/markup-compatibility/2006" xmlns:mv="urn:schemas-microsoft-com:mac:vml" xmlns:c="http://schemas.openxmlformats.org/drawingml/2006/chart" xmlns:dgm="http://schemas.openxmlformats.org/drawingml/2006/diagram" xmlns:o="urn:schemas-microsoft-com:office:office" xmlns:v="urn:schemas-microsoft-com:vml" xmlns:pvml="urn:schemas-microsoft-com:office:powerpoint" xmlns:com="http://schemas.openxmlformats.org/drawingml/2006/compatibility" xmlns:p14="http://schemas.microsoft.com/office/powerpoint/2010/main" xmlns:p15="http://schemas.microsoft.com/office/powerpoint/2012/main" xmlns:ahyp="http://schemas.microsoft.com/office/drawing/2018/hyperlinkcolor" xmlns:go="http://customooxmlschemas.google.com/" textRoundtripDataId="6"/>
+                  </a:ext>
+                </a:extLst>
+              </a:rPr>
+              <a:t>X</a:t>
+            </a:r>
+            <a:endParaRPr sz="571" dirty="0">
+              <a:solidFill>
+                <a:schemeClr val="lt1"/>
+              </a:solidFill>
+              <a:latin typeface="Arial"/>
+              <a:ea typeface="Arial"/>
+              <a:cs typeface="Arial"/>
+              <a:sym typeface="Arial"/>
+            </a:endParaRPr>
+          </a:p>
+        </p:txBody>
+      </p:sp>
+      <p:sp>
+        <p:nvSpPr>
+          <p:cNvPr id="21" name="Google Shape;123;p2">
+            <a:extLst>
+              <a:ext uri="{FF2B5EF4-FFF2-40B4-BE49-F238E27FC236}">
+                <a16:creationId xmlns:a16="http://schemas.microsoft.com/office/drawing/2014/main" id="{5F6478D3-EF11-1341-7C2C-89445A4CF08F}"/>
+              </a:ext>
+            </a:extLst>
+          </p:cNvPr>
+          <p:cNvSpPr txBox="1"/>
+          <p:nvPr/>
+        </p:nvSpPr>
+        <p:spPr>
+          <a:xfrm>
+            <a:off x="2208670" y="1561190"/>
+            <a:ext cx="1257300" cy="180300"/>
+          </a:xfrm>
+          <a:prstGeom prst="rect">
+            <a:avLst/>
+          </a:prstGeom>
+          <a:noFill/>
+          <a:ln>
+            <a:noFill/>
+          </a:ln>
+        </p:spPr>
+        <p:txBody>
+          <a:bodyPr spcFirstLastPara="1" wrap="square" lIns="91425" tIns="45700" rIns="91425" bIns="45700" anchor="t" anchorCtr="0">
+            <a:spAutoFit/>
+          </a:bodyPr>
+          <a:lstStyle/>
+          <a:p>
+            <a:pPr marL="0" marR="0" lvl="0" indent="0" algn="l" rtl="0">
+              <a:spcBef>
+                <a:spcPts val="0"/>
+              </a:spcBef>
+              <a:spcAft>
+                <a:spcPts val="0"/>
+              </a:spcAft>
+              <a:buNone/>
+            </a:pPr>
+            <a:r>
+              <a:rPr lang="ru-RU" sz="571" dirty="0">
+                <a:solidFill>
+                  <a:schemeClr val="lt1"/>
+                </a:solidFill>
+              </a:rPr>
+              <a:t>плотность застройки</a:t>
+            </a:r>
+            <a:endParaRPr dirty="0"/>
+          </a:p>
+        </p:txBody>
+      </p:sp>
+      <p:sp>
+        <p:nvSpPr>
+          <p:cNvPr id="22" name="Google Shape;124;p2">
+            <a:extLst>
+              <a:ext uri="{FF2B5EF4-FFF2-40B4-BE49-F238E27FC236}">
+                <a16:creationId xmlns:a16="http://schemas.microsoft.com/office/drawing/2014/main" id="{F24081A2-83FC-7EDD-99A7-2D7FCBDAF5D2}"/>
+              </a:ext>
+            </a:extLst>
+          </p:cNvPr>
+          <p:cNvSpPr txBox="1"/>
+          <p:nvPr/>
+        </p:nvSpPr>
+        <p:spPr>
+          <a:xfrm>
+            <a:off x="641080" y="2237268"/>
+            <a:ext cx="585255" cy="290400"/>
+          </a:xfrm>
+          <a:prstGeom prst="rect">
+            <a:avLst/>
+          </a:prstGeom>
+          <a:noFill/>
+          <a:ln>
+            <a:noFill/>
+          </a:ln>
+        </p:spPr>
+        <p:txBody>
+          <a:bodyPr spcFirstLastPara="1" wrap="square" lIns="91425" tIns="45700" rIns="91425" bIns="45700" anchor="t" anchorCtr="0">
+            <a:spAutoFit/>
+          </a:bodyPr>
+          <a:lstStyle/>
+          <a:p>
+            <a:pPr marL="0" marR="0" lvl="0" indent="0" algn="l" rtl="0">
+              <a:spcBef>
+                <a:spcPts val="0"/>
+              </a:spcBef>
+              <a:spcAft>
+                <a:spcPts val="0"/>
+              </a:spcAft>
+              <a:buNone/>
+            </a:pPr>
+            <a:r>
+              <a:rPr lang="en-US" sz="1286" b="1" dirty="0">
+                <a:solidFill>
+                  <a:schemeClr val="lt1"/>
+                </a:solidFill>
+                <a:extLst>
+                  <a:ext uri="http://customooxmlschemas.google.com/">
+                    <go:slidesCustomData xmlns="" xmlns:mc="http://schemas.openxmlformats.org/markup-compatibility/2006" xmlns:mv="urn:schemas-microsoft-com:mac:vml" xmlns:c="http://schemas.openxmlformats.org/drawingml/2006/chart" xmlns:dgm="http://schemas.openxmlformats.org/drawingml/2006/diagram" xmlns:o="urn:schemas-microsoft-com:office:office" xmlns:v="urn:schemas-microsoft-com:vml" xmlns:pvml="urn:schemas-microsoft-com:office:powerpoint" xmlns:com="http://schemas.openxmlformats.org/drawingml/2006/compatibility" xmlns:p14="http://schemas.microsoft.com/office/powerpoint/2010/main" xmlns:p15="http://schemas.microsoft.com/office/powerpoint/2012/main" xmlns:ahyp="http://schemas.microsoft.com/office/drawing/2018/hyperlinkcolor" xmlns:go="http://customooxmlschemas.google.com/" textRoundtripDataId="8"/>
+                  </a:ext>
+                </a:extLst>
+              </a:rPr>
+              <a:t>X</a:t>
+            </a:r>
+            <a:endParaRPr dirty="0"/>
+          </a:p>
+        </p:txBody>
+      </p:sp>
+      <p:sp>
+        <p:nvSpPr>
+          <p:cNvPr id="23" name="Google Shape;125;p2">
+            <a:extLst>
+              <a:ext uri="{FF2B5EF4-FFF2-40B4-BE49-F238E27FC236}">
+                <a16:creationId xmlns:a16="http://schemas.microsoft.com/office/drawing/2014/main" id="{0A385F44-BAE4-0D3B-294C-35658AE88855}"/>
+              </a:ext>
+            </a:extLst>
+          </p:cNvPr>
+          <p:cNvSpPr txBox="1"/>
+          <p:nvPr/>
+        </p:nvSpPr>
+        <p:spPr>
+          <a:xfrm>
+            <a:off x="641067" y="2497946"/>
+            <a:ext cx="1257300" cy="180300"/>
+          </a:xfrm>
+          <a:prstGeom prst="rect">
+            <a:avLst/>
+          </a:prstGeom>
+          <a:noFill/>
+          <a:ln>
+            <a:noFill/>
+          </a:ln>
+        </p:spPr>
+        <p:txBody>
+          <a:bodyPr spcFirstLastPara="1" wrap="square" lIns="91425" tIns="45700" rIns="91425" bIns="45700" anchor="t" anchorCtr="0">
+            <a:spAutoFit/>
+          </a:bodyPr>
+          <a:lstStyle/>
+          <a:p>
+            <a:pPr marL="0" marR="0" lvl="0" indent="0" algn="l" rtl="0">
+              <a:spcBef>
+                <a:spcPts val="0"/>
+              </a:spcBef>
+              <a:spcAft>
+                <a:spcPts val="0"/>
+              </a:spcAft>
+              <a:buNone/>
+            </a:pPr>
+            <a:r>
+              <a:rPr lang="ru-RU" sz="571" dirty="0">
+                <a:solidFill>
+                  <a:schemeClr val="lt1"/>
+                </a:solidFill>
+              </a:rPr>
+              <a:t>инвестиции</a:t>
+            </a:r>
+            <a:endParaRPr dirty="0"/>
+          </a:p>
+        </p:txBody>
+      </p:sp>
+      <p:sp>
+        <p:nvSpPr>
+          <p:cNvPr id="24" name="area_m2">
+            <a:extLst>
+              <a:ext uri="{FF2B5EF4-FFF2-40B4-BE49-F238E27FC236}">
+                <a16:creationId xmlns:a16="http://schemas.microsoft.com/office/drawing/2014/main" id="{AD20FB8E-8F50-71AD-3394-57F7641BCDA0}"/>
+              </a:ext>
+            </a:extLst>
+          </p:cNvPr>
+          <p:cNvSpPr txBox="1"/>
+          <p:nvPr/>
+        </p:nvSpPr>
+        <p:spPr>
+          <a:xfrm>
+            <a:off x="2267780" y="2212006"/>
+            <a:ext cx="637980" cy="290167"/>
+          </a:xfrm>
+          <a:prstGeom prst="rect">
+            <a:avLst/>
+          </a:prstGeom>
+          <a:noFill/>
+          <a:ln>
+            <a:noFill/>
+          </a:ln>
+        </p:spPr>
+        <p:txBody>
+          <a:bodyPr spcFirstLastPara="1" wrap="square" lIns="91425" tIns="45700" rIns="91425" bIns="45700" anchor="t" anchorCtr="0">
+            <a:spAutoFit/>
+          </a:bodyPr>
+          <a:lstStyle/>
+          <a:p>
+            <a:pPr marL="0" marR="0" lvl="0" indent="0" algn="l" rtl="0">
+              <a:spcBef>
+                <a:spcPts val="0"/>
+              </a:spcBef>
+              <a:spcAft>
+                <a:spcPts val="0"/>
+              </a:spcAft>
+              <a:buClr>
+                <a:srgbClr val="000000"/>
+              </a:buClr>
+              <a:buFont typeface="Arial"/>
+              <a:buNone/>
+            </a:pPr>
+            <a:r>
+              <a:rPr lang="ru-RU" sz="1286" b="1" dirty="0">
+                <a:solidFill>
+                  <a:schemeClr val="lt1"/>
+                </a:solidFill>
+                <a:extLst>
+                  <a:ext uri="http://customooxmlschemas.google.com/">
+                    <go:slidesCustomData xmlns="" xmlns:mc="http://schemas.openxmlformats.org/markup-compatibility/2006" xmlns:mv="urn:schemas-microsoft-com:mac:vml" xmlns:c="http://schemas.openxmlformats.org/drawingml/2006/chart" xmlns:dgm="http://schemas.openxmlformats.org/drawingml/2006/diagram" xmlns:o="urn:schemas-microsoft-com:office:office" xmlns:v="urn:schemas-microsoft-com:vml" xmlns:pvml="urn:schemas-microsoft-com:office:powerpoint" xmlns:com="http://schemas.openxmlformats.org/drawingml/2006/compatibility" xmlns:p14="http://schemas.microsoft.com/office/powerpoint/2010/main" xmlns:p15="http://schemas.microsoft.com/office/powerpoint/2012/main" xmlns:ahyp="http://schemas.microsoft.com/office/drawing/2018/hyperlinkcolor" xmlns:go="http://customooxmlschemas.google.com/" textRoundtripDataId="10"/>
+                  </a:ext>
+                </a:extLst>
+              </a:rPr>
+              <a:t>ХХ</a:t>
+            </a:r>
+            <a:endParaRPr dirty="0"/>
+          </a:p>
+        </p:txBody>
+      </p:sp>
+      <p:sp>
+        <p:nvSpPr>
+          <p:cNvPr id="25" name="Google Shape;127;p2">
+            <a:extLst>
+              <a:ext uri="{FF2B5EF4-FFF2-40B4-BE49-F238E27FC236}">
+                <a16:creationId xmlns:a16="http://schemas.microsoft.com/office/drawing/2014/main" id="{92C1425A-2C83-8DA2-97CB-25F213B5A4C1}"/>
+              </a:ext>
+            </a:extLst>
+          </p:cNvPr>
+          <p:cNvSpPr txBox="1"/>
+          <p:nvPr/>
+        </p:nvSpPr>
+        <p:spPr>
+          <a:xfrm>
+            <a:off x="2267767" y="2472684"/>
+            <a:ext cx="1257300" cy="180300"/>
+          </a:xfrm>
+          <a:prstGeom prst="rect">
+            <a:avLst/>
+          </a:prstGeom>
+          <a:noFill/>
+          <a:ln>
+            <a:noFill/>
+          </a:ln>
+        </p:spPr>
+        <p:txBody>
+          <a:bodyPr spcFirstLastPara="1" wrap="square" lIns="91425" tIns="45700" rIns="91425" bIns="45700" anchor="t" anchorCtr="0">
+            <a:spAutoFit/>
+          </a:bodyPr>
+          <a:lstStyle/>
+          <a:p>
+            <a:pPr marL="0" marR="0" lvl="0" indent="0" algn="l" rtl="0">
+              <a:spcBef>
+                <a:spcPts val="0"/>
+              </a:spcBef>
+              <a:spcAft>
+                <a:spcPts val="0"/>
+              </a:spcAft>
+              <a:buNone/>
+            </a:pPr>
+            <a:r>
+              <a:rPr lang="ru-RU" sz="571">
+                <a:solidFill>
+                  <a:schemeClr val="lt1"/>
+                </a:solidFill>
+              </a:rPr>
+              <a:t>площадь объекта</a:t>
+            </a:r>
+            <a:endParaRPr/>
+          </a:p>
+        </p:txBody>
+      </p:sp>
+      <p:sp>
+        <p:nvSpPr>
+          <p:cNvPr id="26" name="zu_number">
+            <a:extLst>
+              <a:ext uri="{FF2B5EF4-FFF2-40B4-BE49-F238E27FC236}">
+                <a16:creationId xmlns:a16="http://schemas.microsoft.com/office/drawing/2014/main" id="{FB4A0950-B4FF-DBDA-E910-39C7DCF7BA16}"/>
+              </a:ext>
+            </a:extLst>
+          </p:cNvPr>
+          <p:cNvSpPr txBox="1"/>
+          <p:nvPr/>
+        </p:nvSpPr>
+        <p:spPr>
+          <a:xfrm>
+            <a:off x="588650" y="4257625"/>
+            <a:ext cx="2689500" cy="488100"/>
+          </a:xfrm>
+          <a:prstGeom prst="rect">
+            <a:avLst/>
+          </a:prstGeom>
+          <a:noFill/>
+          <a:ln>
+            <a:noFill/>
+          </a:ln>
+        </p:spPr>
+        <p:txBody>
+          <a:bodyPr spcFirstLastPara="1" wrap="square" lIns="91425" tIns="45700" rIns="91425" bIns="45700" anchor="t" anchorCtr="0">
+            <a:spAutoFit/>
+          </a:bodyPr>
+          <a:lstStyle/>
+          <a:p>
+            <a:pPr marL="0" marR="0" lvl="0" indent="0" algn="l" rtl="0">
+              <a:spcBef>
+                <a:spcPts val="0"/>
+              </a:spcBef>
+              <a:spcAft>
+                <a:spcPts val="0"/>
+              </a:spcAft>
+              <a:buNone/>
+            </a:pPr>
+            <a:r>
+              <a:rPr lang="ru-RU" sz="1286" b="1" dirty="0">
+                <a:solidFill>
+                  <a:schemeClr val="lt1"/>
+                </a:solidFill>
+              </a:rPr>
+              <a:t>(</a:t>
+            </a:r>
+            <a:r>
+              <a:rPr lang="en-US" sz="1286" b="1" dirty="0">
+                <a:solidFill>
+                  <a:schemeClr val="lt1"/>
+                </a:solidFill>
+              </a:rPr>
+              <a:t>XXXX)</a:t>
+            </a:r>
+            <a:endParaRPr sz="1286" b="1" dirty="0">
+              <a:solidFill>
+                <a:schemeClr val="lt1"/>
+              </a:solidFill>
+            </a:endParaRPr>
+          </a:p>
+          <a:p>
+            <a:pPr marL="0" marR="0" lvl="0" indent="0" algn="l" rtl="0">
+              <a:spcBef>
+                <a:spcPts val="0"/>
+              </a:spcBef>
+              <a:spcAft>
+                <a:spcPts val="0"/>
+              </a:spcAft>
+              <a:buNone/>
+            </a:pPr>
+            <a:endParaRPr sz="1286" b="1" dirty="0">
+              <a:solidFill>
+                <a:schemeClr val="lt1"/>
+              </a:solidFill>
+            </a:endParaRPr>
+          </a:p>
+        </p:txBody>
+      </p:sp>
+      <p:sp>
+        <p:nvSpPr>
+          <p:cNvPr id="27" name="Google Shape;129;p2">
+            <a:extLst>
+              <a:ext uri="{FF2B5EF4-FFF2-40B4-BE49-F238E27FC236}">
+                <a16:creationId xmlns:a16="http://schemas.microsoft.com/office/drawing/2014/main" id="{00344DC5-28B2-1C2F-CEDC-29A95E0A60F1}"/>
+              </a:ext>
+            </a:extLst>
+          </p:cNvPr>
+          <p:cNvSpPr txBox="1"/>
+          <p:nvPr/>
+        </p:nvSpPr>
+        <p:spPr>
+          <a:xfrm>
+            <a:off x="588630" y="4143271"/>
+            <a:ext cx="1257300" cy="180300"/>
+          </a:xfrm>
+          <a:prstGeom prst="rect">
+            <a:avLst/>
+          </a:prstGeom>
+          <a:noFill/>
+          <a:ln>
+            <a:noFill/>
+          </a:ln>
+        </p:spPr>
+        <p:txBody>
+          <a:bodyPr spcFirstLastPara="1" wrap="square" lIns="91425" tIns="45700" rIns="91425" bIns="45700" anchor="t" anchorCtr="0">
+            <a:spAutoFit/>
+          </a:bodyPr>
+          <a:lstStyle/>
+          <a:p>
+            <a:pPr marL="0" marR="0" lvl="0" indent="0" algn="l" rtl="0">
+              <a:spcBef>
+                <a:spcPts val="0"/>
+              </a:spcBef>
+              <a:spcAft>
+                <a:spcPts val="0"/>
+              </a:spcAft>
+              <a:buNone/>
+            </a:pPr>
+            <a:r>
+              <a:rPr lang="ru-RU" sz="571">
+                <a:solidFill>
+                  <a:schemeClr val="lt1"/>
+                </a:solidFill>
+              </a:rPr>
+              <a:t>номер ЗУ</a:t>
+            </a:r>
+            <a:endParaRPr/>
+          </a:p>
+        </p:txBody>
+      </p:sp>
+      <p:sp>
+        <p:nvSpPr>
+          <p:cNvPr id="28" name="year_entered">
+            <a:extLst>
+              <a:ext uri="{FF2B5EF4-FFF2-40B4-BE49-F238E27FC236}">
+                <a16:creationId xmlns:a16="http://schemas.microsoft.com/office/drawing/2014/main" id="{6A84250E-272B-9912-93FC-AF44E8F01121}"/>
+              </a:ext>
+            </a:extLst>
+          </p:cNvPr>
+          <p:cNvSpPr txBox="1"/>
+          <p:nvPr/>
+        </p:nvSpPr>
+        <p:spPr>
+          <a:xfrm>
+            <a:off x="641092" y="3105927"/>
+            <a:ext cx="1057500" cy="290400"/>
+          </a:xfrm>
+          <a:prstGeom prst="rect">
+            <a:avLst/>
+          </a:prstGeom>
+          <a:noFill/>
+          <a:ln>
+            <a:noFill/>
+          </a:ln>
+        </p:spPr>
+        <p:txBody>
+          <a:bodyPr spcFirstLastPara="1" wrap="square" lIns="91425" tIns="45700" rIns="91425" bIns="45700" anchor="t" anchorCtr="0">
+            <a:spAutoFit/>
+          </a:bodyPr>
+          <a:lstStyle/>
+          <a:p>
+            <a:pPr marL="0" marR="0" lvl="0" indent="0" algn="l" rtl="0">
+              <a:spcBef>
+                <a:spcPts val="0"/>
+              </a:spcBef>
+              <a:spcAft>
+                <a:spcPts val="0"/>
+              </a:spcAft>
+              <a:buNone/>
+            </a:pPr>
+            <a:r>
+              <a:rPr lang="ru-RU" sz="1286" b="1" dirty="0">
+                <a:solidFill>
+                  <a:schemeClr val="lt1"/>
+                </a:solidFill>
+              </a:rPr>
+              <a:t>ХХХХ</a:t>
+            </a:r>
+            <a:endParaRPr dirty="0"/>
+          </a:p>
+        </p:txBody>
+      </p:sp>
+      <p:sp>
+        <p:nvSpPr>
+          <p:cNvPr id="29" name="Google Shape;135;p2">
+            <a:extLst>
+              <a:ext uri="{FF2B5EF4-FFF2-40B4-BE49-F238E27FC236}">
+                <a16:creationId xmlns:a16="http://schemas.microsoft.com/office/drawing/2014/main" id="{A4895108-E812-B840-DBA5-93AAF064EFA7}"/>
+              </a:ext>
+            </a:extLst>
+          </p:cNvPr>
+          <p:cNvSpPr txBox="1"/>
+          <p:nvPr/>
+        </p:nvSpPr>
+        <p:spPr>
+          <a:xfrm>
+            <a:off x="641080" y="3339309"/>
+            <a:ext cx="1257300" cy="180300"/>
+          </a:xfrm>
+          <a:prstGeom prst="rect">
+            <a:avLst/>
+          </a:prstGeom>
+          <a:noFill/>
+          <a:ln>
+            <a:noFill/>
+          </a:ln>
+        </p:spPr>
+        <p:txBody>
+          <a:bodyPr spcFirstLastPara="1" wrap="square" lIns="91425" tIns="45700" rIns="91425" bIns="45700" anchor="t" anchorCtr="0">
+            <a:spAutoFit/>
+          </a:bodyPr>
+          <a:lstStyle/>
+          <a:p>
+            <a:pPr marL="0" marR="0" lvl="0" indent="0" algn="l" rtl="0">
+              <a:spcBef>
+                <a:spcPts val="0"/>
+              </a:spcBef>
+              <a:spcAft>
+                <a:spcPts val="0"/>
+              </a:spcAft>
+              <a:buNone/>
+            </a:pPr>
+            <a:r>
+              <a:rPr lang="ru-RU" sz="571">
+                <a:solidFill>
+                  <a:schemeClr val="lt1"/>
+                </a:solidFill>
+              </a:rPr>
+              <a:t>год ввода</a:t>
+            </a:r>
+            <a:endParaRPr/>
+          </a:p>
+        </p:txBody>
+      </p:sp>
+      <p:sp>
+        <p:nvSpPr>
+          <p:cNvPr id="32" name="Google Shape;138;p2">
+            <a:extLst>
+              <a:ext uri="{FF2B5EF4-FFF2-40B4-BE49-F238E27FC236}">
+                <a16:creationId xmlns:a16="http://schemas.microsoft.com/office/drawing/2014/main" id="{4F8F7151-1DF8-FB23-3258-BD95AAFEE4CA}"/>
+              </a:ext>
+            </a:extLst>
+          </p:cNvPr>
+          <p:cNvSpPr/>
+          <p:nvPr/>
+        </p:nvSpPr>
+        <p:spPr>
+          <a:xfrm>
+            <a:off x="3983113" y="1155550"/>
+            <a:ext cx="2927400" cy="1988700"/>
+          </a:xfrm>
+          <a:prstGeom prst="roundRect">
+            <a:avLst>
+              <a:gd name="adj" fmla="val 4594"/>
+            </a:avLst>
+          </a:prstGeom>
+          <a:noFill/>
+          <a:ln w="25400" cap="flat" cmpd="sng">
+            <a:solidFill>
+              <a:srgbClr val="009640"/>
+            </a:solidFill>
+            <a:prstDash val="solid"/>
+            <a:miter lim="800000"/>
+            <a:headEnd type="none" w="sm" len="sm"/>
+            <a:tailEnd type="none" w="sm" len="sm"/>
+          </a:ln>
+        </p:spPr>
+        <p:txBody>
+          <a:bodyPr spcFirstLastPara="1" wrap="square" lIns="91425" tIns="45700" rIns="91425" bIns="45700" anchor="ctr" anchorCtr="0">
+            <a:noAutofit/>
+          </a:bodyPr>
+          <a:lstStyle/>
+          <a:p>
+            <a:pPr marL="0" marR="0" lvl="0" indent="0" algn="ctr" rtl="0">
+              <a:spcBef>
+                <a:spcPts val="0"/>
+              </a:spcBef>
+              <a:spcAft>
+                <a:spcPts val="0"/>
+              </a:spcAft>
+              <a:buNone/>
+            </a:pPr>
+            <a:endParaRPr sz="1714">
+              <a:solidFill>
+                <a:schemeClr val="lt1"/>
+              </a:solidFill>
+              <a:latin typeface="Arial"/>
+              <a:ea typeface="Arial"/>
+              <a:cs typeface="Arial"/>
+              <a:sym typeface="Arial"/>
+            </a:endParaRPr>
+          </a:p>
+        </p:txBody>
+      </p:sp>
+      <p:sp>
+        <p:nvSpPr>
+          <p:cNvPr id="34" name="ProjectDescription">
+            <a:extLst>
+              <a:ext uri="{FF2B5EF4-FFF2-40B4-BE49-F238E27FC236}">
+                <a16:creationId xmlns:a16="http://schemas.microsoft.com/office/drawing/2014/main" id="{DCD990F4-2E0E-B79B-BA9C-44CCF7321CEB}"/>
+              </a:ext>
+            </a:extLst>
+          </p:cNvPr>
+          <p:cNvSpPr txBox="1"/>
+          <p:nvPr/>
+        </p:nvSpPr>
+        <p:spPr>
+          <a:xfrm>
+            <a:off x="514151" y="773350"/>
+            <a:ext cx="1754100" cy="226500"/>
+          </a:xfrm>
+          <a:prstGeom prst="rect">
+            <a:avLst/>
+          </a:prstGeom>
+          <a:noFill/>
+          <a:ln>
+            <a:noFill/>
+          </a:ln>
+        </p:spPr>
+        <p:txBody>
+          <a:bodyPr spcFirstLastPara="1" wrap="square" lIns="91425" tIns="45700" rIns="91425" bIns="45700" anchor="t" anchorCtr="0">
+            <a:spAutoFit/>
+          </a:bodyPr>
+          <a:lstStyle/>
+          <a:p>
+            <a:pPr marL="0" marR="0" lvl="0" indent="0" algn="l" rtl="0">
+              <a:spcBef>
+                <a:spcPts val="0"/>
+              </a:spcBef>
+              <a:spcAft>
+                <a:spcPts val="0"/>
+              </a:spcAft>
+              <a:buNone/>
+            </a:pPr>
+            <a:r>
+              <a:rPr lang="ru-RU" sz="871" dirty="0">
+                <a:solidFill>
+                  <a:schemeClr val="lt1"/>
+                </a:solidFill>
+                <a:extLst>
+                  <a:ext uri="http://customooxmlschemas.google.com/">
+                    <go:slidesCustomData xmlns="" xmlns:mc="http://schemas.openxmlformats.org/markup-compatibility/2006" xmlns:mv="urn:schemas-microsoft-com:mac:vml" xmlns:c="http://schemas.openxmlformats.org/drawingml/2006/chart" xmlns:dgm="http://schemas.openxmlformats.org/drawingml/2006/diagram" xmlns:o="urn:schemas-microsoft-com:office:office" xmlns:v="urn:schemas-microsoft-com:vml" xmlns:pvml="urn:schemas-microsoft-com:office:powerpoint" xmlns:com="http://schemas.openxmlformats.org/drawingml/2006/compatibility" xmlns:p14="http://schemas.microsoft.com/office/powerpoint/2010/main" xmlns:p15="http://schemas.microsoft.com/office/powerpoint/2012/main" xmlns:ahyp="http://schemas.microsoft.com/office/drawing/2018/hyperlinkcolor" xmlns:go="http://customooxmlschemas.google.com/" textRoundtripDataId="0"/>
+                  </a:ext>
+                </a:extLst>
+              </a:rPr>
+              <a:t>Описание проекта</a:t>
+            </a:r>
+            <a:endParaRPr sz="871" dirty="0">
+              <a:solidFill>
+                <a:schemeClr val="lt1"/>
+              </a:solidFill>
+              <a:latin typeface="Arial"/>
+              <a:ea typeface="Arial"/>
+              <a:cs typeface="Arial"/>
+              <a:sym typeface="Arial"/>
+            </a:endParaRPr>
+          </a:p>
+        </p:txBody>
+      </p:sp>
+      <p:sp>
+        <p:nvSpPr>
+          <p:cNvPr id="36" name="Google Shape;123;p2">
+            <a:extLst>
+              <a:ext uri="{FF2B5EF4-FFF2-40B4-BE49-F238E27FC236}">
+                <a16:creationId xmlns:a16="http://schemas.microsoft.com/office/drawing/2014/main" id="{A8804649-716C-2E70-5998-B0B5792085E5}"/>
+              </a:ext>
+            </a:extLst>
+          </p:cNvPr>
+          <p:cNvSpPr txBox="1"/>
+          <p:nvPr/>
+        </p:nvSpPr>
+        <p:spPr>
+          <a:xfrm>
+            <a:off x="654411" y="1542030"/>
+            <a:ext cx="1257300" cy="180300"/>
+          </a:xfrm>
+          <a:prstGeom prst="rect">
+            <a:avLst/>
+          </a:prstGeom>
+          <a:noFill/>
+          <a:ln>
+            <a:noFill/>
+          </a:ln>
+        </p:spPr>
+        <p:txBody>
+          <a:bodyPr spcFirstLastPara="1" wrap="square" lIns="91425" tIns="45700" rIns="91425" bIns="45700" anchor="t" anchorCtr="0">
+            <a:spAutoFit/>
+          </a:bodyPr>
+          <a:lstStyle/>
+          <a:p>
+            <a:pPr marL="0" marR="0" lvl="0" indent="0" algn="l" rtl="0">
+              <a:spcBef>
+                <a:spcPts val="0"/>
+              </a:spcBef>
+              <a:spcAft>
+                <a:spcPts val="0"/>
+              </a:spcAft>
+              <a:buNone/>
+            </a:pPr>
+            <a:r>
+              <a:rPr lang="ru-RU" sz="571" dirty="0">
+                <a:solidFill>
+                  <a:schemeClr val="lt1"/>
+                </a:solidFill>
+                <a:extLst>
+                  <a:ext uri="http://customooxmlschemas.google.com/">
+                    <go:slidesCustomData xmlns="" xmlns:mc="http://schemas.openxmlformats.org/markup-compatibility/2006" xmlns:mv="urn:schemas-microsoft-com:mac:vml" xmlns:c="http://schemas.openxmlformats.org/drawingml/2006/chart" xmlns:dgm="http://schemas.openxmlformats.org/drawingml/2006/diagram" xmlns:o="urn:schemas-microsoft-com:office:office" xmlns:v="urn:schemas-microsoft-com:vml" xmlns:pvml="urn:schemas-microsoft-com:office:powerpoint" xmlns:com="http://schemas.openxmlformats.org/drawingml/2006/compatibility" xmlns:p14="http://schemas.microsoft.com/office/powerpoint/2010/main" xmlns:p15="http://schemas.microsoft.com/office/powerpoint/2012/main" xmlns:ahyp="http://schemas.microsoft.com/office/drawing/2018/hyperlinkcolor" xmlns:go="http://customooxmlschemas.google.com/" xmlns:lc="http://schemas.openxmlformats.org/drawingml/2006/lockedCanvas" textRoundtripDataId="5"/>
+                  </a:ext>
+                </a:extLst>
+              </a:rPr>
+              <a:t>фактическая площадь</a:t>
+            </a:r>
+          </a:p>
+        </p:txBody>
+      </p:sp>
+      <p:sp>
+        <p:nvSpPr>
+          <p:cNvPr id="40" name="TextBox 39">
+            <a:extLst>
+              <a:ext uri="{FF2B5EF4-FFF2-40B4-BE49-F238E27FC236}">
+                <a16:creationId xmlns:a16="http://schemas.microsoft.com/office/drawing/2014/main" id="{21973B0D-2860-C57B-48DA-95F5E7CA5178}"/>
+              </a:ext>
+            </a:extLst>
+          </p:cNvPr>
+          <p:cNvSpPr txBox="1"/>
+          <p:nvPr/>
+        </p:nvSpPr>
+        <p:spPr>
+          <a:xfrm>
+            <a:off x="2484332" y="3181683"/>
+            <a:ext cx="482052" cy="224229"/>
+          </a:xfrm>
+          <a:prstGeom prst="rect">
+            <a:avLst/>
+          </a:prstGeom>
+          <a:noFill/>
+        </p:spPr>
+        <p:txBody>
+          <a:bodyPr wrap="square">
+            <a:spAutoFit/>
+          </a:bodyPr>
+          <a:lstStyle/>
+          <a:p>
+            <a:pPr marL="0" marR="0" lvl="0" indent="0" algn="l" rtl="0">
+              <a:spcBef>
+                <a:spcPts val="0"/>
+              </a:spcBef>
+              <a:spcAft>
+                <a:spcPts val="0"/>
+              </a:spcAft>
+              <a:buNone/>
+            </a:pPr>
+            <a:r>
+              <a:rPr lang="ru-RU" sz="857" b="1" dirty="0">
+                <a:solidFill>
+                  <a:schemeClr val="lt1"/>
+                </a:solidFill>
+                <a:extLst>
+                  <a:ext uri="http://customooxmlschemas.google.com/">
+                    <go:slidesCustomData xmlns="" xmlns:mc="http://schemas.openxmlformats.org/markup-compatibility/2006" xmlns:mv="urn:schemas-microsoft-com:mac:vml" xmlns:c="http://schemas.openxmlformats.org/drawingml/2006/chart" xmlns:dgm="http://schemas.openxmlformats.org/drawingml/2006/diagram" xmlns:o="urn:schemas-microsoft-com:office:office" xmlns:v="urn:schemas-microsoft-com:vml" xmlns:pvml="urn:schemas-microsoft-com:office:powerpoint" xmlns:com="http://schemas.openxmlformats.org/drawingml/2006/compatibility" xmlns:p14="http://schemas.microsoft.com/office/powerpoint/2010/main" xmlns:p15="http://schemas.microsoft.com/office/powerpoint/2012/main" xmlns:ahyp="http://schemas.microsoft.com/office/drawing/2018/hyperlinkcolor" xmlns:go="http://customooxmlschemas.google.com/" textRoundtripDataId="12"/>
+                  </a:ext>
+                </a:extLst>
+              </a:rPr>
+              <a:t>га</a:t>
+            </a:r>
+          </a:p>
+        </p:txBody>
+      </p:sp>
+      <p:sp>
+        <p:nvSpPr>
+          <p:cNvPr id="42" name="TextBox 41">
+            <a:extLst>
+              <a:ext uri="{FF2B5EF4-FFF2-40B4-BE49-F238E27FC236}">
+                <a16:creationId xmlns:a16="http://schemas.microsoft.com/office/drawing/2014/main" id="{EB5F2D6A-79C3-B9EF-28D4-EE113C19B1DE}"/>
+              </a:ext>
+            </a:extLst>
+          </p:cNvPr>
+          <p:cNvSpPr txBox="1"/>
+          <p:nvPr/>
+        </p:nvSpPr>
+        <p:spPr>
+          <a:xfrm>
+            <a:off x="924740" y="2273717"/>
+            <a:ext cx="810751" cy="224229"/>
+          </a:xfrm>
+          <a:prstGeom prst="rect">
+            <a:avLst/>
+          </a:prstGeom>
+          <a:noFill/>
+        </p:spPr>
+        <p:txBody>
+          <a:bodyPr wrap="square">
+            <a:spAutoFit/>
+          </a:bodyPr>
+          <a:lstStyle/>
+          <a:p>
+            <a:r>
+              <a:rPr lang="ru-RU" sz="857" b="1" dirty="0">
+                <a:solidFill>
+                  <a:schemeClr val="lt1"/>
+                </a:solidFill>
+                <a:extLst>
+                  <a:ext uri="http://customooxmlschemas.google.com/">
+                    <go:slidesCustomData xmlns="" xmlns:mc="http://schemas.openxmlformats.org/markup-compatibility/2006" xmlns:mv="urn:schemas-microsoft-com:mac:vml" xmlns:c="http://schemas.openxmlformats.org/drawingml/2006/chart" xmlns:dgm="http://schemas.openxmlformats.org/drawingml/2006/diagram" xmlns:o="urn:schemas-microsoft-com:office:office" xmlns:v="urn:schemas-microsoft-com:vml" xmlns:pvml="urn:schemas-microsoft-com:office:powerpoint" xmlns:com="http://schemas.openxmlformats.org/drawingml/2006/compatibility" xmlns:p14="http://schemas.microsoft.com/office/powerpoint/2010/main" xmlns:p15="http://schemas.microsoft.com/office/powerpoint/2012/main" xmlns:ahyp="http://schemas.microsoft.com/office/drawing/2018/hyperlinkcolor" xmlns:go="http://customooxmlschemas.google.com/" textRoundtripDataId="9"/>
+                  </a:ext>
+                </a:extLst>
+              </a:rPr>
+              <a:t>млрд</a:t>
+            </a:r>
+          </a:p>
+        </p:txBody>
+      </p:sp>
+      <p:sp>
+        <p:nvSpPr>
+          <p:cNvPr id="44" name="TextBox 43">
+            <a:extLst>
+              <a:ext uri="{FF2B5EF4-FFF2-40B4-BE49-F238E27FC236}">
+                <a16:creationId xmlns:a16="http://schemas.microsoft.com/office/drawing/2014/main" id="{062D9647-87EE-0B8A-62CB-7B51F3930869}"/>
+              </a:ext>
+            </a:extLst>
+          </p:cNvPr>
+          <p:cNvSpPr txBox="1"/>
+          <p:nvPr/>
+        </p:nvSpPr>
+        <p:spPr>
+          <a:xfrm>
+            <a:off x="2471289" y="1350729"/>
+            <a:ext cx="1140018" cy="224229"/>
+          </a:xfrm>
+          <a:prstGeom prst="rect">
+            <a:avLst/>
+          </a:prstGeom>
+          <a:noFill/>
+        </p:spPr>
+        <p:txBody>
+          <a:bodyPr wrap="square">
+            <a:spAutoFit/>
+          </a:bodyPr>
+          <a:lstStyle/>
+          <a:p>
+            <a:r>
+              <a:rPr lang="ru-RU" sz="857" b="1" dirty="0" err="1">
+                <a:solidFill>
+                  <a:schemeClr val="lt1"/>
+                </a:solidFill>
+                <a:extLst>
+                  <a:ext uri="http://customooxmlschemas.google.com/">
+                    <go:slidesCustomData xmlns="" xmlns:mc="http://schemas.openxmlformats.org/markup-compatibility/2006" xmlns:mv="urn:schemas-microsoft-com:mac:vml" xmlns:c="http://schemas.openxmlformats.org/drawingml/2006/chart" xmlns:dgm="http://schemas.openxmlformats.org/drawingml/2006/diagram" xmlns:o="urn:schemas-microsoft-com:office:office" xmlns:v="urn:schemas-microsoft-com:vml" xmlns:pvml="urn:schemas-microsoft-com:office:powerpoint" xmlns:com="http://schemas.openxmlformats.org/drawingml/2006/compatibility" xmlns:p14="http://schemas.microsoft.com/office/powerpoint/2010/main" xmlns:p15="http://schemas.microsoft.com/office/powerpoint/2012/main" xmlns:ahyp="http://schemas.microsoft.com/office/drawing/2018/hyperlinkcolor" xmlns:go="http://customooxmlschemas.google.com/" textRoundtripDataId="12"/>
+                  </a:ext>
+                </a:extLst>
+              </a:rPr>
+              <a:t>кв.м</a:t>
+            </a:r>
+            <a:r>
+              <a:rPr lang="ru-RU" sz="857" b="1" dirty="0">
+                <a:solidFill>
+                  <a:schemeClr val="lt1"/>
+                </a:solidFill>
+                <a:extLst>
+                  <a:ext uri="http://customooxmlschemas.google.com/">
+                    <go:slidesCustomData xmlns="" xmlns:mc="http://schemas.openxmlformats.org/markup-compatibility/2006" xmlns:mv="urn:schemas-microsoft-com:mac:vml" xmlns:c="http://schemas.openxmlformats.org/drawingml/2006/chart" xmlns:dgm="http://schemas.openxmlformats.org/drawingml/2006/diagram" xmlns:o="urn:schemas-microsoft-com:office:office" xmlns:v="urn:schemas-microsoft-com:vml" xmlns:pvml="urn:schemas-microsoft-com:office:powerpoint" xmlns:com="http://schemas.openxmlformats.org/drawingml/2006/compatibility" xmlns:p14="http://schemas.microsoft.com/office/powerpoint/2010/main" xmlns:p15="http://schemas.microsoft.com/office/powerpoint/2012/main" xmlns:ahyp="http://schemas.microsoft.com/office/drawing/2018/hyperlinkcolor" xmlns:go="http://customooxmlschemas.google.com/" textRoundtripDataId="12"/>
+                  </a:ext>
+                </a:extLst>
+              </a:rPr>
+              <a:t>/Га</a:t>
+            </a:r>
+          </a:p>
+        </p:txBody>
+      </p:sp>
+      <p:sp>
+        <p:nvSpPr>
+          <p:cNvPr id="45" name="Google Shape;118;p2">
+            <a:extLst>
+              <a:ext uri="{FF2B5EF4-FFF2-40B4-BE49-F238E27FC236}">
+                <a16:creationId xmlns:a16="http://schemas.microsoft.com/office/drawing/2014/main" id="{A23BD0CC-E2BA-2D25-8DFC-56342099BFC0}"/>
+              </a:ext>
+            </a:extLst>
+          </p:cNvPr>
+          <p:cNvSpPr/>
+          <p:nvPr/>
+        </p:nvSpPr>
+        <p:spPr>
+          <a:xfrm>
+            <a:off x="7309475" y="5641523"/>
+            <a:ext cx="4056600" cy="257400"/>
+          </a:xfrm>
+          <a:prstGeom prst="roundRect">
+            <a:avLst>
+              <a:gd name="adj" fmla="val 4594"/>
+            </a:avLst>
+          </a:prstGeom>
+          <a:noFill/>
+          <a:ln w="25400" cap="flat" cmpd="sng">
+            <a:solidFill>
+              <a:srgbClr val="009640"/>
+            </a:solidFill>
+            <a:prstDash val="solid"/>
+            <a:miter lim="800000"/>
+            <a:headEnd type="none" w="sm" len="sm"/>
+            <a:tailEnd type="none" w="sm" len="sm"/>
+          </a:ln>
+        </p:spPr>
+        <p:txBody>
+          <a:bodyPr spcFirstLastPara="1" wrap="square" lIns="91425" tIns="45700" rIns="91425" bIns="45700" anchor="ctr" anchorCtr="0">
+            <a:noAutofit/>
+          </a:bodyPr>
+          <a:lstStyle/>
+          <a:p>
+            <a:pPr marL="0" marR="0" lvl="0" indent="0" algn="ctr" rtl="0">
+              <a:spcBef>
+                <a:spcPts val="0"/>
+              </a:spcBef>
+              <a:spcAft>
+                <a:spcPts val="0"/>
+              </a:spcAft>
+              <a:buNone/>
+            </a:pPr>
+            <a:endParaRPr sz="1714">
+              <a:solidFill>
+                <a:schemeClr val="lt1"/>
+              </a:solidFill>
+              <a:latin typeface="Arial"/>
+              <a:ea typeface="Arial"/>
+              <a:cs typeface="Arial"/>
+              <a:sym typeface="Arial"/>
+            </a:endParaRPr>
+          </a:p>
+        </p:txBody>
+      </p:sp>
+      <p:sp>
+        <p:nvSpPr>
+          <p:cNvPr id="46" name="Google Shape;119;p2">
+            <a:extLst>
+              <a:ext uri="{FF2B5EF4-FFF2-40B4-BE49-F238E27FC236}">
+                <a16:creationId xmlns:a16="http://schemas.microsoft.com/office/drawing/2014/main" id="{FBD03DED-8827-3976-DF77-1C32CB1450B1}"/>
+              </a:ext>
+            </a:extLst>
+          </p:cNvPr>
+          <p:cNvSpPr/>
+          <p:nvPr/>
+        </p:nvSpPr>
+        <p:spPr>
+          <a:xfrm>
+            <a:off x="7324424" y="6070198"/>
+            <a:ext cx="2245563" cy="598500"/>
+          </a:xfrm>
+          <a:prstGeom prst="roundRect">
+            <a:avLst>
+              <a:gd name="adj" fmla="val 4594"/>
+            </a:avLst>
+          </a:prstGeom>
+          <a:noFill/>
+          <a:ln w="25400" cap="flat" cmpd="sng">
+            <a:solidFill>
+              <a:srgbClr val="009640"/>
+            </a:solidFill>
+            <a:prstDash val="solid"/>
+            <a:miter lim="800000"/>
+            <a:headEnd type="none" w="sm" len="sm"/>
+            <a:tailEnd type="none" w="sm" len="sm"/>
+          </a:ln>
+        </p:spPr>
+        <p:txBody>
+          <a:bodyPr spcFirstLastPara="1" wrap="square" lIns="91425" tIns="45700" rIns="91425" bIns="45700" anchor="ctr" anchorCtr="0">
+            <a:noAutofit/>
+          </a:bodyPr>
+          <a:lstStyle/>
+          <a:p>
+            <a:pPr marL="0" marR="0" lvl="0" indent="0" algn="ctr" rtl="0">
+              <a:spcBef>
+                <a:spcPts val="0"/>
+              </a:spcBef>
+              <a:spcAft>
+                <a:spcPts val="0"/>
+              </a:spcAft>
+              <a:buNone/>
+            </a:pPr>
+            <a:endParaRPr sz="1714">
+              <a:solidFill>
+                <a:schemeClr val="lt1"/>
+              </a:solidFill>
+              <a:latin typeface="Arial"/>
+              <a:ea typeface="Arial"/>
+              <a:cs typeface="Arial"/>
+              <a:sym typeface="Arial"/>
+            </a:endParaRPr>
+          </a:p>
+        </p:txBody>
+      </p:sp>
+      <p:sp>
+        <p:nvSpPr>
+          <p:cNvPr id="47" name="project_render_filename">
+            <a:extLst>
+              <a:ext uri="{FF2B5EF4-FFF2-40B4-BE49-F238E27FC236}">
+                <a16:creationId xmlns:a16="http://schemas.microsoft.com/office/drawing/2014/main" id="{ECA11FEF-19A3-99BC-675F-C7D84628AB7D}"/>
+              </a:ext>
+            </a:extLst>
+          </p:cNvPr>
+          <p:cNvSpPr txBox="1"/>
+          <p:nvPr/>
+        </p:nvSpPr>
+        <p:spPr>
+          <a:xfrm>
+            <a:off x="7386130" y="5680069"/>
+            <a:ext cx="3902562" cy="180137"/>
+          </a:xfrm>
+          <a:prstGeom prst="rect">
+            <a:avLst/>
+          </a:prstGeom>
+          <a:noFill/>
+          <a:ln>
+            <a:noFill/>
+          </a:ln>
+        </p:spPr>
+        <p:txBody>
+          <a:bodyPr spcFirstLastPara="1" wrap="square" lIns="91425" tIns="45700" rIns="91425" bIns="45700" anchor="t" anchorCtr="0">
+            <a:spAutoFit/>
+          </a:bodyPr>
+          <a:lstStyle/>
+          <a:p>
+            <a:pPr marL="0" marR="0" lvl="0" indent="0" algn="l" rtl="0">
+              <a:spcBef>
+                <a:spcPts val="0"/>
+              </a:spcBef>
+              <a:spcAft>
+                <a:spcPts val="0"/>
+              </a:spcAft>
+              <a:buNone/>
+            </a:pPr>
+            <a:r>
+              <a:rPr lang="ru-RU" sz="571" dirty="0">
+                <a:solidFill>
+                  <a:schemeClr val="lt1"/>
+                </a:solidFill>
+                <a:extLst>
+                  <a:ext uri="http://customooxmlschemas.google.com/">
+                    <go:slidesCustomData xmlns="" xmlns:mc="http://schemas.openxmlformats.org/markup-compatibility/2006" xmlns:mv="urn:schemas-microsoft-com:mac:vml" xmlns:c="http://schemas.openxmlformats.org/drawingml/2006/chart" xmlns:dgm="http://schemas.openxmlformats.org/drawingml/2006/diagram" xmlns:o="urn:schemas-microsoft-com:office:office" xmlns:v="urn:schemas-microsoft-com:vml" xmlns:pvml="urn:schemas-microsoft-com:office:powerpoint" xmlns:com="http://schemas.openxmlformats.org/drawingml/2006/compatibility" xmlns:p14="http://schemas.microsoft.com/office/powerpoint/2010/main" xmlns:p15="http://schemas.microsoft.com/office/powerpoint/2012/main" xmlns:ahyp="http://schemas.microsoft.com/office/drawing/2018/hyperlinkcolor" xmlns:go="http://customooxmlschemas.google.com/" textRoundtripDataId="14"/>
+                  </a:ext>
+                </a:extLst>
+              </a:rPr>
+              <a:t>Ссылка на рендеры</a:t>
+            </a:r>
+            <a:endParaRPr dirty="0"/>
+          </a:p>
+        </p:txBody>
+      </p:sp>
+      <p:sp>
+        <p:nvSpPr>
+          <p:cNvPr id="48" name="Google Shape;131;p2">
+            <a:extLst>
+              <a:ext uri="{FF2B5EF4-FFF2-40B4-BE49-F238E27FC236}">
+                <a16:creationId xmlns:a16="http://schemas.microsoft.com/office/drawing/2014/main" id="{5EE1CD75-AFE1-E99B-8D46-489693D090A5}"/>
+              </a:ext>
+            </a:extLst>
+          </p:cNvPr>
+          <p:cNvSpPr txBox="1"/>
+          <p:nvPr/>
+        </p:nvSpPr>
+        <p:spPr>
+          <a:xfrm>
+            <a:off x="7386117" y="6409682"/>
+            <a:ext cx="1257300" cy="180300"/>
+          </a:xfrm>
+          <a:prstGeom prst="rect">
+            <a:avLst/>
+          </a:prstGeom>
+          <a:noFill/>
+          <a:ln>
+            <a:noFill/>
+          </a:ln>
+        </p:spPr>
+        <p:txBody>
+          <a:bodyPr spcFirstLastPara="1" wrap="square" lIns="91425" tIns="45700" rIns="91425" bIns="45700" anchor="t" anchorCtr="0">
+            <a:spAutoFit/>
+          </a:bodyPr>
+          <a:lstStyle/>
+          <a:p>
+            <a:pPr marL="0" marR="0" lvl="0" indent="0" algn="l" rtl="0">
+              <a:spcBef>
+                <a:spcPts val="0"/>
+              </a:spcBef>
+              <a:spcAft>
+                <a:spcPts val="0"/>
+              </a:spcAft>
+              <a:buNone/>
+            </a:pPr>
+            <a:r>
+              <a:rPr lang="ru-RU" sz="571">
+                <a:solidFill>
+                  <a:schemeClr val="lt1"/>
+                </a:solidFill>
+              </a:rPr>
+              <a:t>стадия</a:t>
+            </a:r>
+            <a:endParaRPr/>
+          </a:p>
+        </p:txBody>
+      </p:sp>
+      <p:sp>
+        <p:nvSpPr>
+          <p:cNvPr id="49" name="stage">
+            <a:extLst>
+              <a:ext uri="{FF2B5EF4-FFF2-40B4-BE49-F238E27FC236}">
+                <a16:creationId xmlns:a16="http://schemas.microsoft.com/office/drawing/2014/main" id="{73C7AB51-A8F9-C0EB-406E-8DB54D1BEEEA}"/>
+              </a:ext>
+            </a:extLst>
+          </p:cNvPr>
+          <p:cNvSpPr txBox="1"/>
+          <p:nvPr/>
+        </p:nvSpPr>
+        <p:spPr>
+          <a:xfrm>
+            <a:off x="7386117" y="6113516"/>
+            <a:ext cx="1057500" cy="290400"/>
+          </a:xfrm>
+          <a:prstGeom prst="rect">
+            <a:avLst/>
+          </a:prstGeom>
+          <a:noFill/>
+          <a:ln>
+            <a:noFill/>
+          </a:ln>
+        </p:spPr>
+        <p:txBody>
+          <a:bodyPr spcFirstLastPara="1" wrap="square" lIns="91425" tIns="45700" rIns="91425" bIns="45700" anchor="t" anchorCtr="0">
+            <a:spAutoFit/>
+          </a:bodyPr>
+          <a:lstStyle/>
+          <a:p>
+            <a:pPr marL="0" marR="0" lvl="0" indent="0" algn="l" rtl="0">
+              <a:spcBef>
+                <a:spcPts val="0"/>
+              </a:spcBef>
+              <a:spcAft>
+                <a:spcPts val="0"/>
+              </a:spcAft>
+              <a:buNone/>
+            </a:pPr>
+            <a:r>
+              <a:rPr lang="ru-RU" sz="1286" b="1" dirty="0">
+                <a:solidFill>
+                  <a:schemeClr val="lt1"/>
+                </a:solidFill>
+              </a:rPr>
+              <a:t>Стадия</a:t>
+            </a:r>
+            <a:endParaRPr dirty="0"/>
+          </a:p>
+        </p:txBody>
+      </p:sp>
+      <p:sp>
+        <p:nvSpPr>
+          <p:cNvPr id="52" name="TextBox 51">
+            <a:extLst>
+              <a:ext uri="{FF2B5EF4-FFF2-40B4-BE49-F238E27FC236}">
+                <a16:creationId xmlns:a16="http://schemas.microsoft.com/office/drawing/2014/main" id="{7FA3A6D6-4FCD-8257-A3FA-11A20AA9B2AE}"/>
+              </a:ext>
+            </a:extLst>
+          </p:cNvPr>
+          <p:cNvSpPr txBox="1"/>
+          <p:nvPr/>
+        </p:nvSpPr>
+        <p:spPr>
+          <a:xfrm>
+            <a:off x="2542389" y="2261015"/>
+            <a:ext cx="850723" cy="224229"/>
+          </a:xfrm>
+          <a:prstGeom prst="rect">
+            <a:avLst/>
+          </a:prstGeom>
+          <a:noFill/>
+        </p:spPr>
+        <p:txBody>
+          <a:bodyPr wrap="square">
+            <a:spAutoFit/>
+          </a:bodyPr>
+          <a:lstStyle/>
+          <a:p>
+            <a:r>
+              <a:rPr lang="ru-RU" sz="857" b="1" dirty="0">
+                <a:solidFill>
+                  <a:schemeClr val="lt1"/>
+                </a:solidFill>
+                <a:extLst>
+                  <a:ext uri="http://customooxmlschemas.google.com/">
+                    <go:slidesCustomData xmlns="" xmlns:mc="http://schemas.openxmlformats.org/markup-compatibility/2006" xmlns:mv="urn:schemas-microsoft-com:mac:vml" xmlns:c="http://schemas.openxmlformats.org/drawingml/2006/chart" xmlns:dgm="http://schemas.openxmlformats.org/drawingml/2006/diagram" xmlns:o="urn:schemas-microsoft-com:office:office" xmlns:v="urn:schemas-microsoft-com:vml" xmlns:pvml="urn:schemas-microsoft-com:office:powerpoint" xmlns:com="http://schemas.openxmlformats.org/drawingml/2006/compatibility" xmlns:p14="http://schemas.microsoft.com/office/powerpoint/2010/main" xmlns:p15="http://schemas.microsoft.com/office/powerpoint/2012/main" xmlns:ahyp="http://schemas.microsoft.com/office/drawing/2018/hyperlinkcolor" xmlns:go="http://customooxmlschemas.google.com/" textRoundtripDataId="12"/>
+                  </a:ext>
+                </a:extLst>
+              </a:rPr>
+              <a:t>тыс.м2</a:t>
+            </a:r>
           </a:p>
         </p:txBody>
       </p:sp>

--- a/src/assets/slide_sample.pptx
+++ b/src/assets/slide_sample.pptx
@@ -278,7 +278,7 @@
       </p15:sldGuideLst>
     </p:ext>
     <p:ext uri="GoogleSlidesCustomDataVersion2">
-      <go:slidesCustomData xmlns:go="http://customooxmlschemas.google.com/" xmlns:ahyp="http://schemas.microsoft.com/office/drawing/2018/hyperlinkcolor" xmlns:p15="http://schemas.microsoft.com/office/powerpoint/2012/main" xmlns:p14="http://schemas.microsoft.com/office/powerpoint/2010/main" xmlns:com="http://schemas.openxmlformats.org/drawingml/2006/compatibility" xmlns:pvml="urn:schemas-microsoft-com:office:powerpoint" xmlns:v="urn:schemas-microsoft-com:vml" xmlns:o="urn:schemas-microsoft-com:office:office" xmlns:dgm="http://schemas.openxmlformats.org/drawingml/2006/diagram" xmlns:c="http://schemas.openxmlformats.org/drawingml/2006/chart" xmlns:mv="urn:schemas-microsoft-com:mac:vml" xmlns:mc="http://schemas.openxmlformats.org/markup-compatibility/2006" xmlns="" r:id="rId8" roundtripDataSignature="AMtx7mj+3mxE5o7GXHaj57Ss1rmUYwTV0A=="/>
+      <go:slidesCustomData xmlns="" xmlns:mc="http://schemas.openxmlformats.org/markup-compatibility/2006" xmlns:mv="urn:schemas-microsoft-com:mac:vml" xmlns:c="http://schemas.openxmlformats.org/drawingml/2006/chart" xmlns:dgm="http://schemas.openxmlformats.org/drawingml/2006/diagram" xmlns:o="urn:schemas-microsoft-com:office:office" xmlns:v="urn:schemas-microsoft-com:vml" xmlns:pvml="urn:schemas-microsoft-com:office:powerpoint" xmlns:com="http://schemas.openxmlformats.org/drawingml/2006/compatibility" xmlns:p14="http://schemas.microsoft.com/office/powerpoint/2010/main" xmlns:p15="http://schemas.microsoft.com/office/powerpoint/2012/main" xmlns:ahyp="http://schemas.microsoft.com/office/drawing/2018/hyperlinkcolor" xmlns:go="http://customooxmlschemas.google.com/" r:id="rId8" roundtripDataSignature="AMtx7mj+3mxE5o7GXHaj57Ss1rmUYwTV0A=="/>
     </p:ext>
   </p:extLst>
 </p:presentation>
@@ -11873,7 +11873,7 @@
                 <a:sym typeface="Arial"/>
                 <a:extLst>
                   <a:ext uri="http://customooxmlschemas.google.com/">
-                    <go:slidesCustomData xmlns:go="http://customooxmlschemas.google.com/" xmlns:ahyp="http://schemas.microsoft.com/office/drawing/2018/hyperlinkcolor" xmlns:p15="http://schemas.microsoft.com/office/powerpoint/2012/main" xmlns:p14="http://schemas.microsoft.com/office/powerpoint/2010/main" xmlns:com="http://schemas.openxmlformats.org/drawingml/2006/compatibility" xmlns:pvml="urn:schemas-microsoft-com:office:powerpoint" xmlns:v="urn:schemas-microsoft-com:vml" xmlns:o="urn:schemas-microsoft-com:office:office" xmlns:dgm="http://schemas.openxmlformats.org/drawingml/2006/diagram" xmlns:c="http://schemas.openxmlformats.org/drawingml/2006/chart" xmlns:mv="urn:schemas-microsoft-com:mac:vml" xmlns:mc="http://schemas.openxmlformats.org/markup-compatibility/2006" xmlns="" textRoundtripDataId="7"/>
+                    <go:slidesCustomData xmlns="" xmlns:mc="http://schemas.openxmlformats.org/markup-compatibility/2006" xmlns:mv="urn:schemas-microsoft-com:mac:vml" xmlns:c="http://schemas.openxmlformats.org/drawingml/2006/chart" xmlns:dgm="http://schemas.openxmlformats.org/drawingml/2006/diagram" xmlns:o="urn:schemas-microsoft-com:office:office" xmlns:v="urn:schemas-microsoft-com:vml" xmlns:pvml="urn:schemas-microsoft-com:office:powerpoint" xmlns:com="http://schemas.openxmlformats.org/drawingml/2006/compatibility" xmlns:p14="http://schemas.microsoft.com/office/powerpoint/2010/main" xmlns:p15="http://schemas.microsoft.com/office/powerpoint/2012/main" xmlns:ahyp="http://schemas.microsoft.com/office/drawing/2018/hyperlinkcolor" xmlns:go="http://customooxmlschemas.google.com/" textRoundtripDataId="7"/>
                   </a:ext>
                 </a:extLst>
               </a:rPr>
@@ -12043,7 +12043,7 @@
                 </a:solidFill>
                 <a:extLst>
                   <a:ext uri="http://customooxmlschemas.google.com/">
-                    <go:slidesCustomData xmlns="" xmlns:mc="http://schemas.openxmlformats.org/markup-compatibility/2006" xmlns:mv="urn:schemas-microsoft-com:mac:vml" xmlns:c="http://schemas.openxmlformats.org/drawingml/2006/chart" xmlns:dgm="http://schemas.openxmlformats.org/drawingml/2006/diagram" xmlns:o="urn:schemas-microsoft-com:office:office" xmlns:v="urn:schemas-microsoft-com:vml" xmlns:pvml="urn:schemas-microsoft-com:office:powerpoint" xmlns:com="http://schemas.openxmlformats.org/drawingml/2006/compatibility" xmlns:p14="http://schemas.microsoft.com/office/powerpoint/2010/main" xmlns:p15="http://schemas.microsoft.com/office/powerpoint/2012/main" xmlns:ahyp="http://schemas.microsoft.com/office/drawing/2018/hyperlinkcolor" xmlns:go="http://customooxmlschemas.google.com/" textRoundtripDataId="5"/>
+                    <go:slidesCustomData xmlns:go="http://customooxmlschemas.google.com/" xmlns:ahyp="http://schemas.microsoft.com/office/drawing/2018/hyperlinkcolor" xmlns:p15="http://schemas.microsoft.com/office/powerpoint/2012/main" xmlns:p14="http://schemas.microsoft.com/office/powerpoint/2010/main" xmlns:com="http://schemas.openxmlformats.org/drawingml/2006/compatibility" xmlns:pvml="urn:schemas-microsoft-com:office:powerpoint" xmlns:v="urn:schemas-microsoft-com:vml" xmlns:o="urn:schemas-microsoft-com:office:office" xmlns:dgm="http://schemas.openxmlformats.org/drawingml/2006/diagram" xmlns:c="http://schemas.openxmlformats.org/drawingml/2006/chart" xmlns:mv="urn:schemas-microsoft-com:mac:vml" xmlns:mc="http://schemas.openxmlformats.org/markup-compatibility/2006" xmlns="" textRoundtripDataId="5"/>
                   </a:ext>
                 </a:extLst>
               </a:rPr>
@@ -12151,7 +12151,7 @@
                 <a:sym typeface="Arial"/>
                 <a:extLst>
                   <a:ext uri="http://customooxmlschemas.google.com/">
-                    <go:slidesCustomData xmlns:go="http://customooxmlschemas.google.com/" xmlns:ahyp="http://schemas.microsoft.com/office/drawing/2018/hyperlinkcolor" xmlns:p15="http://schemas.microsoft.com/office/powerpoint/2012/main" xmlns:p14="http://schemas.microsoft.com/office/powerpoint/2010/main" xmlns:com="http://schemas.openxmlformats.org/drawingml/2006/compatibility" xmlns:pvml="urn:schemas-microsoft-com:office:powerpoint" xmlns:v="urn:schemas-microsoft-com:vml" xmlns:o="urn:schemas-microsoft-com:office:office" xmlns:dgm="http://schemas.openxmlformats.org/drawingml/2006/diagram" xmlns:c="http://schemas.openxmlformats.org/drawingml/2006/chart" xmlns:mv="urn:schemas-microsoft-com:mac:vml" xmlns:mc="http://schemas.openxmlformats.org/markup-compatibility/2006" xmlns="" textRoundtripDataId="0"/>
+                    <go:slidesCustomData xmlns="" xmlns:mc="http://schemas.openxmlformats.org/markup-compatibility/2006" xmlns:mv="urn:schemas-microsoft-com:mac:vml" xmlns:c="http://schemas.openxmlformats.org/drawingml/2006/chart" xmlns:dgm="http://schemas.openxmlformats.org/drawingml/2006/diagram" xmlns:o="urn:schemas-microsoft-com:office:office" xmlns:v="urn:schemas-microsoft-com:vml" xmlns:pvml="urn:schemas-microsoft-com:office:powerpoint" xmlns:com="http://schemas.openxmlformats.org/drawingml/2006/compatibility" xmlns:p14="http://schemas.microsoft.com/office/powerpoint/2010/main" xmlns:p15="http://schemas.microsoft.com/office/powerpoint/2012/main" xmlns:ahyp="http://schemas.microsoft.com/office/drawing/2018/hyperlinkcolor" xmlns:go="http://customooxmlschemas.google.com/" textRoundtripDataId="0"/>
                   </a:ext>
                 </a:extLst>
               </a:rPr>
@@ -13184,7 +13184,7 @@
                 </a:solidFill>
                 <a:extLst>
                   <a:ext uri="http://customooxmlschemas.google.com/">
-                    <go:slidesCustomData xmlns:go="http://customooxmlschemas.google.com/" xmlns:ahyp="http://schemas.microsoft.com/office/drawing/2018/hyperlinkcolor" xmlns:p15="http://schemas.microsoft.com/office/powerpoint/2012/main" xmlns:p14="http://schemas.microsoft.com/office/powerpoint/2010/main" xmlns:com="http://schemas.openxmlformats.org/drawingml/2006/compatibility" xmlns:pvml="urn:schemas-microsoft-com:office:powerpoint" xmlns:v="urn:schemas-microsoft-com:vml" xmlns:o="urn:schemas-microsoft-com:office:office" xmlns:dgm="http://schemas.openxmlformats.org/drawingml/2006/diagram" xmlns:c="http://schemas.openxmlformats.org/drawingml/2006/chart" xmlns:mv="urn:schemas-microsoft-com:mac:vml" xmlns:mc="http://schemas.openxmlformats.org/markup-compatibility/2006" xmlns="" textRoundtripDataId="7"/>
+                    <go:slidesCustomData xmlns="" xmlns:mc="http://schemas.openxmlformats.org/markup-compatibility/2006" xmlns:mv="urn:schemas-microsoft-com:mac:vml" xmlns:c="http://schemas.openxmlformats.org/drawingml/2006/chart" xmlns:dgm="http://schemas.openxmlformats.org/drawingml/2006/diagram" xmlns:o="urn:schemas-microsoft-com:office:office" xmlns:v="urn:schemas-microsoft-com:vml" xmlns:pvml="urn:schemas-microsoft-com:office:powerpoint" xmlns:com="http://schemas.openxmlformats.org/drawingml/2006/compatibility" xmlns:p14="http://schemas.microsoft.com/office/powerpoint/2010/main" xmlns:p15="http://schemas.microsoft.com/office/powerpoint/2012/main" xmlns:ahyp="http://schemas.microsoft.com/office/drawing/2018/hyperlinkcolor" xmlns:go="http://customooxmlschemas.google.com/" textRoundtripDataId="7"/>
                   </a:ext>
                 </a:extLst>
               </a:rPr>
@@ -13268,7 +13268,7 @@
         </p:nvSpPr>
         <p:spPr>
           <a:xfrm>
-            <a:off x="922560" y="1342422"/>
+            <a:off x="1068332" y="1342422"/>
             <a:ext cx="618421" cy="224229"/>
           </a:xfrm>
           <a:prstGeom prst="rect">
@@ -13298,7 +13298,7 @@
                 </a:solidFill>
                 <a:extLst>
                   <a:ext uri="http://customooxmlschemas.google.com/">
-                    <go:slidesCustomData xmlns="" xmlns:mc="http://schemas.openxmlformats.org/markup-compatibility/2006" xmlns:mv="urn:schemas-microsoft-com:mac:vml" xmlns:c="http://schemas.openxmlformats.org/drawingml/2006/chart" xmlns:dgm="http://schemas.openxmlformats.org/drawingml/2006/diagram" xmlns:o="urn:schemas-microsoft-com:office:office" xmlns:v="urn:schemas-microsoft-com:vml" xmlns:pvml="urn:schemas-microsoft-com:office:powerpoint" xmlns:com="http://schemas.openxmlformats.org/drawingml/2006/compatibility" xmlns:p14="http://schemas.microsoft.com/office/powerpoint/2010/main" xmlns:p15="http://schemas.microsoft.com/office/powerpoint/2012/main" xmlns:ahyp="http://schemas.microsoft.com/office/drawing/2018/hyperlinkcolor" xmlns:go="http://customooxmlschemas.google.com/" textRoundtripDataId="9"/>
+                    <go:slidesCustomData xmlns:go="http://customooxmlschemas.google.com/" xmlns:ahyp="http://schemas.microsoft.com/office/drawing/2018/hyperlinkcolor" xmlns:p15="http://schemas.microsoft.com/office/powerpoint/2012/main" xmlns:p14="http://schemas.microsoft.com/office/powerpoint/2010/main" xmlns:com="http://schemas.openxmlformats.org/drawingml/2006/compatibility" xmlns:pvml="urn:schemas-microsoft-com:office:powerpoint" xmlns:v="urn:schemas-microsoft-com:vml" xmlns:o="urn:schemas-microsoft-com:office:office" xmlns:dgm="http://schemas.openxmlformats.org/drawingml/2006/diagram" xmlns:c="http://schemas.openxmlformats.org/drawingml/2006/chart" xmlns:mv="urn:schemas-microsoft-com:mac:vml" xmlns:mc="http://schemas.openxmlformats.org/markup-compatibility/2006" xmlns="" textRoundtripDataId="9"/>
                   </a:ext>
                 </a:extLst>
               </a:rPr>
@@ -14058,7 +14058,7 @@
                 </a:solidFill>
                 <a:extLst>
                   <a:ext uri="http://customooxmlschemas.google.com/">
-                    <go:slidesCustomData xmlns="" xmlns:mc="http://schemas.openxmlformats.org/markup-compatibility/2006" xmlns:mv="urn:schemas-microsoft-com:mac:vml" xmlns:c="http://schemas.openxmlformats.org/drawingml/2006/chart" xmlns:dgm="http://schemas.openxmlformats.org/drawingml/2006/diagram" xmlns:o="urn:schemas-microsoft-com:office:office" xmlns:v="urn:schemas-microsoft-com:vml" xmlns:pvml="urn:schemas-microsoft-com:office:powerpoint" xmlns:com="http://schemas.openxmlformats.org/drawingml/2006/compatibility" xmlns:p14="http://schemas.microsoft.com/office/powerpoint/2010/main" xmlns:p15="http://schemas.microsoft.com/office/powerpoint/2012/main" xmlns:ahyp="http://schemas.microsoft.com/office/drawing/2018/hyperlinkcolor" xmlns:go="http://customooxmlschemas.google.com/" textRoundtripDataId="6"/>
+                    <go:slidesCustomData xmlns:go="http://customooxmlschemas.google.com/" xmlns:ahyp="http://schemas.microsoft.com/office/drawing/2018/hyperlinkcolor" xmlns:p15="http://schemas.microsoft.com/office/powerpoint/2012/main" xmlns:p14="http://schemas.microsoft.com/office/powerpoint/2010/main" xmlns:com="http://schemas.openxmlformats.org/drawingml/2006/compatibility" xmlns:pvml="urn:schemas-microsoft-com:office:powerpoint" xmlns:v="urn:schemas-microsoft-com:vml" xmlns:o="urn:schemas-microsoft-com:office:office" xmlns:dgm="http://schemas.openxmlformats.org/drawingml/2006/diagram" xmlns:c="http://schemas.openxmlformats.org/drawingml/2006/chart" xmlns:mv="urn:schemas-microsoft-com:mac:vml" xmlns:mc="http://schemas.openxmlformats.org/markup-compatibility/2006" xmlns="" textRoundtripDataId="6"/>
                   </a:ext>
                 </a:extLst>
               </a:rPr>
@@ -14175,7 +14175,7 @@
                 </a:solidFill>
                 <a:extLst>
                   <a:ext uri="http://customooxmlschemas.google.com/">
-                    <go:slidesCustomData xmlns="" xmlns:mc="http://schemas.openxmlformats.org/markup-compatibility/2006" xmlns:mv="urn:schemas-microsoft-com:mac:vml" xmlns:c="http://schemas.openxmlformats.org/drawingml/2006/chart" xmlns:dgm="http://schemas.openxmlformats.org/drawingml/2006/diagram" xmlns:o="urn:schemas-microsoft-com:office:office" xmlns:v="urn:schemas-microsoft-com:vml" xmlns:pvml="urn:schemas-microsoft-com:office:powerpoint" xmlns:com="http://schemas.openxmlformats.org/drawingml/2006/compatibility" xmlns:p14="http://schemas.microsoft.com/office/powerpoint/2010/main" xmlns:p15="http://schemas.microsoft.com/office/powerpoint/2012/main" xmlns:ahyp="http://schemas.microsoft.com/office/drawing/2018/hyperlinkcolor" xmlns:go="http://customooxmlschemas.google.com/" textRoundtripDataId="8"/>
+                    <go:slidesCustomData xmlns:go="http://customooxmlschemas.google.com/" xmlns:ahyp="http://schemas.microsoft.com/office/drawing/2018/hyperlinkcolor" xmlns:p15="http://schemas.microsoft.com/office/powerpoint/2012/main" xmlns:p14="http://schemas.microsoft.com/office/powerpoint/2010/main" xmlns:com="http://schemas.openxmlformats.org/drawingml/2006/compatibility" xmlns:pvml="urn:schemas-microsoft-com:office:powerpoint" xmlns:v="urn:schemas-microsoft-com:vml" xmlns:o="urn:schemas-microsoft-com:office:office" xmlns:dgm="http://schemas.openxmlformats.org/drawingml/2006/diagram" xmlns:c="http://schemas.openxmlformats.org/drawingml/2006/chart" xmlns:mv="urn:schemas-microsoft-com:mac:vml" xmlns:mc="http://schemas.openxmlformats.org/markup-compatibility/2006" xmlns="" textRoundtripDataId="8"/>
                   </a:ext>
                 </a:extLst>
               </a:rPr>
@@ -14288,7 +14288,7 @@
                 </a:solidFill>
                 <a:extLst>
                   <a:ext uri="http://customooxmlschemas.google.com/">
-                    <go:slidesCustomData xmlns="" xmlns:mc="http://schemas.openxmlformats.org/markup-compatibility/2006" xmlns:mv="urn:schemas-microsoft-com:mac:vml" xmlns:c="http://schemas.openxmlformats.org/drawingml/2006/chart" xmlns:dgm="http://schemas.openxmlformats.org/drawingml/2006/diagram" xmlns:o="urn:schemas-microsoft-com:office:office" xmlns:v="urn:schemas-microsoft-com:vml" xmlns:pvml="urn:schemas-microsoft-com:office:powerpoint" xmlns:com="http://schemas.openxmlformats.org/drawingml/2006/compatibility" xmlns:p14="http://schemas.microsoft.com/office/powerpoint/2010/main" xmlns:p15="http://schemas.microsoft.com/office/powerpoint/2012/main" xmlns:ahyp="http://schemas.microsoft.com/office/drawing/2018/hyperlinkcolor" xmlns:go="http://customooxmlschemas.google.com/" textRoundtripDataId="10"/>
+                    <go:slidesCustomData xmlns:go="http://customooxmlschemas.google.com/" xmlns:ahyp="http://schemas.microsoft.com/office/drawing/2018/hyperlinkcolor" xmlns:p15="http://schemas.microsoft.com/office/powerpoint/2012/main" xmlns:p14="http://schemas.microsoft.com/office/powerpoint/2010/main" xmlns:com="http://schemas.openxmlformats.org/drawingml/2006/compatibility" xmlns:pvml="urn:schemas-microsoft-com:office:powerpoint" xmlns:v="urn:schemas-microsoft-com:vml" xmlns:o="urn:schemas-microsoft-com:office:office" xmlns:dgm="http://schemas.openxmlformats.org/drawingml/2006/diagram" xmlns:c="http://schemas.openxmlformats.org/drawingml/2006/chart" xmlns:mv="urn:schemas-microsoft-com:mac:vml" xmlns:mc="http://schemas.openxmlformats.org/markup-compatibility/2006" xmlns="" textRoundtripDataId="10"/>
                   </a:ext>
                 </a:extLst>
               </a:rPr>
@@ -14693,7 +14693,7 @@
                 </a:solidFill>
                 <a:extLst>
                   <a:ext uri="http://customooxmlschemas.google.com/">
-                    <go:slidesCustomData xmlns="" xmlns:mc="http://schemas.openxmlformats.org/markup-compatibility/2006" xmlns:mv="urn:schemas-microsoft-com:mac:vml" xmlns:c="http://schemas.openxmlformats.org/drawingml/2006/chart" xmlns:dgm="http://schemas.openxmlformats.org/drawingml/2006/diagram" xmlns:o="urn:schemas-microsoft-com:office:office" xmlns:v="urn:schemas-microsoft-com:vml" xmlns:pvml="urn:schemas-microsoft-com:office:powerpoint" xmlns:com="http://schemas.openxmlformats.org/drawingml/2006/compatibility" xmlns:p14="http://schemas.microsoft.com/office/powerpoint/2010/main" xmlns:p15="http://schemas.microsoft.com/office/powerpoint/2012/main" xmlns:ahyp="http://schemas.microsoft.com/office/drawing/2018/hyperlinkcolor" xmlns:go="http://customooxmlschemas.google.com/" textRoundtripDataId="0"/>
+                    <go:slidesCustomData xmlns:go="http://customooxmlschemas.google.com/" xmlns:ahyp="http://schemas.microsoft.com/office/drawing/2018/hyperlinkcolor" xmlns:p15="http://schemas.microsoft.com/office/powerpoint/2012/main" xmlns:p14="http://schemas.microsoft.com/office/powerpoint/2010/main" xmlns:com="http://schemas.openxmlformats.org/drawingml/2006/compatibility" xmlns:pvml="urn:schemas-microsoft-com:office:powerpoint" xmlns:v="urn:schemas-microsoft-com:vml" xmlns:o="urn:schemas-microsoft-com:office:office" xmlns:dgm="http://schemas.openxmlformats.org/drawingml/2006/diagram" xmlns:c="http://schemas.openxmlformats.org/drawingml/2006/chart" xmlns:mv="urn:schemas-microsoft-com:mac:vml" xmlns:mc="http://schemas.openxmlformats.org/markup-compatibility/2006" xmlns="" textRoundtripDataId="0"/>
                   </a:ext>
                 </a:extLst>
               </a:rPr>
@@ -14758,7 +14758,7 @@
                 </a:solidFill>
                 <a:extLst>
                   <a:ext uri="http://customooxmlschemas.google.com/">
-                    <go:slidesCustomData xmlns="" xmlns:mc="http://schemas.openxmlformats.org/markup-compatibility/2006" xmlns:mv="urn:schemas-microsoft-com:mac:vml" xmlns:c="http://schemas.openxmlformats.org/drawingml/2006/chart" xmlns:dgm="http://schemas.openxmlformats.org/drawingml/2006/diagram" xmlns:o="urn:schemas-microsoft-com:office:office" xmlns:v="urn:schemas-microsoft-com:vml" xmlns:pvml="urn:schemas-microsoft-com:office:powerpoint" xmlns:com="http://schemas.openxmlformats.org/drawingml/2006/compatibility" xmlns:p14="http://schemas.microsoft.com/office/powerpoint/2010/main" xmlns:p15="http://schemas.microsoft.com/office/powerpoint/2012/main" xmlns:ahyp="http://schemas.microsoft.com/office/drawing/2018/hyperlinkcolor" xmlns:go="http://customooxmlschemas.google.com/" xmlns:lc="http://schemas.openxmlformats.org/drawingml/2006/lockedCanvas" textRoundtripDataId="5"/>
+                    <go:slidesCustomData xmlns:lc="http://schemas.openxmlformats.org/drawingml/2006/lockedCanvas" xmlns:go="http://customooxmlschemas.google.com/" xmlns:ahyp="http://schemas.microsoft.com/office/drawing/2018/hyperlinkcolor" xmlns:p15="http://schemas.microsoft.com/office/powerpoint/2012/main" xmlns:p14="http://schemas.microsoft.com/office/powerpoint/2010/main" xmlns:com="http://schemas.openxmlformats.org/drawingml/2006/compatibility" xmlns:pvml="urn:schemas-microsoft-com:office:powerpoint" xmlns:v="urn:schemas-microsoft-com:vml" xmlns:o="urn:schemas-microsoft-com:office:office" xmlns:dgm="http://schemas.openxmlformats.org/drawingml/2006/diagram" xmlns:c="http://schemas.openxmlformats.org/drawingml/2006/chart" xmlns:mv="urn:schemas-microsoft-com:mac:vml" xmlns:mc="http://schemas.openxmlformats.org/markup-compatibility/2006" xmlns="" textRoundtripDataId="5"/>
                   </a:ext>
                 </a:extLst>
               </a:rPr>
@@ -14811,7 +14811,7 @@
                 </a:solidFill>
                 <a:extLst>
                   <a:ext uri="http://customooxmlschemas.google.com/">
-                    <go:slidesCustomData xmlns="" xmlns:mc="http://schemas.openxmlformats.org/markup-compatibility/2006" xmlns:mv="urn:schemas-microsoft-com:mac:vml" xmlns:c="http://schemas.openxmlformats.org/drawingml/2006/chart" xmlns:dgm="http://schemas.openxmlformats.org/drawingml/2006/diagram" xmlns:o="urn:schemas-microsoft-com:office:office" xmlns:v="urn:schemas-microsoft-com:vml" xmlns:pvml="urn:schemas-microsoft-com:office:powerpoint" xmlns:com="http://schemas.openxmlformats.org/drawingml/2006/compatibility" xmlns:p14="http://schemas.microsoft.com/office/powerpoint/2010/main" xmlns:p15="http://schemas.microsoft.com/office/powerpoint/2012/main" xmlns:ahyp="http://schemas.microsoft.com/office/drawing/2018/hyperlinkcolor" xmlns:go="http://customooxmlschemas.google.com/" textRoundtripDataId="12"/>
+                    <go:slidesCustomData xmlns:go="http://customooxmlschemas.google.com/" xmlns:ahyp="http://schemas.microsoft.com/office/drawing/2018/hyperlinkcolor" xmlns:p15="http://schemas.microsoft.com/office/powerpoint/2012/main" xmlns:p14="http://schemas.microsoft.com/office/powerpoint/2010/main" xmlns:com="http://schemas.openxmlformats.org/drawingml/2006/compatibility" xmlns:pvml="urn:schemas-microsoft-com:office:powerpoint" xmlns:v="urn:schemas-microsoft-com:vml" xmlns:o="urn:schemas-microsoft-com:office:office" xmlns:dgm="http://schemas.openxmlformats.org/drawingml/2006/diagram" xmlns:c="http://schemas.openxmlformats.org/drawingml/2006/chart" xmlns:mv="urn:schemas-microsoft-com:mac:vml" xmlns:mc="http://schemas.openxmlformats.org/markup-compatibility/2006" xmlns="" textRoundtripDataId="12"/>
                   </a:ext>
                 </a:extLst>
               </a:rPr>
@@ -14834,7 +14834,7 @@
         </p:nvSpPr>
         <p:spPr>
           <a:xfrm>
-            <a:off x="924740" y="2273717"/>
+            <a:off x="1143398" y="2273717"/>
             <a:ext cx="810751" cy="224229"/>
           </a:xfrm>
           <a:prstGeom prst="rect">
@@ -14855,7 +14855,7 @@
                 </a:solidFill>
                 <a:extLst>
                   <a:ext uri="http://customooxmlschemas.google.com/">
-                    <go:slidesCustomData xmlns="" xmlns:mc="http://schemas.openxmlformats.org/markup-compatibility/2006" xmlns:mv="urn:schemas-microsoft-com:mac:vml" xmlns:c="http://schemas.openxmlformats.org/drawingml/2006/chart" xmlns:dgm="http://schemas.openxmlformats.org/drawingml/2006/diagram" xmlns:o="urn:schemas-microsoft-com:office:office" xmlns:v="urn:schemas-microsoft-com:vml" xmlns:pvml="urn:schemas-microsoft-com:office:powerpoint" xmlns:com="http://schemas.openxmlformats.org/drawingml/2006/compatibility" xmlns:p14="http://schemas.microsoft.com/office/powerpoint/2010/main" xmlns:p15="http://schemas.microsoft.com/office/powerpoint/2012/main" xmlns:ahyp="http://schemas.microsoft.com/office/drawing/2018/hyperlinkcolor" xmlns:go="http://customooxmlschemas.google.com/" textRoundtripDataId="9"/>
+                    <go:slidesCustomData xmlns:go="http://customooxmlschemas.google.com/" xmlns:ahyp="http://schemas.microsoft.com/office/drawing/2018/hyperlinkcolor" xmlns:p15="http://schemas.microsoft.com/office/powerpoint/2012/main" xmlns:p14="http://schemas.microsoft.com/office/powerpoint/2010/main" xmlns:com="http://schemas.openxmlformats.org/drawingml/2006/compatibility" xmlns:pvml="urn:schemas-microsoft-com:office:powerpoint" xmlns:v="urn:schemas-microsoft-com:vml" xmlns:o="urn:schemas-microsoft-com:office:office" xmlns:dgm="http://schemas.openxmlformats.org/drawingml/2006/diagram" xmlns:c="http://schemas.openxmlformats.org/drawingml/2006/chart" xmlns:mv="urn:schemas-microsoft-com:mac:vml" xmlns:mc="http://schemas.openxmlformats.org/markup-compatibility/2006" xmlns="" textRoundtripDataId="9"/>
                   </a:ext>
                 </a:extLst>
               </a:rPr>
@@ -14878,7 +14878,7 @@
         </p:nvSpPr>
         <p:spPr>
           <a:xfrm>
-            <a:off x="2471289" y="1350729"/>
+            <a:off x="2689947" y="1350729"/>
             <a:ext cx="1140018" cy="224229"/>
           </a:xfrm>
           <a:prstGeom prst="rect">
@@ -14899,7 +14899,7 @@
                 </a:solidFill>
                 <a:extLst>
                   <a:ext uri="http://customooxmlschemas.google.com/">
-                    <go:slidesCustomData xmlns="" xmlns:mc="http://schemas.openxmlformats.org/markup-compatibility/2006" xmlns:mv="urn:schemas-microsoft-com:mac:vml" xmlns:c="http://schemas.openxmlformats.org/drawingml/2006/chart" xmlns:dgm="http://schemas.openxmlformats.org/drawingml/2006/diagram" xmlns:o="urn:schemas-microsoft-com:office:office" xmlns:v="urn:schemas-microsoft-com:vml" xmlns:pvml="urn:schemas-microsoft-com:office:powerpoint" xmlns:com="http://schemas.openxmlformats.org/drawingml/2006/compatibility" xmlns:p14="http://schemas.microsoft.com/office/powerpoint/2010/main" xmlns:p15="http://schemas.microsoft.com/office/powerpoint/2012/main" xmlns:ahyp="http://schemas.microsoft.com/office/drawing/2018/hyperlinkcolor" xmlns:go="http://customooxmlschemas.google.com/" textRoundtripDataId="12"/>
+                    <go:slidesCustomData xmlns:go="http://customooxmlschemas.google.com/" xmlns:ahyp="http://schemas.microsoft.com/office/drawing/2018/hyperlinkcolor" xmlns:p15="http://schemas.microsoft.com/office/powerpoint/2012/main" xmlns:p14="http://schemas.microsoft.com/office/powerpoint/2010/main" xmlns:com="http://schemas.openxmlformats.org/drawingml/2006/compatibility" xmlns:pvml="urn:schemas-microsoft-com:office:powerpoint" xmlns:v="urn:schemas-microsoft-com:vml" xmlns:o="urn:schemas-microsoft-com:office:office" xmlns:dgm="http://schemas.openxmlformats.org/drawingml/2006/diagram" xmlns:c="http://schemas.openxmlformats.org/drawingml/2006/chart" xmlns:mv="urn:schemas-microsoft-com:mac:vml" xmlns:mc="http://schemas.openxmlformats.org/markup-compatibility/2006" xmlns="" textRoundtripDataId="12"/>
                   </a:ext>
                 </a:extLst>
               </a:rPr>
@@ -14912,7 +14912,7 @@
                 </a:solidFill>
                 <a:extLst>
                   <a:ext uri="http://customooxmlschemas.google.com/">
-                    <go:slidesCustomData xmlns="" xmlns:mc="http://schemas.openxmlformats.org/markup-compatibility/2006" xmlns:mv="urn:schemas-microsoft-com:mac:vml" xmlns:c="http://schemas.openxmlformats.org/drawingml/2006/chart" xmlns:dgm="http://schemas.openxmlformats.org/drawingml/2006/diagram" xmlns:o="urn:schemas-microsoft-com:office:office" xmlns:v="urn:schemas-microsoft-com:vml" xmlns:pvml="urn:schemas-microsoft-com:office:powerpoint" xmlns:com="http://schemas.openxmlformats.org/drawingml/2006/compatibility" xmlns:p14="http://schemas.microsoft.com/office/powerpoint/2010/main" xmlns:p15="http://schemas.microsoft.com/office/powerpoint/2012/main" xmlns:ahyp="http://schemas.microsoft.com/office/drawing/2018/hyperlinkcolor" xmlns:go="http://customooxmlschemas.google.com/" textRoundtripDataId="12"/>
+                    <go:slidesCustomData xmlns:go="http://customooxmlschemas.google.com/" xmlns:ahyp="http://schemas.microsoft.com/office/drawing/2018/hyperlinkcolor" xmlns:p15="http://schemas.microsoft.com/office/powerpoint/2012/main" xmlns:p14="http://schemas.microsoft.com/office/powerpoint/2010/main" xmlns:com="http://schemas.openxmlformats.org/drawingml/2006/compatibility" xmlns:pvml="urn:schemas-microsoft-com:office:powerpoint" xmlns:v="urn:schemas-microsoft-com:vml" xmlns:o="urn:schemas-microsoft-com:office:office" xmlns:dgm="http://schemas.openxmlformats.org/drawingml/2006/diagram" xmlns:c="http://schemas.openxmlformats.org/drawingml/2006/chart" xmlns:mv="urn:schemas-microsoft-com:mac:vml" xmlns:mc="http://schemas.openxmlformats.org/markup-compatibility/2006" xmlns="" textRoundtripDataId="12"/>
                   </a:ext>
                 </a:extLst>
               </a:rPr>
@@ -15088,7 +15088,7 @@
                 </a:solidFill>
                 <a:extLst>
                   <a:ext uri="http://customooxmlschemas.google.com/">
-                    <go:slidesCustomData xmlns="" xmlns:mc="http://schemas.openxmlformats.org/markup-compatibility/2006" xmlns:mv="urn:schemas-microsoft-com:mac:vml" xmlns:c="http://schemas.openxmlformats.org/drawingml/2006/chart" xmlns:dgm="http://schemas.openxmlformats.org/drawingml/2006/diagram" xmlns:o="urn:schemas-microsoft-com:office:office" xmlns:v="urn:schemas-microsoft-com:vml" xmlns:pvml="urn:schemas-microsoft-com:office:powerpoint" xmlns:com="http://schemas.openxmlformats.org/drawingml/2006/compatibility" xmlns:p14="http://schemas.microsoft.com/office/powerpoint/2010/main" xmlns:p15="http://schemas.microsoft.com/office/powerpoint/2012/main" xmlns:ahyp="http://schemas.microsoft.com/office/drawing/2018/hyperlinkcolor" xmlns:go="http://customooxmlschemas.google.com/" textRoundtripDataId="14"/>
+                    <go:slidesCustomData xmlns:go="http://customooxmlschemas.google.com/" xmlns:ahyp="http://schemas.microsoft.com/office/drawing/2018/hyperlinkcolor" xmlns:p15="http://schemas.microsoft.com/office/powerpoint/2012/main" xmlns:p14="http://schemas.microsoft.com/office/powerpoint/2010/main" xmlns:com="http://schemas.openxmlformats.org/drawingml/2006/compatibility" xmlns:pvml="urn:schemas-microsoft-com:office:powerpoint" xmlns:v="urn:schemas-microsoft-com:vml" xmlns:o="urn:schemas-microsoft-com:office:office" xmlns:dgm="http://schemas.openxmlformats.org/drawingml/2006/diagram" xmlns:c="http://schemas.openxmlformats.org/drawingml/2006/chart" xmlns:mv="urn:schemas-microsoft-com:mac:vml" xmlns:mc="http://schemas.openxmlformats.org/markup-compatibility/2006" xmlns="" textRoundtripDataId="14"/>
                   </a:ext>
                 </a:extLst>
               </a:rPr>
@@ -15216,7 +15216,7 @@
         </p:nvSpPr>
         <p:spPr>
           <a:xfrm>
-            <a:off x="2542389" y="2261015"/>
+            <a:off x="2761047" y="2261015"/>
             <a:ext cx="850723" cy="224229"/>
           </a:xfrm>
           <a:prstGeom prst="rect">
@@ -15237,7 +15237,7 @@
                 </a:solidFill>
                 <a:extLst>
                   <a:ext uri="http://customooxmlschemas.google.com/">
-                    <go:slidesCustomData xmlns="" xmlns:mc="http://schemas.openxmlformats.org/markup-compatibility/2006" xmlns:mv="urn:schemas-microsoft-com:mac:vml" xmlns:c="http://schemas.openxmlformats.org/drawingml/2006/chart" xmlns:dgm="http://schemas.openxmlformats.org/drawingml/2006/diagram" xmlns:o="urn:schemas-microsoft-com:office:office" xmlns:v="urn:schemas-microsoft-com:vml" xmlns:pvml="urn:schemas-microsoft-com:office:powerpoint" xmlns:com="http://schemas.openxmlformats.org/drawingml/2006/compatibility" xmlns:p14="http://schemas.microsoft.com/office/powerpoint/2010/main" xmlns:p15="http://schemas.microsoft.com/office/powerpoint/2012/main" xmlns:ahyp="http://schemas.microsoft.com/office/drawing/2018/hyperlinkcolor" xmlns:go="http://customooxmlschemas.google.com/" textRoundtripDataId="12"/>
+                    <go:slidesCustomData xmlns:go="http://customooxmlschemas.google.com/" xmlns:ahyp="http://schemas.microsoft.com/office/drawing/2018/hyperlinkcolor" xmlns:p15="http://schemas.microsoft.com/office/powerpoint/2012/main" xmlns:p14="http://schemas.microsoft.com/office/powerpoint/2010/main" xmlns:com="http://schemas.openxmlformats.org/drawingml/2006/compatibility" xmlns:pvml="urn:schemas-microsoft-com:office:powerpoint" xmlns:v="urn:schemas-microsoft-com:vml" xmlns:o="urn:schemas-microsoft-com:office:office" xmlns:dgm="http://schemas.openxmlformats.org/drawingml/2006/diagram" xmlns:c="http://schemas.openxmlformats.org/drawingml/2006/chart" xmlns:mv="urn:schemas-microsoft-com:mac:vml" xmlns:mc="http://schemas.openxmlformats.org/markup-compatibility/2006" xmlns="" textRoundtripDataId="12"/>
                   </a:ext>
                 </a:extLst>
               </a:rPr>

--- a/src/assets/slide_sample.pptx
+++ b/src/assets/slide_sample.pptx
@@ -278,7 +278,7 @@
       </p15:sldGuideLst>
     </p:ext>
     <p:ext uri="GoogleSlidesCustomDataVersion2">
-      <go:slidesCustomData xmlns="" xmlns:mc="http://schemas.openxmlformats.org/markup-compatibility/2006" xmlns:mv="urn:schemas-microsoft-com:mac:vml" xmlns:c="http://schemas.openxmlformats.org/drawingml/2006/chart" xmlns:dgm="http://schemas.openxmlformats.org/drawingml/2006/diagram" xmlns:o="urn:schemas-microsoft-com:office:office" xmlns:v="urn:schemas-microsoft-com:vml" xmlns:pvml="urn:schemas-microsoft-com:office:powerpoint" xmlns:com="http://schemas.openxmlformats.org/drawingml/2006/compatibility" xmlns:p14="http://schemas.microsoft.com/office/powerpoint/2010/main" xmlns:p15="http://schemas.microsoft.com/office/powerpoint/2012/main" xmlns:ahyp="http://schemas.microsoft.com/office/drawing/2018/hyperlinkcolor" xmlns:go="http://customooxmlschemas.google.com/" r:id="rId8" roundtripDataSignature="AMtx7mj+3mxE5o7GXHaj57Ss1rmUYwTV0A=="/>
+      <go:slidesCustomData xmlns:go="http://customooxmlschemas.google.com/" xmlns:ahyp="http://schemas.microsoft.com/office/drawing/2018/hyperlinkcolor" xmlns:p15="http://schemas.microsoft.com/office/powerpoint/2012/main" xmlns:p14="http://schemas.microsoft.com/office/powerpoint/2010/main" xmlns:com="http://schemas.openxmlformats.org/drawingml/2006/compatibility" xmlns:pvml="urn:schemas-microsoft-com:office:powerpoint" xmlns:v="urn:schemas-microsoft-com:vml" xmlns:o="urn:schemas-microsoft-com:office:office" xmlns:dgm="http://schemas.openxmlformats.org/drawingml/2006/diagram" xmlns:c="http://schemas.openxmlformats.org/drawingml/2006/chart" xmlns:mv="urn:schemas-microsoft-com:mac:vml" xmlns:mc="http://schemas.openxmlformats.org/markup-compatibility/2006" xmlns="" r:id="rId8" roundtripDataSignature="AMtx7mj+3mxE5o7GXHaj57Ss1rmUYwTV0A=="/>
     </p:ext>
   </p:extLst>
 </p:presentation>
@@ -11873,7 +11873,7 @@
                 <a:sym typeface="Arial"/>
                 <a:extLst>
                   <a:ext uri="http://customooxmlschemas.google.com/">
-                    <go:slidesCustomData xmlns="" xmlns:mc="http://schemas.openxmlformats.org/markup-compatibility/2006" xmlns:mv="urn:schemas-microsoft-com:mac:vml" xmlns:c="http://schemas.openxmlformats.org/drawingml/2006/chart" xmlns:dgm="http://schemas.openxmlformats.org/drawingml/2006/diagram" xmlns:o="urn:schemas-microsoft-com:office:office" xmlns:v="urn:schemas-microsoft-com:vml" xmlns:pvml="urn:schemas-microsoft-com:office:powerpoint" xmlns:com="http://schemas.openxmlformats.org/drawingml/2006/compatibility" xmlns:p14="http://schemas.microsoft.com/office/powerpoint/2010/main" xmlns:p15="http://schemas.microsoft.com/office/powerpoint/2012/main" xmlns:ahyp="http://schemas.microsoft.com/office/drawing/2018/hyperlinkcolor" xmlns:go="http://customooxmlschemas.google.com/" textRoundtripDataId="7"/>
+                    <go:slidesCustomData xmlns:go="http://customooxmlschemas.google.com/" xmlns:ahyp="http://schemas.microsoft.com/office/drawing/2018/hyperlinkcolor" xmlns:p15="http://schemas.microsoft.com/office/powerpoint/2012/main" xmlns:p14="http://schemas.microsoft.com/office/powerpoint/2010/main" xmlns:com="http://schemas.openxmlformats.org/drawingml/2006/compatibility" xmlns:pvml="urn:schemas-microsoft-com:office:powerpoint" xmlns:v="urn:schemas-microsoft-com:vml" xmlns:o="urn:schemas-microsoft-com:office:office" xmlns:dgm="http://schemas.openxmlformats.org/drawingml/2006/diagram" xmlns:c="http://schemas.openxmlformats.org/drawingml/2006/chart" xmlns:mv="urn:schemas-microsoft-com:mac:vml" xmlns:mc="http://schemas.openxmlformats.org/markup-compatibility/2006" xmlns="" textRoundtripDataId="7"/>
                   </a:ext>
                 </a:extLst>
               </a:rPr>
@@ -11914,13 +11914,13 @@
       </p:grpSpPr>
       <p:sp>
         <p:nvSpPr>
-          <p:cNvPr id="93" name="zu_area_ga"/>
+          <p:cNvPr id="93" name="parcel_area_ga"/>
           <p:cNvSpPr txBox="1"/>
           <p:nvPr/>
         </p:nvSpPr>
         <p:spPr>
           <a:xfrm>
-            <a:off x="2278518" y="3136646"/>
+            <a:off x="2244818" y="1648364"/>
             <a:ext cx="719796" cy="290167"/>
           </a:xfrm>
           <a:prstGeom prst="rect">
@@ -11985,7 +11985,7 @@
         </p:blipFill>
         <p:spPr>
           <a:xfrm>
-            <a:off x="7324420" y="1105908"/>
+            <a:off x="7324420" y="1443834"/>
             <a:ext cx="4056654" cy="4348335"/>
           </a:xfrm>
           <a:prstGeom prst="roundRect">
@@ -12013,7 +12013,7 @@
         </p:nvSpPr>
         <p:spPr>
           <a:xfrm>
-            <a:off x="2262676" y="3364760"/>
+            <a:off x="2228976" y="1876478"/>
             <a:ext cx="772409" cy="180178"/>
           </a:xfrm>
           <a:prstGeom prst="rect">
@@ -12043,7 +12043,7 @@
                 </a:solidFill>
                 <a:extLst>
                   <a:ext uri="http://customooxmlschemas.google.com/">
-                    <go:slidesCustomData xmlns:go="http://customooxmlschemas.google.com/" xmlns:ahyp="http://schemas.microsoft.com/office/drawing/2018/hyperlinkcolor" xmlns:p15="http://schemas.microsoft.com/office/powerpoint/2012/main" xmlns:p14="http://schemas.microsoft.com/office/powerpoint/2010/main" xmlns:com="http://schemas.openxmlformats.org/drawingml/2006/compatibility" xmlns:pvml="urn:schemas-microsoft-com:office:powerpoint" xmlns:v="urn:schemas-microsoft-com:vml" xmlns:o="urn:schemas-microsoft-com:office:office" xmlns:dgm="http://schemas.openxmlformats.org/drawingml/2006/diagram" xmlns:c="http://schemas.openxmlformats.org/drawingml/2006/chart" xmlns:mv="urn:schemas-microsoft-com:mac:vml" xmlns:mc="http://schemas.openxmlformats.org/markup-compatibility/2006" xmlns="" textRoundtripDataId="5"/>
+                    <go:slidesCustomData xmlns="" xmlns:mc="http://schemas.openxmlformats.org/markup-compatibility/2006" xmlns:mv="urn:schemas-microsoft-com:mac:vml" xmlns:c="http://schemas.openxmlformats.org/drawingml/2006/chart" xmlns:dgm="http://schemas.openxmlformats.org/drawingml/2006/diagram" xmlns:o="urn:schemas-microsoft-com:office:office" xmlns:v="urn:schemas-microsoft-com:vml" xmlns:pvml="urn:schemas-microsoft-com:office:powerpoint" xmlns:com="http://schemas.openxmlformats.org/drawingml/2006/compatibility" xmlns:p14="http://schemas.microsoft.com/office/powerpoint/2010/main" xmlns:p15="http://schemas.microsoft.com/office/powerpoint/2012/main" xmlns:ahyp="http://schemas.microsoft.com/office/drawing/2018/hyperlinkcolor" xmlns:go="http://customooxmlschemas.google.com/" textRoundtripDataId="5"/>
                   </a:ext>
                 </a:extLst>
               </a:rPr>
@@ -12108,14 +12108,14 @@
       </p:sp>
       <p:sp>
         <p:nvSpPr>
-          <p:cNvPr id="94" name="calc_area"/>
+          <p:cNvPr id="94" name="spp_gab"/>
           <p:cNvSpPr txBox="1"/>
           <p:nvPr/>
         </p:nvSpPr>
         <p:spPr>
           <a:xfrm>
-            <a:off x="650465" y="1295881"/>
-            <a:ext cx="671516" cy="290167"/>
+            <a:off x="577578" y="1633807"/>
+            <a:ext cx="1026533" cy="290167"/>
           </a:xfrm>
           <a:prstGeom prst="rect">
             <a:avLst/>
@@ -12151,7 +12151,7 @@
                 <a:sym typeface="Arial"/>
                 <a:extLst>
                   <a:ext uri="http://customooxmlschemas.google.com/">
-                    <go:slidesCustomData xmlns="" xmlns:mc="http://schemas.openxmlformats.org/markup-compatibility/2006" xmlns:mv="urn:schemas-microsoft-com:mac:vml" xmlns:c="http://schemas.openxmlformats.org/drawingml/2006/chart" xmlns:dgm="http://schemas.openxmlformats.org/drawingml/2006/diagram" xmlns:o="urn:schemas-microsoft-com:office:office" xmlns:v="urn:schemas-microsoft-com:vml" xmlns:pvml="urn:schemas-microsoft-com:office:powerpoint" xmlns:com="http://schemas.openxmlformats.org/drawingml/2006/compatibility" xmlns:p14="http://schemas.microsoft.com/office/powerpoint/2010/main" xmlns:p15="http://schemas.microsoft.com/office/powerpoint/2012/main" xmlns:ahyp="http://schemas.microsoft.com/office/drawing/2018/hyperlinkcolor" xmlns:go="http://customooxmlschemas.google.com/" textRoundtripDataId="0"/>
+                    <go:slidesCustomData xmlns:go="http://customooxmlschemas.google.com/" xmlns:ahyp="http://schemas.microsoft.com/office/drawing/2018/hyperlinkcolor" xmlns:p15="http://schemas.microsoft.com/office/powerpoint/2012/main" xmlns:p14="http://schemas.microsoft.com/office/powerpoint/2010/main" xmlns:com="http://schemas.openxmlformats.org/drawingml/2006/compatibility" xmlns:pvml="urn:schemas-microsoft-com:office:powerpoint" xmlns:v="urn:schemas-microsoft-com:vml" xmlns:o="urn:schemas-microsoft-com:office:office" xmlns:dgm="http://schemas.openxmlformats.org/drawingml/2006/diagram" xmlns:c="http://schemas.openxmlformats.org/drawingml/2006/chart" xmlns:mv="urn:schemas-microsoft-com:mac:vml" xmlns:mc="http://schemas.openxmlformats.org/markup-compatibility/2006" xmlns="" textRoundtripDataId="0"/>
                   </a:ext>
                 </a:extLst>
               </a:rPr>
@@ -12169,7 +12169,7 @@
         </p:nvSpPr>
         <p:spPr>
           <a:xfrm>
-            <a:off x="3923606" y="3580240"/>
+            <a:off x="3923606" y="3918166"/>
             <a:ext cx="5881500" cy="246300"/>
           </a:xfrm>
           <a:prstGeom prst="rect">
@@ -12223,7 +12223,7 @@
         </p:nvSpPr>
         <p:spPr>
           <a:xfrm>
-            <a:off x="4217559" y="2726707"/>
+            <a:off x="4217559" y="3064633"/>
             <a:ext cx="1883100" cy="312000"/>
           </a:xfrm>
           <a:prstGeom prst="rect">
@@ -12308,7 +12308,7 @@
         </p:nvSpPr>
         <p:spPr>
           <a:xfrm>
-            <a:off x="4141043" y="1233413"/>
+            <a:off x="4141043" y="1571339"/>
             <a:ext cx="2046300" cy="224100"/>
           </a:xfrm>
           <a:prstGeom prst="rect">
@@ -12373,7 +12373,7 @@
         </p:blipFill>
         <p:spPr>
           <a:xfrm>
-            <a:off x="4221229" y="1561190"/>
+            <a:off x="4221229" y="1899116"/>
             <a:ext cx="1915650" cy="1150200"/>
           </a:xfrm>
           <a:custGeom>
@@ -12437,7 +12437,7 @@
         </p:nvSpPr>
         <p:spPr>
           <a:xfrm>
-            <a:off x="9544712" y="5044525"/>
+            <a:off x="9544712" y="5382451"/>
             <a:ext cx="1701848" cy="237274"/>
           </a:xfrm>
           <a:prstGeom prst="roundRect">
@@ -12487,7 +12487,7 @@
         </p:nvSpPr>
         <p:spPr>
           <a:xfrm>
-            <a:off x="9933361" y="5098246"/>
+            <a:off x="9933361" y="5436172"/>
             <a:ext cx="1142942" cy="131896"/>
           </a:xfrm>
           <a:prstGeom prst="rect">
@@ -12545,7 +12545,7 @@
         </p:nvSpPr>
         <p:spPr>
           <a:xfrm>
-            <a:off x="9676535" y="5098876"/>
+            <a:off x="9676535" y="5436802"/>
             <a:ext cx="128571" cy="128571"/>
           </a:xfrm>
           <a:prstGeom prst="roundRect">
@@ -12605,7 +12605,7 @@
         </p:nvCxnSpPr>
         <p:spPr>
           <a:xfrm rot="10800000" flipH="1">
-            <a:off x="8604888" y="4672186"/>
+            <a:off x="8604888" y="5010112"/>
             <a:ext cx="965100" cy="111900"/>
           </a:xfrm>
           <a:prstGeom prst="bentConnector3">
@@ -12633,7 +12633,7 @@
         </p:nvCxnSpPr>
         <p:spPr>
           <a:xfrm rot="5400000">
-            <a:off x="7909773" y="3432890"/>
+            <a:off x="7909773" y="3770816"/>
             <a:ext cx="1911300" cy="444000"/>
           </a:xfrm>
           <a:prstGeom prst="bentConnector3">
@@ -12661,7 +12661,7 @@
         </p:nvSpPr>
         <p:spPr>
           <a:xfrm>
-            <a:off x="7453150" y="3019250"/>
+            <a:off x="7453150" y="3357176"/>
             <a:ext cx="1575259" cy="316493"/>
           </a:xfrm>
           <a:prstGeom prst="roundRect">
@@ -12711,7 +12711,7 @@
         </p:nvSpPr>
         <p:spPr>
           <a:xfrm>
-            <a:off x="7832193" y="3033861"/>
+            <a:off x="7832193" y="3371787"/>
             <a:ext cx="1035540" cy="131896"/>
           </a:xfrm>
           <a:prstGeom prst="rect">
@@ -12781,7 +12781,7 @@
         </p:nvSpPr>
         <p:spPr>
           <a:xfrm>
-            <a:off x="7574972" y="3057443"/>
+            <a:off x="7574972" y="3395369"/>
             <a:ext cx="128571" cy="128571"/>
           </a:xfrm>
           <a:prstGeom prst="roundRect">
@@ -12839,7 +12839,7 @@
         </p:nvSpPr>
         <p:spPr>
           <a:xfrm>
-            <a:off x="7309460" y="1105908"/>
+            <a:off x="7309460" y="1443834"/>
             <a:ext cx="4081761" cy="4348336"/>
           </a:xfrm>
           <a:prstGeom prst="roundRect">
@@ -12893,7 +12893,7 @@
         </p:nvSpPr>
         <p:spPr>
           <a:xfrm>
-            <a:off x="7451488" y="942733"/>
+            <a:off x="7451488" y="1280659"/>
             <a:ext cx="2537551" cy="202701"/>
           </a:xfrm>
           <a:prstGeom prst="roundRect">
@@ -12943,7 +12943,7 @@
         </p:nvSpPr>
         <p:spPr>
           <a:xfrm>
-            <a:off x="7451488" y="901738"/>
+            <a:off x="7451488" y="1239664"/>
             <a:ext cx="2832489" cy="290208"/>
           </a:xfrm>
           <a:prstGeom prst="rect">
@@ -13000,7 +13000,7 @@
         </p:blipFill>
         <p:spPr>
           <a:xfrm>
-            <a:off x="7460569" y="1688538"/>
+            <a:off x="7460569" y="2026464"/>
             <a:ext cx="1699928" cy="1280504"/>
           </a:xfrm>
           <a:prstGeom prst="roundRect">
@@ -13035,7 +13035,7 @@
         </p:blipFill>
         <p:spPr>
           <a:xfrm>
-            <a:off x="9544712" y="3769477"/>
+            <a:off x="9544712" y="4107403"/>
             <a:ext cx="1709447" cy="1273381"/>
           </a:xfrm>
           <a:prstGeom prst="roundRect">
@@ -13063,7 +13063,7 @@
         </p:nvSpPr>
         <p:spPr>
           <a:xfrm>
-            <a:off x="10285639" y="4246611"/>
+            <a:off x="10285639" y="4584537"/>
             <a:ext cx="494393" cy="244929"/>
           </a:xfrm>
           <a:custGeom>
@@ -13143,7 +13143,7 @@
         </p:nvSpPr>
         <p:spPr>
           <a:xfrm>
-            <a:off x="407988" y="368300"/>
+            <a:off x="407988" y="282162"/>
             <a:ext cx="11376025" cy="414125"/>
           </a:xfrm>
           <a:prstGeom prst="rect">
@@ -13184,7 +13184,7 @@
                 </a:solidFill>
                 <a:extLst>
                   <a:ext uri="http://customooxmlschemas.google.com/">
-                    <go:slidesCustomData xmlns="" xmlns:mc="http://schemas.openxmlformats.org/markup-compatibility/2006" xmlns:mv="urn:schemas-microsoft-com:mac:vml" xmlns:c="http://schemas.openxmlformats.org/drawingml/2006/chart" xmlns:dgm="http://schemas.openxmlformats.org/drawingml/2006/diagram" xmlns:o="urn:schemas-microsoft-com:office:office" xmlns:v="urn:schemas-microsoft-com:vml" xmlns:pvml="urn:schemas-microsoft-com:office:powerpoint" xmlns:com="http://schemas.openxmlformats.org/drawingml/2006/compatibility" xmlns:p14="http://schemas.microsoft.com/office/powerpoint/2010/main" xmlns:p15="http://schemas.microsoft.com/office/powerpoint/2012/main" xmlns:ahyp="http://schemas.microsoft.com/office/drawing/2018/hyperlinkcolor" xmlns:go="http://customooxmlschemas.google.com/" textRoundtripDataId="7"/>
+                    <go:slidesCustomData xmlns:go="http://customooxmlschemas.google.com/" xmlns:ahyp="http://schemas.microsoft.com/office/drawing/2018/hyperlinkcolor" xmlns:p15="http://schemas.microsoft.com/office/powerpoint/2012/main" xmlns:p14="http://schemas.microsoft.com/office/powerpoint/2010/main" xmlns:com="http://schemas.openxmlformats.org/drawingml/2006/compatibility" xmlns:pvml="urn:schemas-microsoft-com:office:powerpoint" xmlns:v="urn:schemas-microsoft-com:vml" xmlns:o="urn:schemas-microsoft-com:office:office" xmlns:dgm="http://schemas.openxmlformats.org/drawingml/2006/diagram" xmlns:c="http://schemas.openxmlformats.org/drawingml/2006/chart" xmlns:mv="urn:schemas-microsoft-com:mac:vml" xmlns:mc="http://schemas.openxmlformats.org/markup-compatibility/2006" xmlns="" textRoundtripDataId="7"/>
                   </a:ext>
                 </a:extLst>
               </a:rPr>
@@ -13216,7 +13216,7 @@
         </p:nvSpPr>
         <p:spPr>
           <a:xfrm>
-            <a:off x="4620902" y="3586816"/>
+            <a:off x="4620902" y="3924742"/>
             <a:ext cx="5119918" cy="246300"/>
           </a:xfrm>
           <a:prstGeom prst="rect">
@@ -13268,7 +13268,7 @@
         </p:nvSpPr>
         <p:spPr>
           <a:xfrm>
-            <a:off x="1068332" y="1342422"/>
+            <a:off x="1068332" y="1680348"/>
             <a:ext cx="618421" cy="224229"/>
           </a:xfrm>
           <a:prstGeom prst="rect">
@@ -13298,68 +13298,12 @@
                 </a:solidFill>
                 <a:extLst>
                   <a:ext uri="http://customooxmlschemas.google.com/">
-                    <go:slidesCustomData xmlns:go="http://customooxmlschemas.google.com/" xmlns:ahyp="http://schemas.microsoft.com/office/drawing/2018/hyperlinkcolor" xmlns:p15="http://schemas.microsoft.com/office/powerpoint/2012/main" xmlns:p14="http://schemas.microsoft.com/office/powerpoint/2010/main" xmlns:com="http://schemas.openxmlformats.org/drawingml/2006/compatibility" xmlns:pvml="urn:schemas-microsoft-com:office:powerpoint" xmlns:v="urn:schemas-microsoft-com:vml" xmlns:o="urn:schemas-microsoft-com:office:office" xmlns:dgm="http://schemas.openxmlformats.org/drawingml/2006/diagram" xmlns:c="http://schemas.openxmlformats.org/drawingml/2006/chart" xmlns:mv="urn:schemas-microsoft-com:mac:vml" xmlns:mc="http://schemas.openxmlformats.org/markup-compatibility/2006" xmlns="" textRoundtripDataId="9"/>
+                    <go:slidesCustomData xmlns="" xmlns:mc="http://schemas.openxmlformats.org/markup-compatibility/2006" xmlns:mv="urn:schemas-microsoft-com:mac:vml" xmlns:c="http://schemas.openxmlformats.org/drawingml/2006/chart" xmlns:dgm="http://schemas.openxmlformats.org/drawingml/2006/diagram" xmlns:o="urn:schemas-microsoft-com:office:office" xmlns:v="urn:schemas-microsoft-com:vml" xmlns:pvml="urn:schemas-microsoft-com:office:powerpoint" xmlns:com="http://schemas.openxmlformats.org/drawingml/2006/compatibility" xmlns:p14="http://schemas.microsoft.com/office/powerpoint/2010/main" xmlns:p15="http://schemas.microsoft.com/office/powerpoint/2012/main" xmlns:ahyp="http://schemas.microsoft.com/office/drawing/2018/hyperlinkcolor" xmlns:go="http://customooxmlschemas.google.com/" textRoundtripDataId="9"/>
                   </a:ext>
                 </a:extLst>
               </a:rPr>
               <a:t>тыс. м2</a:t>
             </a:r>
-          </a:p>
-        </p:txBody>
-      </p:sp>
-      <p:sp>
-        <p:nvSpPr>
-          <p:cNvPr id="4" name="cad_notes">
-            <a:extLst>
-              <a:ext uri="{FF2B5EF4-FFF2-40B4-BE49-F238E27FC236}">
-                <a16:creationId xmlns:a16="http://schemas.microsoft.com/office/drawing/2014/main" id="{608E5025-F873-36E6-B97C-59131FC51A6F}"/>
-              </a:ext>
-            </a:extLst>
-          </p:cNvPr>
-          <p:cNvSpPr txBox="1"/>
-          <p:nvPr/>
-        </p:nvSpPr>
-        <p:spPr>
-          <a:xfrm>
-            <a:off x="189243" y="6489700"/>
-            <a:ext cx="6868574" cy="180137"/>
-          </a:xfrm>
-          <a:prstGeom prst="rect">
-            <a:avLst/>
-          </a:prstGeom>
-          <a:noFill/>
-          <a:ln>
-            <a:noFill/>
-          </a:ln>
-        </p:spPr>
-        <p:txBody>
-          <a:bodyPr spcFirstLastPara="1" wrap="square" lIns="91425" tIns="45700" rIns="91425" bIns="45700" anchor="t" anchorCtr="0">
-            <a:spAutoFit/>
-          </a:bodyPr>
-          <a:lstStyle/>
-          <a:p>
-            <a:pPr marL="0" marR="0" lvl="0" indent="0" algn="l" rtl="0">
-              <a:spcBef>
-                <a:spcPts val="0"/>
-              </a:spcBef>
-              <a:spcAft>
-                <a:spcPts val="0"/>
-              </a:spcAft>
-              <a:buNone/>
-            </a:pPr>
-            <a:r>
-              <a:rPr lang="ru-RU" sz="571" dirty="0">
-                <a:solidFill>
-                  <a:schemeClr val="lt1"/>
-                </a:solidFill>
-                <a:latin typeface="Arial"/>
-                <a:ea typeface="Arial"/>
-                <a:cs typeface="Arial"/>
-                <a:sym typeface="Arial"/>
-              </a:rPr>
-              <a:t>* - Сноска с полным составом проекта</a:t>
-            </a:r>
-            <a:endParaRPr dirty="0"/>
           </a:p>
         </p:txBody>
       </p:sp>
@@ -13377,7 +13321,7 @@
         </p:nvSpPr>
         <p:spPr>
           <a:xfrm>
-            <a:off x="7837605" y="3182140"/>
+            <a:off x="7837605" y="3520066"/>
             <a:ext cx="1035540" cy="120931"/>
           </a:xfrm>
           <a:prstGeom prst="rect">
@@ -13441,7 +13385,7 @@
         </p:nvSpPr>
         <p:spPr>
           <a:xfrm>
-            <a:off x="514150" y="1155550"/>
+            <a:off x="514150" y="1493476"/>
             <a:ext cx="1202700" cy="598500"/>
           </a:xfrm>
           <a:prstGeom prst="roundRect">
@@ -13501,7 +13445,7 @@
         </p:nvSpPr>
         <p:spPr>
           <a:xfrm>
-            <a:off x="3687350" y="1221544"/>
+            <a:off x="3687350" y="1559470"/>
             <a:ext cx="2046300" cy="202200"/>
           </a:xfrm>
           <a:prstGeom prst="rect">
@@ -13553,7 +13497,7 @@
         </p:nvSpPr>
         <p:spPr>
           <a:xfrm>
-            <a:off x="641063" y="1051820"/>
+            <a:off x="641063" y="1389746"/>
             <a:ext cx="2177100" cy="205800"/>
           </a:xfrm>
           <a:prstGeom prst="roundRect">
@@ -13609,7 +13553,7 @@
         </p:nvSpPr>
         <p:spPr>
           <a:xfrm>
-            <a:off x="2160159" y="1155550"/>
+            <a:off x="2160159" y="1493476"/>
             <a:ext cx="1202700" cy="598500"/>
           </a:xfrm>
           <a:prstGeom prst="roundRect">
@@ -13669,7 +13613,7 @@
         </p:nvSpPr>
         <p:spPr>
           <a:xfrm>
-            <a:off x="520206" y="2127175"/>
+            <a:off x="520206" y="2465101"/>
             <a:ext cx="1202700" cy="598500"/>
           </a:xfrm>
           <a:prstGeom prst="roundRect">
@@ -13729,7 +13673,7 @@
         </p:nvSpPr>
         <p:spPr>
           <a:xfrm>
-            <a:off x="2166215" y="2127175"/>
+            <a:off x="2166215" y="2465101"/>
             <a:ext cx="1202700" cy="598500"/>
           </a:xfrm>
           <a:prstGeom prst="roundRect">
@@ -13789,7 +13733,7 @@
         </p:nvSpPr>
         <p:spPr>
           <a:xfrm>
-            <a:off x="493725" y="4070550"/>
+            <a:off x="493725" y="4163315"/>
             <a:ext cx="2927400" cy="1988700"/>
           </a:xfrm>
           <a:prstGeom prst="roundRect">
@@ -13849,7 +13793,7 @@
         </p:nvSpPr>
         <p:spPr>
           <a:xfrm>
-            <a:off x="632617" y="1021006"/>
+            <a:off x="632617" y="1358932"/>
             <a:ext cx="2181600" cy="290400"/>
           </a:xfrm>
           <a:prstGeom prst="rect">
@@ -13893,244 +13837,7 @@
       </p:sp>
       <p:sp>
         <p:nvSpPr>
-          <p:cNvPr id="18" name="Google Shape;120;p2">
-            <a:extLst>
-              <a:ext uri="{FF2B5EF4-FFF2-40B4-BE49-F238E27FC236}">
-                <a16:creationId xmlns:a16="http://schemas.microsoft.com/office/drawing/2014/main" id="{8F4B13AE-8218-7829-F3E5-B27C1618D1D4}"/>
-              </a:ext>
-            </a:extLst>
-          </p:cNvPr>
-          <p:cNvSpPr/>
-          <p:nvPr/>
-        </p:nvSpPr>
-        <p:spPr>
-          <a:xfrm>
-            <a:off x="520206" y="3036225"/>
-            <a:ext cx="1202700" cy="598500"/>
-          </a:xfrm>
-          <a:prstGeom prst="roundRect">
-            <a:avLst>
-              <a:gd name="adj" fmla="val 4594"/>
-            </a:avLst>
-          </a:prstGeom>
-          <a:noFill/>
-          <a:ln w="25400" cap="flat" cmpd="sng">
-            <a:solidFill>
-              <a:srgbClr val="009640"/>
-            </a:solidFill>
-            <a:prstDash val="solid"/>
-            <a:miter lim="800000"/>
-            <a:headEnd type="none" w="sm" len="sm"/>
-            <a:tailEnd type="none" w="sm" len="sm"/>
-          </a:ln>
-        </p:spPr>
-        <p:txBody>
-          <a:bodyPr spcFirstLastPara="1" wrap="square" lIns="91425" tIns="45700" rIns="91425" bIns="45700" anchor="ctr" anchorCtr="0">
-            <a:noAutofit/>
-          </a:bodyPr>
-          <a:lstStyle/>
-          <a:p>
-            <a:pPr marL="0" marR="0" lvl="0" indent="0" algn="ctr" rtl="0">
-              <a:spcBef>
-                <a:spcPts val="0"/>
-              </a:spcBef>
-              <a:spcAft>
-                <a:spcPts val="0"/>
-              </a:spcAft>
-              <a:buNone/>
-            </a:pPr>
-            <a:endParaRPr sz="1714">
-              <a:solidFill>
-                <a:schemeClr val="lt1"/>
-              </a:solidFill>
-              <a:latin typeface="Arial"/>
-              <a:ea typeface="Arial"/>
-              <a:cs typeface="Arial"/>
-              <a:sym typeface="Arial"/>
-            </a:endParaRPr>
-          </a:p>
-        </p:txBody>
-      </p:sp>
-      <p:sp>
-        <p:nvSpPr>
-          <p:cNvPr id="19" name="Google Shape;121;p2">
-            <a:extLst>
-              <a:ext uri="{FF2B5EF4-FFF2-40B4-BE49-F238E27FC236}">
-                <a16:creationId xmlns:a16="http://schemas.microsoft.com/office/drawing/2014/main" id="{EC2EB962-60A7-2F68-539A-EF419F0449B2}"/>
-              </a:ext>
-            </a:extLst>
-          </p:cNvPr>
-          <p:cNvSpPr/>
-          <p:nvPr/>
-        </p:nvSpPr>
-        <p:spPr>
-          <a:xfrm>
-            <a:off x="2166215" y="3028550"/>
-            <a:ext cx="1202700" cy="598500"/>
-          </a:xfrm>
-          <a:prstGeom prst="roundRect">
-            <a:avLst>
-              <a:gd name="adj" fmla="val 4594"/>
-            </a:avLst>
-          </a:prstGeom>
-          <a:noFill/>
-          <a:ln w="25400" cap="flat" cmpd="sng">
-            <a:solidFill>
-              <a:srgbClr val="009640"/>
-            </a:solidFill>
-            <a:prstDash val="solid"/>
-            <a:miter lim="800000"/>
-            <a:headEnd type="none" w="sm" len="sm"/>
-            <a:tailEnd type="none" w="sm" len="sm"/>
-          </a:ln>
-        </p:spPr>
-        <p:txBody>
-          <a:bodyPr spcFirstLastPara="1" wrap="square" lIns="91425" tIns="45700" rIns="91425" bIns="45700" anchor="ctr" anchorCtr="0">
-            <a:noAutofit/>
-          </a:bodyPr>
-          <a:lstStyle/>
-          <a:p>
-            <a:pPr marL="0" marR="0" lvl="0" indent="0" algn="ctr" rtl="0">
-              <a:spcBef>
-                <a:spcPts val="0"/>
-              </a:spcBef>
-              <a:spcAft>
-                <a:spcPts val="0"/>
-              </a:spcAft>
-              <a:buNone/>
-            </a:pPr>
-            <a:endParaRPr sz="1714">
-              <a:solidFill>
-                <a:schemeClr val="lt1"/>
-              </a:solidFill>
-              <a:latin typeface="Arial"/>
-              <a:ea typeface="Arial"/>
-              <a:cs typeface="Arial"/>
-              <a:sym typeface="Arial"/>
-            </a:endParaRPr>
-          </a:p>
-        </p:txBody>
-      </p:sp>
-      <p:sp>
-        <p:nvSpPr>
-          <p:cNvPr id="20" name="plotn_zastr">
-            <a:extLst>
-              <a:ext uri="{FF2B5EF4-FFF2-40B4-BE49-F238E27FC236}">
-                <a16:creationId xmlns:a16="http://schemas.microsoft.com/office/drawing/2014/main" id="{92254B76-86A8-2377-6E3D-6EF0BB0298F2}"/>
-              </a:ext>
-            </a:extLst>
-          </p:cNvPr>
-          <p:cNvSpPr txBox="1"/>
-          <p:nvPr/>
-        </p:nvSpPr>
-        <p:spPr>
-          <a:xfrm>
-            <a:off x="2208670" y="1311405"/>
-            <a:ext cx="1375500" cy="290400"/>
-          </a:xfrm>
-          <a:prstGeom prst="rect">
-            <a:avLst/>
-          </a:prstGeom>
-          <a:noFill/>
-          <a:ln>
-            <a:noFill/>
-          </a:ln>
-        </p:spPr>
-        <p:txBody>
-          <a:bodyPr spcFirstLastPara="1" wrap="square" lIns="91425" tIns="45700" rIns="91425" bIns="45700" anchor="t" anchorCtr="0">
-            <a:spAutoFit/>
-          </a:bodyPr>
-          <a:lstStyle/>
-          <a:p>
-            <a:pPr marL="0" marR="0" lvl="0" indent="0" algn="l" rtl="0">
-              <a:spcBef>
-                <a:spcPts val="0"/>
-              </a:spcBef>
-              <a:spcAft>
-                <a:spcPts val="0"/>
-              </a:spcAft>
-              <a:buNone/>
-            </a:pPr>
-            <a:r>
-              <a:rPr lang="en-US" sz="1286" b="1" dirty="0">
-                <a:solidFill>
-                  <a:schemeClr val="lt1"/>
-                </a:solidFill>
-                <a:extLst>
-                  <a:ext uri="http://customooxmlschemas.google.com/">
-                    <go:slidesCustomData xmlns:go="http://customooxmlschemas.google.com/" xmlns:ahyp="http://schemas.microsoft.com/office/drawing/2018/hyperlinkcolor" xmlns:p15="http://schemas.microsoft.com/office/powerpoint/2012/main" xmlns:p14="http://schemas.microsoft.com/office/powerpoint/2010/main" xmlns:com="http://schemas.openxmlformats.org/drawingml/2006/compatibility" xmlns:pvml="urn:schemas-microsoft-com:office:powerpoint" xmlns:v="urn:schemas-microsoft-com:vml" xmlns:o="urn:schemas-microsoft-com:office:office" xmlns:dgm="http://schemas.openxmlformats.org/drawingml/2006/diagram" xmlns:c="http://schemas.openxmlformats.org/drawingml/2006/chart" xmlns:mv="urn:schemas-microsoft-com:mac:vml" xmlns:mc="http://schemas.openxmlformats.org/markup-compatibility/2006" xmlns="" textRoundtripDataId="6"/>
-                  </a:ext>
-                </a:extLst>
-              </a:rPr>
-              <a:t>X</a:t>
-            </a:r>
-            <a:endParaRPr sz="571" dirty="0">
-              <a:solidFill>
-                <a:schemeClr val="lt1"/>
-              </a:solidFill>
-              <a:latin typeface="Arial"/>
-              <a:ea typeface="Arial"/>
-              <a:cs typeface="Arial"/>
-              <a:sym typeface="Arial"/>
-            </a:endParaRPr>
-          </a:p>
-        </p:txBody>
-      </p:sp>
-      <p:sp>
-        <p:nvSpPr>
-          <p:cNvPr id="21" name="Google Shape;123;p2">
-            <a:extLst>
-              <a:ext uri="{FF2B5EF4-FFF2-40B4-BE49-F238E27FC236}">
-                <a16:creationId xmlns:a16="http://schemas.microsoft.com/office/drawing/2014/main" id="{5F6478D3-EF11-1341-7C2C-89445A4CF08F}"/>
-              </a:ext>
-            </a:extLst>
-          </p:cNvPr>
-          <p:cNvSpPr txBox="1"/>
-          <p:nvPr/>
-        </p:nvSpPr>
-        <p:spPr>
-          <a:xfrm>
-            <a:off x="2208670" y="1561190"/>
-            <a:ext cx="1257300" cy="180300"/>
-          </a:xfrm>
-          <a:prstGeom prst="rect">
-            <a:avLst/>
-          </a:prstGeom>
-          <a:noFill/>
-          <a:ln>
-            <a:noFill/>
-          </a:ln>
-        </p:spPr>
-        <p:txBody>
-          <a:bodyPr spcFirstLastPara="1" wrap="square" lIns="91425" tIns="45700" rIns="91425" bIns="45700" anchor="t" anchorCtr="0">
-            <a:spAutoFit/>
-          </a:bodyPr>
-          <a:lstStyle/>
-          <a:p>
-            <a:pPr marL="0" marR="0" lvl="0" indent="0" algn="l" rtl="0">
-              <a:spcBef>
-                <a:spcPts val="0"/>
-              </a:spcBef>
-              <a:spcAft>
-                <a:spcPts val="0"/>
-              </a:spcAft>
-              <a:buNone/>
-            </a:pPr>
-            <a:r>
-              <a:rPr lang="ru-RU" sz="571" dirty="0">
-                <a:solidFill>
-                  <a:schemeClr val="lt1"/>
-                </a:solidFill>
-              </a:rPr>
-              <a:t>плотность застройки</a:t>
-            </a:r>
-            <a:endParaRPr dirty="0"/>
-          </a:p>
-        </p:txBody>
-      </p:sp>
-      <p:sp>
-        <p:nvSpPr>
-          <p:cNvPr id="22" name="Google Shape;124;p2">
+          <p:cNvPr id="22" name="investments">
             <a:extLst>
               <a:ext uri="{FF2B5EF4-FFF2-40B4-BE49-F238E27FC236}">
                 <a16:creationId xmlns:a16="http://schemas.microsoft.com/office/drawing/2014/main" id="{F24081A2-83FC-7EDD-99A7-2D7FCBDAF5D2}"/>
@@ -14142,7 +13849,7 @@
         </p:nvSpPr>
         <p:spPr>
           <a:xfrm>
-            <a:off x="641080" y="2237268"/>
+            <a:off x="2221056" y="2553105"/>
             <a:ext cx="585255" cy="290400"/>
           </a:xfrm>
           <a:prstGeom prst="rect">
@@ -14175,7 +13882,7 @@
                 </a:solidFill>
                 <a:extLst>
                   <a:ext uri="http://customooxmlschemas.google.com/">
-                    <go:slidesCustomData xmlns:go="http://customooxmlschemas.google.com/" xmlns:ahyp="http://schemas.microsoft.com/office/drawing/2018/hyperlinkcolor" xmlns:p15="http://schemas.microsoft.com/office/powerpoint/2012/main" xmlns:p14="http://schemas.microsoft.com/office/powerpoint/2010/main" xmlns:com="http://schemas.openxmlformats.org/drawingml/2006/compatibility" xmlns:pvml="urn:schemas-microsoft-com:office:powerpoint" xmlns:v="urn:schemas-microsoft-com:vml" xmlns:o="urn:schemas-microsoft-com:office:office" xmlns:dgm="http://schemas.openxmlformats.org/drawingml/2006/diagram" xmlns:c="http://schemas.openxmlformats.org/drawingml/2006/chart" xmlns:mv="urn:schemas-microsoft-com:mac:vml" xmlns:mc="http://schemas.openxmlformats.org/markup-compatibility/2006" xmlns="" textRoundtripDataId="8"/>
+                    <go:slidesCustomData xmlns="" xmlns:mc="http://schemas.openxmlformats.org/markup-compatibility/2006" xmlns:mv="urn:schemas-microsoft-com:mac:vml" xmlns:c="http://schemas.openxmlformats.org/drawingml/2006/chart" xmlns:dgm="http://schemas.openxmlformats.org/drawingml/2006/diagram" xmlns:o="urn:schemas-microsoft-com:office:office" xmlns:v="urn:schemas-microsoft-com:vml" xmlns:pvml="urn:schemas-microsoft-com:office:powerpoint" xmlns:com="http://schemas.openxmlformats.org/drawingml/2006/compatibility" xmlns:p14="http://schemas.microsoft.com/office/powerpoint/2010/main" xmlns:p15="http://schemas.microsoft.com/office/powerpoint/2012/main" xmlns:ahyp="http://schemas.microsoft.com/office/drawing/2018/hyperlinkcolor" xmlns:go="http://customooxmlschemas.google.com/" textRoundtripDataId="8"/>
                   </a:ext>
                 </a:extLst>
               </a:rPr>
@@ -14199,7 +13906,7 @@
         </p:nvSpPr>
         <p:spPr>
           <a:xfrm>
-            <a:off x="641067" y="2497946"/>
+            <a:off x="2221043" y="2813783"/>
             <a:ext cx="1257300" cy="180300"/>
           </a:xfrm>
           <a:prstGeom prst="rect">
@@ -14239,10 +13946,10 @@
       </p:sp>
       <p:sp>
         <p:nvSpPr>
-          <p:cNvPr id="24" name="area_m2">
+          <p:cNvPr id="27" name="Google Shape;129;p2">
             <a:extLst>
               <a:ext uri="{FF2B5EF4-FFF2-40B4-BE49-F238E27FC236}">
-                <a16:creationId xmlns:a16="http://schemas.microsoft.com/office/drawing/2014/main" id="{AD20FB8E-8F50-71AD-3394-57F7641BCDA0}"/>
+                <a16:creationId xmlns:a16="http://schemas.microsoft.com/office/drawing/2014/main" id="{00344DC5-28B2-1C2F-CEDC-29A95E0A60F1}"/>
               </a:ext>
             </a:extLst>
           </p:cNvPr>
@@ -14251,68 +13958,7 @@
         </p:nvSpPr>
         <p:spPr>
           <a:xfrm>
-            <a:off x="2267780" y="2212006"/>
-            <a:ext cx="637980" cy="290167"/>
-          </a:xfrm>
-          <a:prstGeom prst="rect">
-            <a:avLst/>
-          </a:prstGeom>
-          <a:noFill/>
-          <a:ln>
-            <a:noFill/>
-          </a:ln>
-        </p:spPr>
-        <p:txBody>
-          <a:bodyPr spcFirstLastPara="1" wrap="square" lIns="91425" tIns="45700" rIns="91425" bIns="45700" anchor="t" anchorCtr="0">
-            <a:spAutoFit/>
-          </a:bodyPr>
-          <a:lstStyle/>
-          <a:p>
-            <a:pPr marL="0" marR="0" lvl="0" indent="0" algn="l" rtl="0">
-              <a:spcBef>
-                <a:spcPts val="0"/>
-              </a:spcBef>
-              <a:spcAft>
-                <a:spcPts val="0"/>
-              </a:spcAft>
-              <a:buClr>
-                <a:srgbClr val="000000"/>
-              </a:buClr>
-              <a:buFont typeface="Arial"/>
-              <a:buNone/>
-            </a:pPr>
-            <a:r>
-              <a:rPr lang="ru-RU" sz="1286" b="1" dirty="0">
-                <a:solidFill>
-                  <a:schemeClr val="lt1"/>
-                </a:solidFill>
-                <a:extLst>
-                  <a:ext uri="http://customooxmlschemas.google.com/">
-                    <go:slidesCustomData xmlns:go="http://customooxmlschemas.google.com/" xmlns:ahyp="http://schemas.microsoft.com/office/drawing/2018/hyperlinkcolor" xmlns:p15="http://schemas.microsoft.com/office/powerpoint/2012/main" xmlns:p14="http://schemas.microsoft.com/office/powerpoint/2010/main" xmlns:com="http://schemas.openxmlformats.org/drawingml/2006/compatibility" xmlns:pvml="urn:schemas-microsoft-com:office:powerpoint" xmlns:v="urn:schemas-microsoft-com:vml" xmlns:o="urn:schemas-microsoft-com:office:office" xmlns:dgm="http://schemas.openxmlformats.org/drawingml/2006/diagram" xmlns:c="http://schemas.openxmlformats.org/drawingml/2006/chart" xmlns:mv="urn:schemas-microsoft-com:mac:vml" xmlns:mc="http://schemas.openxmlformats.org/markup-compatibility/2006" xmlns="" textRoundtripDataId="10"/>
-                  </a:ext>
-                </a:extLst>
-              </a:rPr>
-              <a:t>ХХ</a:t>
-            </a:r>
-            <a:endParaRPr dirty="0"/>
-          </a:p>
-        </p:txBody>
-      </p:sp>
-      <p:sp>
-        <p:nvSpPr>
-          <p:cNvPr id="25" name="Google Shape;127;p2">
-            <a:extLst>
-              <a:ext uri="{FF2B5EF4-FFF2-40B4-BE49-F238E27FC236}">
-                <a16:creationId xmlns:a16="http://schemas.microsoft.com/office/drawing/2014/main" id="{92C1425A-2C83-8DA2-97CB-25F213B5A4C1}"/>
-              </a:ext>
-            </a:extLst>
-          </p:cNvPr>
-          <p:cNvSpPr txBox="1"/>
-          <p:nvPr/>
-        </p:nvSpPr>
-        <p:spPr>
-          <a:xfrm>
-            <a:off x="2267767" y="2472684"/>
+            <a:off x="588630" y="4229409"/>
             <a:ext cx="1257300" cy="180300"/>
           </a:xfrm>
           <a:prstGeom prst="rect">
@@ -14339,146 +13985,14 @@
               <a:buNone/>
             </a:pPr>
             <a:r>
-              <a:rPr lang="ru-RU" sz="571">
+              <a:rPr lang="ru-RU" sz="571" dirty="0">
                 <a:solidFill>
                   <a:schemeClr val="lt1"/>
                 </a:solidFill>
               </a:rPr>
-              <a:t>площадь объекта</a:t>
+              <a:t>Характеристики проекта</a:t>
             </a:r>
-            <a:endParaRPr/>
-          </a:p>
-        </p:txBody>
-      </p:sp>
-      <p:sp>
-        <p:nvSpPr>
-          <p:cNvPr id="26" name="zu_number">
-            <a:extLst>
-              <a:ext uri="{FF2B5EF4-FFF2-40B4-BE49-F238E27FC236}">
-                <a16:creationId xmlns:a16="http://schemas.microsoft.com/office/drawing/2014/main" id="{FB4A0950-B4FF-DBDA-E910-39C7DCF7BA16}"/>
-              </a:ext>
-            </a:extLst>
-          </p:cNvPr>
-          <p:cNvSpPr txBox="1"/>
-          <p:nvPr/>
-        </p:nvSpPr>
-        <p:spPr>
-          <a:xfrm>
-            <a:off x="588650" y="4257625"/>
-            <a:ext cx="2689500" cy="488100"/>
-          </a:xfrm>
-          <a:prstGeom prst="rect">
-            <a:avLst/>
-          </a:prstGeom>
-          <a:noFill/>
-          <a:ln>
-            <a:noFill/>
-          </a:ln>
-        </p:spPr>
-        <p:txBody>
-          <a:bodyPr spcFirstLastPara="1" wrap="square" lIns="91425" tIns="45700" rIns="91425" bIns="45700" anchor="t" anchorCtr="0">
-            <a:spAutoFit/>
-          </a:bodyPr>
-          <a:lstStyle/>
-          <a:p>
-            <a:pPr marL="0" marR="0" lvl="0" indent="0" algn="l" rtl="0">
-              <a:spcBef>
-                <a:spcPts val="0"/>
-              </a:spcBef>
-              <a:spcAft>
-                <a:spcPts val="0"/>
-              </a:spcAft>
-              <a:buNone/>
-            </a:pPr>
-            <a:r>
-              <a:rPr lang="ru-RU" sz="1286" b="1" dirty="0">
-                <a:solidFill>
-                  <a:schemeClr val="lt1"/>
-                </a:solidFill>
-              </a:rPr>
-              <a:t>(</a:t>
-            </a:r>
-            <a:r>
-              <a:rPr lang="en-US" sz="1286" b="1" dirty="0">
-                <a:solidFill>
-                  <a:schemeClr val="lt1"/>
-                </a:solidFill>
-              </a:rPr>
-              <a:t>XXXX)</a:t>
-            </a:r>
-            <a:endParaRPr sz="1286" b="1" dirty="0">
-              <a:solidFill>
-                <a:schemeClr val="lt1"/>
-              </a:solidFill>
-            </a:endParaRPr>
-          </a:p>
-          <a:p>
-            <a:pPr marL="0" marR="0" lvl="0" indent="0" algn="l" rtl="0">
-              <a:spcBef>
-                <a:spcPts val="0"/>
-              </a:spcBef>
-              <a:spcAft>
-                <a:spcPts val="0"/>
-              </a:spcAft>
-              <a:buNone/>
-            </a:pPr>
-            <a:endParaRPr sz="1286" b="1" dirty="0">
-              <a:solidFill>
-                <a:schemeClr val="lt1"/>
-              </a:solidFill>
-            </a:endParaRPr>
-          </a:p>
-        </p:txBody>
-      </p:sp>
-      <p:sp>
-        <p:nvSpPr>
-          <p:cNvPr id="27" name="Google Shape;129;p2">
-            <a:extLst>
-              <a:ext uri="{FF2B5EF4-FFF2-40B4-BE49-F238E27FC236}">
-                <a16:creationId xmlns:a16="http://schemas.microsoft.com/office/drawing/2014/main" id="{00344DC5-28B2-1C2F-CEDC-29A95E0A60F1}"/>
-              </a:ext>
-            </a:extLst>
-          </p:cNvPr>
-          <p:cNvSpPr txBox="1"/>
-          <p:nvPr/>
-        </p:nvSpPr>
-        <p:spPr>
-          <a:xfrm>
-            <a:off x="588630" y="4143271"/>
-            <a:ext cx="1257300" cy="180300"/>
-          </a:xfrm>
-          <a:prstGeom prst="rect">
-            <a:avLst/>
-          </a:prstGeom>
-          <a:noFill/>
-          <a:ln>
-            <a:noFill/>
-          </a:ln>
-        </p:spPr>
-        <p:txBody>
-          <a:bodyPr spcFirstLastPara="1" wrap="square" lIns="91425" tIns="45700" rIns="91425" bIns="45700" anchor="t" anchorCtr="0">
-            <a:spAutoFit/>
-          </a:bodyPr>
-          <a:lstStyle/>
-          <a:p>
-            <a:pPr marL="0" marR="0" lvl="0" indent="0" algn="l" rtl="0">
-              <a:spcBef>
-                <a:spcPts val="0"/>
-              </a:spcBef>
-              <a:spcAft>
-                <a:spcPts val="0"/>
-              </a:spcAft>
-              <a:buNone/>
-            </a:pPr>
-            <a:r>
-              <a:rPr lang="ru-RU" sz="571">
-                <a:solidFill>
-                  <a:schemeClr val="lt1"/>
-                </a:solidFill>
-              </a:rPr>
-              <a:t>номер ЗУ</a:t>
-            </a:r>
-            <a:endParaRPr/>
+            <a:endParaRPr lang="ru-RU" sz="800" dirty="0"/>
           </a:p>
         </p:txBody>
       </p:sp>
@@ -14496,7 +14010,7 @@
         </p:nvSpPr>
         <p:spPr>
           <a:xfrm>
-            <a:off x="641092" y="3105927"/>
+            <a:off x="632629" y="2559427"/>
             <a:ext cx="1057500" cy="290400"/>
           </a:xfrm>
           <a:prstGeom prst="rect">
@@ -14548,7 +14062,7 @@
         </p:nvSpPr>
         <p:spPr>
           <a:xfrm>
-            <a:off x="641080" y="3339309"/>
+            <a:off x="632617" y="2792809"/>
             <a:ext cx="1257300" cy="180300"/>
           </a:xfrm>
           <a:prstGeom prst="rect">
@@ -14600,7 +14114,7 @@
         </p:nvSpPr>
         <p:spPr>
           <a:xfrm>
-            <a:off x="3983113" y="1155550"/>
+            <a:off x="3983113" y="1493476"/>
             <a:ext cx="2927400" cy="1988700"/>
           </a:xfrm>
           <a:prstGeom prst="roundRect">
@@ -14660,7 +14174,7 @@
         </p:nvSpPr>
         <p:spPr>
           <a:xfrm>
-            <a:off x="514151" y="773350"/>
+            <a:off x="514151" y="945626"/>
             <a:ext cx="1754100" cy="226500"/>
           </a:xfrm>
           <a:prstGeom prst="rect">
@@ -14693,7 +14207,7 @@
                 </a:solidFill>
                 <a:extLst>
                   <a:ext uri="http://customooxmlschemas.google.com/">
-                    <go:slidesCustomData xmlns:go="http://customooxmlschemas.google.com/" xmlns:ahyp="http://schemas.microsoft.com/office/drawing/2018/hyperlinkcolor" xmlns:p15="http://schemas.microsoft.com/office/powerpoint/2012/main" xmlns:p14="http://schemas.microsoft.com/office/powerpoint/2010/main" xmlns:com="http://schemas.openxmlformats.org/drawingml/2006/compatibility" xmlns:pvml="urn:schemas-microsoft-com:office:powerpoint" xmlns:v="urn:schemas-microsoft-com:vml" xmlns:o="urn:schemas-microsoft-com:office:office" xmlns:dgm="http://schemas.openxmlformats.org/drawingml/2006/diagram" xmlns:c="http://schemas.openxmlformats.org/drawingml/2006/chart" xmlns:mv="urn:schemas-microsoft-com:mac:vml" xmlns:mc="http://schemas.openxmlformats.org/markup-compatibility/2006" xmlns="" textRoundtripDataId="0"/>
+                    <go:slidesCustomData xmlns="" xmlns:mc="http://schemas.openxmlformats.org/markup-compatibility/2006" xmlns:mv="urn:schemas-microsoft-com:mac:vml" xmlns:c="http://schemas.openxmlformats.org/drawingml/2006/chart" xmlns:dgm="http://schemas.openxmlformats.org/drawingml/2006/diagram" xmlns:o="urn:schemas-microsoft-com:office:office" xmlns:v="urn:schemas-microsoft-com:vml" xmlns:pvml="urn:schemas-microsoft-com:office:powerpoint" xmlns:com="http://schemas.openxmlformats.org/drawingml/2006/compatibility" xmlns:p14="http://schemas.microsoft.com/office/powerpoint/2010/main" xmlns:p15="http://schemas.microsoft.com/office/powerpoint/2012/main" xmlns:ahyp="http://schemas.microsoft.com/office/drawing/2018/hyperlinkcolor" xmlns:go="http://customooxmlschemas.google.com/" textRoundtripDataId="0"/>
                   </a:ext>
                 </a:extLst>
               </a:rPr>
@@ -14725,7 +14239,7 @@
         </p:nvSpPr>
         <p:spPr>
           <a:xfrm>
-            <a:off x="654411" y="1542030"/>
+            <a:off x="654411" y="1879956"/>
             <a:ext cx="1257300" cy="180300"/>
           </a:xfrm>
           <a:prstGeom prst="rect">
@@ -14758,11 +14272,11 @@
                 </a:solidFill>
                 <a:extLst>
                   <a:ext uri="http://customooxmlschemas.google.com/">
-                    <go:slidesCustomData xmlns:lc="http://schemas.openxmlformats.org/drawingml/2006/lockedCanvas" xmlns:go="http://customooxmlschemas.google.com/" xmlns:ahyp="http://schemas.microsoft.com/office/drawing/2018/hyperlinkcolor" xmlns:p15="http://schemas.microsoft.com/office/powerpoint/2012/main" xmlns:p14="http://schemas.microsoft.com/office/powerpoint/2010/main" xmlns:com="http://schemas.openxmlformats.org/drawingml/2006/compatibility" xmlns:pvml="urn:schemas-microsoft-com:office:powerpoint" xmlns:v="urn:schemas-microsoft-com:vml" xmlns:o="urn:schemas-microsoft-com:office:office" xmlns:dgm="http://schemas.openxmlformats.org/drawingml/2006/diagram" xmlns:c="http://schemas.openxmlformats.org/drawingml/2006/chart" xmlns:mv="urn:schemas-microsoft-com:mac:vml" xmlns:mc="http://schemas.openxmlformats.org/markup-compatibility/2006" xmlns="" textRoundtripDataId="5"/>
+                    <go:slidesCustomData xmlns="" xmlns:mc="http://schemas.openxmlformats.org/markup-compatibility/2006" xmlns:mv="urn:schemas-microsoft-com:mac:vml" xmlns:c="http://schemas.openxmlformats.org/drawingml/2006/chart" xmlns:dgm="http://schemas.openxmlformats.org/drawingml/2006/diagram" xmlns:o="urn:schemas-microsoft-com:office:office" xmlns:v="urn:schemas-microsoft-com:vml" xmlns:pvml="urn:schemas-microsoft-com:office:powerpoint" xmlns:com="http://schemas.openxmlformats.org/drawingml/2006/compatibility" xmlns:p14="http://schemas.microsoft.com/office/powerpoint/2010/main" xmlns:p15="http://schemas.microsoft.com/office/powerpoint/2012/main" xmlns:ahyp="http://schemas.microsoft.com/office/drawing/2018/hyperlinkcolor" xmlns:go="http://customooxmlschemas.google.com/" xmlns:lc="http://schemas.openxmlformats.org/drawingml/2006/lockedCanvas" textRoundtripDataId="5"/>
                   </a:ext>
                 </a:extLst>
               </a:rPr>
-              <a:t>фактическая площадь</a:t>
+              <a:t>СПП проекта</a:t>
             </a:r>
           </a:p>
         </p:txBody>
@@ -14781,7 +14295,7 @@
         </p:nvSpPr>
         <p:spPr>
           <a:xfrm>
-            <a:off x="2484332" y="3181683"/>
+            <a:off x="2792689" y="1692338"/>
             <a:ext cx="482052" cy="224229"/>
           </a:xfrm>
           <a:prstGeom prst="rect">
@@ -14811,7 +14325,7 @@
                 </a:solidFill>
                 <a:extLst>
                   <a:ext uri="http://customooxmlschemas.google.com/">
-                    <go:slidesCustomData xmlns:go="http://customooxmlschemas.google.com/" xmlns:ahyp="http://schemas.microsoft.com/office/drawing/2018/hyperlinkcolor" xmlns:p15="http://schemas.microsoft.com/office/powerpoint/2012/main" xmlns:p14="http://schemas.microsoft.com/office/powerpoint/2010/main" xmlns:com="http://schemas.openxmlformats.org/drawingml/2006/compatibility" xmlns:pvml="urn:schemas-microsoft-com:office:powerpoint" xmlns:v="urn:schemas-microsoft-com:vml" xmlns:o="urn:schemas-microsoft-com:office:office" xmlns:dgm="http://schemas.openxmlformats.org/drawingml/2006/diagram" xmlns:c="http://schemas.openxmlformats.org/drawingml/2006/chart" xmlns:mv="urn:schemas-microsoft-com:mac:vml" xmlns:mc="http://schemas.openxmlformats.org/markup-compatibility/2006" xmlns="" textRoundtripDataId="12"/>
+                    <go:slidesCustomData xmlns="" xmlns:mc="http://schemas.openxmlformats.org/markup-compatibility/2006" xmlns:mv="urn:schemas-microsoft-com:mac:vml" xmlns:c="http://schemas.openxmlformats.org/drawingml/2006/chart" xmlns:dgm="http://schemas.openxmlformats.org/drawingml/2006/diagram" xmlns:o="urn:schemas-microsoft-com:office:office" xmlns:v="urn:schemas-microsoft-com:vml" xmlns:pvml="urn:schemas-microsoft-com:office:powerpoint" xmlns:com="http://schemas.openxmlformats.org/drawingml/2006/compatibility" xmlns:p14="http://schemas.microsoft.com/office/powerpoint/2010/main" xmlns:p15="http://schemas.microsoft.com/office/powerpoint/2012/main" xmlns:ahyp="http://schemas.microsoft.com/office/drawing/2018/hyperlinkcolor" xmlns:go="http://customooxmlschemas.google.com/" textRoundtripDataId="12"/>
                   </a:ext>
                 </a:extLst>
               </a:rPr>
@@ -14834,7 +14348,7 @@
         </p:nvSpPr>
         <p:spPr>
           <a:xfrm>
-            <a:off x="1143398" y="2273717"/>
+            <a:off x="2723374" y="2589554"/>
             <a:ext cx="810751" cy="224229"/>
           </a:xfrm>
           <a:prstGeom prst="rect">
@@ -14855,68 +14369,11 @@
                 </a:solidFill>
                 <a:extLst>
                   <a:ext uri="http://customooxmlschemas.google.com/">
-                    <go:slidesCustomData xmlns:go="http://customooxmlschemas.google.com/" xmlns:ahyp="http://schemas.microsoft.com/office/drawing/2018/hyperlinkcolor" xmlns:p15="http://schemas.microsoft.com/office/powerpoint/2012/main" xmlns:p14="http://schemas.microsoft.com/office/powerpoint/2010/main" xmlns:com="http://schemas.openxmlformats.org/drawingml/2006/compatibility" xmlns:pvml="urn:schemas-microsoft-com:office:powerpoint" xmlns:v="urn:schemas-microsoft-com:vml" xmlns:o="urn:schemas-microsoft-com:office:office" xmlns:dgm="http://schemas.openxmlformats.org/drawingml/2006/diagram" xmlns:c="http://schemas.openxmlformats.org/drawingml/2006/chart" xmlns:mv="urn:schemas-microsoft-com:mac:vml" xmlns:mc="http://schemas.openxmlformats.org/markup-compatibility/2006" xmlns="" textRoundtripDataId="9"/>
+                    <go:slidesCustomData xmlns="" xmlns:mc="http://schemas.openxmlformats.org/markup-compatibility/2006" xmlns:mv="urn:schemas-microsoft-com:mac:vml" xmlns:c="http://schemas.openxmlformats.org/drawingml/2006/chart" xmlns:dgm="http://schemas.openxmlformats.org/drawingml/2006/diagram" xmlns:o="urn:schemas-microsoft-com:office:office" xmlns:v="urn:schemas-microsoft-com:vml" xmlns:pvml="urn:schemas-microsoft-com:office:powerpoint" xmlns:com="http://schemas.openxmlformats.org/drawingml/2006/compatibility" xmlns:p14="http://schemas.microsoft.com/office/powerpoint/2010/main" xmlns:p15="http://schemas.microsoft.com/office/powerpoint/2012/main" xmlns:ahyp="http://schemas.microsoft.com/office/drawing/2018/hyperlinkcolor" xmlns:go="http://customooxmlschemas.google.com/" textRoundtripDataId="9"/>
                   </a:ext>
                 </a:extLst>
               </a:rPr>
               <a:t>млрд</a:t>
-            </a:r>
-          </a:p>
-        </p:txBody>
-      </p:sp>
-      <p:sp>
-        <p:nvSpPr>
-          <p:cNvPr id="44" name="TextBox 43">
-            <a:extLst>
-              <a:ext uri="{FF2B5EF4-FFF2-40B4-BE49-F238E27FC236}">
-                <a16:creationId xmlns:a16="http://schemas.microsoft.com/office/drawing/2014/main" id="{062D9647-87EE-0B8A-62CB-7B51F3930869}"/>
-              </a:ext>
-            </a:extLst>
-          </p:cNvPr>
-          <p:cNvSpPr txBox="1"/>
-          <p:nvPr/>
-        </p:nvSpPr>
-        <p:spPr>
-          <a:xfrm>
-            <a:off x="2689947" y="1350729"/>
-            <a:ext cx="1140018" cy="224229"/>
-          </a:xfrm>
-          <a:prstGeom prst="rect">
-            <a:avLst/>
-          </a:prstGeom>
-          <a:noFill/>
-        </p:spPr>
-        <p:txBody>
-          <a:bodyPr wrap="square">
-            <a:spAutoFit/>
-          </a:bodyPr>
-          <a:lstStyle/>
-          <a:p>
-            <a:r>
-              <a:rPr lang="ru-RU" sz="857" b="1" dirty="0" err="1">
-                <a:solidFill>
-                  <a:schemeClr val="lt1"/>
-                </a:solidFill>
-                <a:extLst>
-                  <a:ext uri="http://customooxmlschemas.google.com/">
-                    <go:slidesCustomData xmlns:go="http://customooxmlschemas.google.com/" xmlns:ahyp="http://schemas.microsoft.com/office/drawing/2018/hyperlinkcolor" xmlns:p15="http://schemas.microsoft.com/office/powerpoint/2012/main" xmlns:p14="http://schemas.microsoft.com/office/powerpoint/2010/main" xmlns:com="http://schemas.openxmlformats.org/drawingml/2006/compatibility" xmlns:pvml="urn:schemas-microsoft-com:office:powerpoint" xmlns:v="urn:schemas-microsoft-com:vml" xmlns:o="urn:schemas-microsoft-com:office:office" xmlns:dgm="http://schemas.openxmlformats.org/drawingml/2006/diagram" xmlns:c="http://schemas.openxmlformats.org/drawingml/2006/chart" xmlns:mv="urn:schemas-microsoft-com:mac:vml" xmlns:mc="http://schemas.openxmlformats.org/markup-compatibility/2006" xmlns="" textRoundtripDataId="12"/>
-                  </a:ext>
-                </a:extLst>
-              </a:rPr>
-              <a:t>кв.м</a:t>
-            </a:r>
-            <a:r>
-              <a:rPr lang="ru-RU" sz="857" b="1" dirty="0">
-                <a:solidFill>
-                  <a:schemeClr val="lt1"/>
-                </a:solidFill>
-                <a:extLst>
-                  <a:ext uri="http://customooxmlschemas.google.com/">
-                    <go:slidesCustomData xmlns:go="http://customooxmlschemas.google.com/" xmlns:ahyp="http://schemas.microsoft.com/office/drawing/2018/hyperlinkcolor" xmlns:p15="http://schemas.microsoft.com/office/powerpoint/2012/main" xmlns:p14="http://schemas.microsoft.com/office/powerpoint/2010/main" xmlns:com="http://schemas.openxmlformats.org/drawingml/2006/compatibility" xmlns:pvml="urn:schemas-microsoft-com:office:powerpoint" xmlns:v="urn:schemas-microsoft-com:vml" xmlns:o="urn:schemas-microsoft-com:office:office" xmlns:dgm="http://schemas.openxmlformats.org/drawingml/2006/diagram" xmlns:c="http://schemas.openxmlformats.org/drawingml/2006/chart" xmlns:mv="urn:schemas-microsoft-com:mac:vml" xmlns:mc="http://schemas.openxmlformats.org/markup-compatibility/2006" xmlns="" textRoundtripDataId="12"/>
-                  </a:ext>
-                </a:extLst>
-              </a:rPr>
-              <a:t>/Га</a:t>
             </a:r>
           </a:p>
         </p:txBody>
@@ -14935,68 +14392,8 @@
         </p:nvSpPr>
         <p:spPr>
           <a:xfrm>
-            <a:off x="7309475" y="5641523"/>
+            <a:off x="7309475" y="5979449"/>
             <a:ext cx="4056600" cy="257400"/>
-          </a:xfrm>
-          <a:prstGeom prst="roundRect">
-            <a:avLst>
-              <a:gd name="adj" fmla="val 4594"/>
-            </a:avLst>
-          </a:prstGeom>
-          <a:noFill/>
-          <a:ln w="25400" cap="flat" cmpd="sng">
-            <a:solidFill>
-              <a:srgbClr val="009640"/>
-            </a:solidFill>
-            <a:prstDash val="solid"/>
-            <a:miter lim="800000"/>
-            <a:headEnd type="none" w="sm" len="sm"/>
-            <a:tailEnd type="none" w="sm" len="sm"/>
-          </a:ln>
-        </p:spPr>
-        <p:txBody>
-          <a:bodyPr spcFirstLastPara="1" wrap="square" lIns="91425" tIns="45700" rIns="91425" bIns="45700" anchor="ctr" anchorCtr="0">
-            <a:noAutofit/>
-          </a:bodyPr>
-          <a:lstStyle/>
-          <a:p>
-            <a:pPr marL="0" marR="0" lvl="0" indent="0" algn="ctr" rtl="0">
-              <a:spcBef>
-                <a:spcPts val="0"/>
-              </a:spcBef>
-              <a:spcAft>
-                <a:spcPts val="0"/>
-              </a:spcAft>
-              <a:buNone/>
-            </a:pPr>
-            <a:endParaRPr sz="1714">
-              <a:solidFill>
-                <a:schemeClr val="lt1"/>
-              </a:solidFill>
-              <a:latin typeface="Arial"/>
-              <a:ea typeface="Arial"/>
-              <a:cs typeface="Arial"/>
-              <a:sym typeface="Arial"/>
-            </a:endParaRPr>
-          </a:p>
-        </p:txBody>
-      </p:sp>
-      <p:sp>
-        <p:nvSpPr>
-          <p:cNvPr id="46" name="Google Shape;119;p2">
-            <a:extLst>
-              <a:ext uri="{FF2B5EF4-FFF2-40B4-BE49-F238E27FC236}">
-                <a16:creationId xmlns:a16="http://schemas.microsoft.com/office/drawing/2014/main" id="{FBD03DED-8827-3976-DF77-1C32CB1450B1}"/>
-              </a:ext>
-            </a:extLst>
-          </p:cNvPr>
-          <p:cNvSpPr/>
-          <p:nvPr/>
-        </p:nvSpPr>
-        <p:spPr>
-          <a:xfrm>
-            <a:off x="7324424" y="6070198"/>
-            <a:ext cx="2245563" cy="598500"/>
           </a:xfrm>
           <a:prstGeom prst="roundRect">
             <a:avLst>
@@ -15055,7 +14452,7 @@
         </p:nvSpPr>
         <p:spPr>
           <a:xfrm>
-            <a:off x="7386130" y="5680069"/>
+            <a:off x="7386130" y="6017995"/>
             <a:ext cx="3902562" cy="180137"/>
           </a:xfrm>
           <a:prstGeom prst="rect">
@@ -15088,161 +14485,13 @@
                 </a:solidFill>
                 <a:extLst>
                   <a:ext uri="http://customooxmlschemas.google.com/">
-                    <go:slidesCustomData xmlns:go="http://customooxmlschemas.google.com/" xmlns:ahyp="http://schemas.microsoft.com/office/drawing/2018/hyperlinkcolor" xmlns:p15="http://schemas.microsoft.com/office/powerpoint/2012/main" xmlns:p14="http://schemas.microsoft.com/office/powerpoint/2010/main" xmlns:com="http://schemas.openxmlformats.org/drawingml/2006/compatibility" xmlns:pvml="urn:schemas-microsoft-com:office:powerpoint" xmlns:v="urn:schemas-microsoft-com:vml" xmlns:o="urn:schemas-microsoft-com:office:office" xmlns:dgm="http://schemas.openxmlformats.org/drawingml/2006/diagram" xmlns:c="http://schemas.openxmlformats.org/drawingml/2006/chart" xmlns:mv="urn:schemas-microsoft-com:mac:vml" xmlns:mc="http://schemas.openxmlformats.org/markup-compatibility/2006" xmlns="" textRoundtripDataId="14"/>
+                    <go:slidesCustomData xmlns="" xmlns:mc="http://schemas.openxmlformats.org/markup-compatibility/2006" xmlns:mv="urn:schemas-microsoft-com:mac:vml" xmlns:c="http://schemas.openxmlformats.org/drawingml/2006/chart" xmlns:dgm="http://schemas.openxmlformats.org/drawingml/2006/diagram" xmlns:o="urn:schemas-microsoft-com:office:office" xmlns:v="urn:schemas-microsoft-com:vml" xmlns:pvml="urn:schemas-microsoft-com:office:powerpoint" xmlns:com="http://schemas.openxmlformats.org/drawingml/2006/compatibility" xmlns:p14="http://schemas.microsoft.com/office/powerpoint/2010/main" xmlns:p15="http://schemas.microsoft.com/office/powerpoint/2012/main" xmlns:ahyp="http://schemas.microsoft.com/office/drawing/2018/hyperlinkcolor" xmlns:go="http://customooxmlschemas.google.com/" textRoundtripDataId="14"/>
                   </a:ext>
                 </a:extLst>
               </a:rPr>
               <a:t>Ссылка на рендеры</a:t>
             </a:r>
             <a:endParaRPr dirty="0"/>
-          </a:p>
-        </p:txBody>
-      </p:sp>
-      <p:sp>
-        <p:nvSpPr>
-          <p:cNvPr id="48" name="Google Shape;131;p2">
-            <a:extLst>
-              <a:ext uri="{FF2B5EF4-FFF2-40B4-BE49-F238E27FC236}">
-                <a16:creationId xmlns:a16="http://schemas.microsoft.com/office/drawing/2014/main" id="{5EE1CD75-AFE1-E99B-8D46-489693D090A5}"/>
-              </a:ext>
-            </a:extLst>
-          </p:cNvPr>
-          <p:cNvSpPr txBox="1"/>
-          <p:nvPr/>
-        </p:nvSpPr>
-        <p:spPr>
-          <a:xfrm>
-            <a:off x="7386117" y="6409682"/>
-            <a:ext cx="1257300" cy="180300"/>
-          </a:xfrm>
-          <a:prstGeom prst="rect">
-            <a:avLst/>
-          </a:prstGeom>
-          <a:noFill/>
-          <a:ln>
-            <a:noFill/>
-          </a:ln>
-        </p:spPr>
-        <p:txBody>
-          <a:bodyPr spcFirstLastPara="1" wrap="square" lIns="91425" tIns="45700" rIns="91425" bIns="45700" anchor="t" anchorCtr="0">
-            <a:spAutoFit/>
-          </a:bodyPr>
-          <a:lstStyle/>
-          <a:p>
-            <a:pPr marL="0" marR="0" lvl="0" indent="0" algn="l" rtl="0">
-              <a:spcBef>
-                <a:spcPts val="0"/>
-              </a:spcBef>
-              <a:spcAft>
-                <a:spcPts val="0"/>
-              </a:spcAft>
-              <a:buNone/>
-            </a:pPr>
-            <a:r>
-              <a:rPr lang="ru-RU" sz="571">
-                <a:solidFill>
-                  <a:schemeClr val="lt1"/>
-                </a:solidFill>
-              </a:rPr>
-              <a:t>стадия</a:t>
-            </a:r>
-            <a:endParaRPr/>
-          </a:p>
-        </p:txBody>
-      </p:sp>
-      <p:sp>
-        <p:nvSpPr>
-          <p:cNvPr id="49" name="stage">
-            <a:extLst>
-              <a:ext uri="{FF2B5EF4-FFF2-40B4-BE49-F238E27FC236}">
-                <a16:creationId xmlns:a16="http://schemas.microsoft.com/office/drawing/2014/main" id="{73C7AB51-A8F9-C0EB-406E-8DB54D1BEEEA}"/>
-              </a:ext>
-            </a:extLst>
-          </p:cNvPr>
-          <p:cNvSpPr txBox="1"/>
-          <p:nvPr/>
-        </p:nvSpPr>
-        <p:spPr>
-          <a:xfrm>
-            <a:off x="7386117" y="6113516"/>
-            <a:ext cx="1057500" cy="290400"/>
-          </a:xfrm>
-          <a:prstGeom prst="rect">
-            <a:avLst/>
-          </a:prstGeom>
-          <a:noFill/>
-          <a:ln>
-            <a:noFill/>
-          </a:ln>
-        </p:spPr>
-        <p:txBody>
-          <a:bodyPr spcFirstLastPara="1" wrap="square" lIns="91425" tIns="45700" rIns="91425" bIns="45700" anchor="t" anchorCtr="0">
-            <a:spAutoFit/>
-          </a:bodyPr>
-          <a:lstStyle/>
-          <a:p>
-            <a:pPr marL="0" marR="0" lvl="0" indent="0" algn="l" rtl="0">
-              <a:spcBef>
-                <a:spcPts val="0"/>
-              </a:spcBef>
-              <a:spcAft>
-                <a:spcPts val="0"/>
-              </a:spcAft>
-              <a:buNone/>
-            </a:pPr>
-            <a:r>
-              <a:rPr lang="ru-RU" sz="1286" b="1" dirty="0">
-                <a:solidFill>
-                  <a:schemeClr val="lt1"/>
-                </a:solidFill>
-              </a:rPr>
-              <a:t>Стадия</a:t>
-            </a:r>
-            <a:endParaRPr dirty="0"/>
-          </a:p>
-        </p:txBody>
-      </p:sp>
-      <p:sp>
-        <p:nvSpPr>
-          <p:cNvPr id="52" name="TextBox 51">
-            <a:extLst>
-              <a:ext uri="{FF2B5EF4-FFF2-40B4-BE49-F238E27FC236}">
-                <a16:creationId xmlns:a16="http://schemas.microsoft.com/office/drawing/2014/main" id="{7FA3A6D6-4FCD-8257-A3FA-11A20AA9B2AE}"/>
-              </a:ext>
-            </a:extLst>
-          </p:cNvPr>
-          <p:cNvSpPr txBox="1"/>
-          <p:nvPr/>
-        </p:nvSpPr>
-        <p:spPr>
-          <a:xfrm>
-            <a:off x="2761047" y="2261015"/>
-            <a:ext cx="850723" cy="224229"/>
-          </a:xfrm>
-          <a:prstGeom prst="rect">
-            <a:avLst/>
-          </a:prstGeom>
-          <a:noFill/>
-        </p:spPr>
-        <p:txBody>
-          <a:bodyPr wrap="square">
-            <a:spAutoFit/>
-          </a:bodyPr>
-          <a:lstStyle/>
-          <a:p>
-            <a:r>
-              <a:rPr lang="ru-RU" sz="857" b="1" dirty="0">
-                <a:solidFill>
-                  <a:schemeClr val="lt1"/>
-                </a:solidFill>
-                <a:extLst>
-                  <a:ext uri="http://customooxmlschemas.google.com/">
-                    <go:slidesCustomData xmlns:go="http://customooxmlschemas.google.com/" xmlns:ahyp="http://schemas.microsoft.com/office/drawing/2018/hyperlinkcolor" xmlns:p15="http://schemas.microsoft.com/office/powerpoint/2012/main" xmlns:p14="http://schemas.microsoft.com/office/powerpoint/2010/main" xmlns:com="http://schemas.openxmlformats.org/drawingml/2006/compatibility" xmlns:pvml="urn:schemas-microsoft-com:office:powerpoint" xmlns:v="urn:schemas-microsoft-com:vml" xmlns:o="urn:schemas-microsoft-com:office:office" xmlns:dgm="http://schemas.openxmlformats.org/drawingml/2006/diagram" xmlns:c="http://schemas.openxmlformats.org/drawingml/2006/chart" xmlns:mv="urn:schemas-microsoft-com:mac:vml" xmlns:mc="http://schemas.openxmlformats.org/markup-compatibility/2006" xmlns="" textRoundtripDataId="12"/>
-                  </a:ext>
-                </a:extLst>
-              </a:rPr>
-              <a:t>тыс.м2</a:t>
-            </a:r>
           </a:p>
         </p:txBody>
       </p:sp>
